--- a/projektaufgabe_1/Abschlusspraesentation_proj1.pptx
+++ b/projektaufgabe_1/Abschlusspraesentation_proj1.pptx
@@ -5,17 +5,20 @@
     <p:sldMasterId id="2147483672" r:id="rId4"/>
   </p:sldMasterIdLst>
   <p:notesMasterIdLst>
-    <p:notesMasterId r:id="rId10"/>
+    <p:notesMasterId r:id="rId13"/>
   </p:notesMasterIdLst>
   <p:handoutMasterIdLst>
-    <p:handoutMasterId r:id="rId11"/>
+    <p:handoutMasterId r:id="rId14"/>
   </p:handoutMasterIdLst>
   <p:sldIdLst>
     <p:sldId id="256" r:id="rId5"/>
     <p:sldId id="258" r:id="rId6"/>
-    <p:sldId id="259" r:id="rId7"/>
-    <p:sldId id="260" r:id="rId8"/>
-    <p:sldId id="262" r:id="rId9"/>
+    <p:sldId id="263" r:id="rId7"/>
+    <p:sldId id="259" r:id="rId8"/>
+    <p:sldId id="264" r:id="rId9"/>
+    <p:sldId id="265" r:id="rId10"/>
+    <p:sldId id="260" r:id="rId11"/>
+    <p:sldId id="262" r:id="rId12"/>
   </p:sldIdLst>
   <p:sldSz cx="12192000" cy="6858000"/>
   <p:notesSz cx="6858000" cy="9144000"/>
@@ -123,6 +126,14 @@
     </p:ext>
   </p:extLst>
 </p:presentation>
+</file>
+
+<file path=ppt/revisionInfo.xml><?xml version="1.0" encoding="utf-8"?>
+<p1510:revInfo xmlns:a="http://schemas.openxmlformats.org/drawingml/2006/main" xmlns:r="http://schemas.openxmlformats.org/officeDocument/2006/relationships" xmlns:p1510="http://schemas.microsoft.com/office/powerpoint/2015/10/main">
+  <p1510:revLst>
+    <p1510:client id="{4077DACF-3584-3D4F-7BFA-1E60E06C2E51}" v="544" dt="2026-04-27T11:43:37.487"/>
+  </p1510:revLst>
+</p1510:revInfo>
 </file>
 
 <file path=ppt/diagrams/colors1.xml><?xml version="1.0" encoding="utf-8"?>
@@ -4014,7 +4025,7 @@
           <a:p>
             <a:fld id="{BA1CF449-96F2-4140-9ACD-00D2DB603D3A}" type="datetimeFigureOut">
               <a:rPr lang="de-DE" smtClean="0"/>
-              <a:t>26.04.2026</a:t>
+              <a:t>27.04.2026</a:t>
             </a:fld>
             <a:endParaRPr lang="de-DE"/>
           </a:p>
@@ -4092,7 +4103,7 @@
           <a:p>
             <a:fld id="{7A49A195-F19A-4BDD-A61C-6C0960F12D85}" type="slidenum">
               <a:rPr lang="de-DE" smtClean="0"/>
-              <a:t>‹Nr.›</a:t>
+              <a:t>‹#›</a:t>
             </a:fld>
             <a:endParaRPr lang="de-DE"/>
           </a:p>
@@ -4192,7 +4203,7 @@
           <a:p>
             <a:fld id="{7EA953E0-B6BA-4FDC-A9D7-5E3E2548A0EF}" type="datetimeFigureOut">
               <a:rPr lang="de-DE" noProof="0" smtClean="0"/>
-              <a:t>26.04.2026</a:t>
+              <a:t>27.04.2026</a:t>
             </a:fld>
             <a:endParaRPr lang="de-DE" noProof="0"/>
           </a:p>
@@ -4350,7 +4361,7 @@
           <a:p>
             <a:fld id="{DEF059D1-1E64-4095-816B-E25F58AA521B}" type="slidenum">
               <a:rPr lang="de-DE" noProof="0" smtClean="0"/>
-              <a:t>‹Nr.›</a:t>
+              <a:t>‹#›</a:t>
             </a:fld>
             <a:endParaRPr lang="de-DE" noProof="0"/>
           </a:p>
@@ -4633,7 +4644,13 @@
   <p:cSld>
     <p:spTree>
       <p:nvGrpSpPr>
-        <p:cNvPr id="1" name=""/>
+        <p:cNvPr id="1" name="">
+          <a:extLst>
+            <a:ext uri="{FF2B5EF4-FFF2-40B4-BE49-F238E27FC236}">
+              <a16:creationId xmlns:a16="http://schemas.microsoft.com/office/drawing/2014/main" id="{BC3A5E47-9F8C-73C9-9B12-E450E559BC87}"/>
+            </a:ext>
+          </a:extLst>
+        </p:cNvPr>
         <p:cNvGrpSpPr/>
         <p:nvPr/>
       </p:nvGrpSpPr>
@@ -4647,7 +4664,13 @@
       </p:grpSpPr>
       <p:sp>
         <p:nvSpPr>
-          <p:cNvPr id="2" name="Folienbildplatzhalter 1"/>
+          <p:cNvPr id="2" name="Folienbildplatzhalter 1">
+            <a:extLst>
+              <a:ext uri="{FF2B5EF4-FFF2-40B4-BE49-F238E27FC236}">
+                <a16:creationId xmlns:a16="http://schemas.microsoft.com/office/drawing/2014/main" id="{D2E1E52C-9CB1-DA3C-B54C-AC47D292913D}"/>
+              </a:ext>
+            </a:extLst>
+          </p:cNvPr>
           <p:cNvSpPr>
             <a:spLocks noGrp="1" noRot="1" noChangeAspect="1"/>
           </p:cNvSpPr>
@@ -4659,7 +4682,13 @@
       </p:sp>
       <p:sp>
         <p:nvSpPr>
-          <p:cNvPr id="3" name="Notizenplatzhalter 2"/>
+          <p:cNvPr id="3" name="Notizenplatzhalter 2">
+            <a:extLst>
+              <a:ext uri="{FF2B5EF4-FFF2-40B4-BE49-F238E27FC236}">
+                <a16:creationId xmlns:a16="http://schemas.microsoft.com/office/drawing/2014/main" id="{7EAF1470-E374-142B-AD81-C4298B8CA117}"/>
+              </a:ext>
+            </a:extLst>
+          </p:cNvPr>
           <p:cNvSpPr>
             <a:spLocks noGrp="1"/>
           </p:cNvSpPr>
@@ -4678,7 +4707,13 @@
       </p:sp>
       <p:sp>
         <p:nvSpPr>
-          <p:cNvPr id="4" name="Foliennummernplatzhalter 3"/>
+          <p:cNvPr id="4" name="Foliennummernplatzhalter 3">
+            <a:extLst>
+              <a:ext uri="{FF2B5EF4-FFF2-40B4-BE49-F238E27FC236}">
+                <a16:creationId xmlns:a16="http://schemas.microsoft.com/office/drawing/2014/main" id="{DEBBD2CB-5A2F-F877-E07A-80033210918A}"/>
+              </a:ext>
+            </a:extLst>
+          </p:cNvPr>
           <p:cNvSpPr>
             <a:spLocks noGrp="1"/>
           </p:cNvSpPr>
@@ -4702,7 +4737,7 @@
     </p:spTree>
     <p:extLst>
       <p:ext uri="{BB962C8B-B14F-4D97-AF65-F5344CB8AC3E}">
-        <p14:creationId xmlns:p14="http://schemas.microsoft.com/office/powerpoint/2010/main" val="748623255"/>
+        <p14:creationId xmlns:p14="http://schemas.microsoft.com/office/powerpoint/2010/main" val="1519205283"/>
       </p:ext>
     </p:extLst>
   </p:cSld>
@@ -4777,6 +4812,306 @@
           <a:p>
             <a:fld id="{DEF059D1-1E64-4095-816B-E25F58AA521B}" type="slidenum">
               <a:rPr lang="de-DE" smtClean="0"/>
+              <a:t>3</a:t>
+            </a:fld>
+            <a:endParaRPr lang="de-DE"/>
+          </a:p>
+        </p:txBody>
+      </p:sp>
+    </p:spTree>
+    <p:extLst>
+      <p:ext uri="{BB962C8B-B14F-4D97-AF65-F5344CB8AC3E}">
+        <p14:creationId xmlns:p14="http://schemas.microsoft.com/office/powerpoint/2010/main" val="748623255"/>
+      </p:ext>
+    </p:extLst>
+  </p:cSld>
+  <p:clrMapOvr>
+    <a:masterClrMapping/>
+  </p:clrMapOvr>
+</p:notes>
+</file>
+
+<file path=ppt/notesSlides/notesSlide5.xml><?xml version="1.0" encoding="utf-8"?>
+<p:notes xmlns:a="http://schemas.openxmlformats.org/drawingml/2006/main" xmlns:r="http://schemas.openxmlformats.org/officeDocument/2006/relationships" xmlns:p="http://schemas.openxmlformats.org/presentationml/2006/main">
+  <p:cSld>
+    <p:spTree>
+      <p:nvGrpSpPr>
+        <p:cNvPr id="1" name="">
+          <a:extLst>
+            <a:ext uri="{FF2B5EF4-FFF2-40B4-BE49-F238E27FC236}">
+              <a16:creationId xmlns:a16="http://schemas.microsoft.com/office/drawing/2014/main" id="{C3D8D370-7FED-CDDB-D915-010548C52B1D}"/>
+            </a:ext>
+          </a:extLst>
+        </p:cNvPr>
+        <p:cNvGrpSpPr/>
+        <p:nvPr/>
+      </p:nvGrpSpPr>
+      <p:grpSpPr>
+        <a:xfrm>
+          <a:off x="0" y="0"/>
+          <a:ext cx="0" cy="0"/>
+          <a:chOff x="0" y="0"/>
+          <a:chExt cx="0" cy="0"/>
+        </a:xfrm>
+      </p:grpSpPr>
+      <p:sp>
+        <p:nvSpPr>
+          <p:cNvPr id="2" name="Folienbildplatzhalter 1">
+            <a:extLst>
+              <a:ext uri="{FF2B5EF4-FFF2-40B4-BE49-F238E27FC236}">
+                <a16:creationId xmlns:a16="http://schemas.microsoft.com/office/drawing/2014/main" id="{89572507-0EC3-E37F-76BC-45D4B2559A9A}"/>
+              </a:ext>
+            </a:extLst>
+          </p:cNvPr>
+          <p:cNvSpPr>
+            <a:spLocks noGrp="1" noRot="1" noChangeAspect="1"/>
+          </p:cNvSpPr>
+          <p:nvPr>
+            <p:ph type="sldImg"/>
+          </p:nvPr>
+        </p:nvSpPr>
+        <p:spPr/>
+      </p:sp>
+      <p:sp>
+        <p:nvSpPr>
+          <p:cNvPr id="3" name="Notizenplatzhalter 2">
+            <a:extLst>
+              <a:ext uri="{FF2B5EF4-FFF2-40B4-BE49-F238E27FC236}">
+                <a16:creationId xmlns:a16="http://schemas.microsoft.com/office/drawing/2014/main" id="{9031693E-5CDD-B7E0-CF8A-EDB017E1A7F8}"/>
+              </a:ext>
+            </a:extLst>
+          </p:cNvPr>
+          <p:cNvSpPr>
+            <a:spLocks noGrp="1"/>
+          </p:cNvSpPr>
+          <p:nvPr>
+            <p:ph type="body" idx="1"/>
+          </p:nvPr>
+        </p:nvSpPr>
+        <p:spPr/>
+        <p:txBody>
+          <a:bodyPr/>
+          <a:lstStyle/>
+          <a:p>
+            <a:endParaRPr lang="de-DE"/>
+          </a:p>
+        </p:txBody>
+      </p:sp>
+      <p:sp>
+        <p:nvSpPr>
+          <p:cNvPr id="4" name="Foliennummernplatzhalter 3">
+            <a:extLst>
+              <a:ext uri="{FF2B5EF4-FFF2-40B4-BE49-F238E27FC236}">
+                <a16:creationId xmlns:a16="http://schemas.microsoft.com/office/drawing/2014/main" id="{B715219C-0EB4-E9B4-95B1-7BED20D6764B}"/>
+              </a:ext>
+            </a:extLst>
+          </p:cNvPr>
+          <p:cNvSpPr>
+            <a:spLocks noGrp="1"/>
+          </p:cNvSpPr>
+          <p:nvPr>
+            <p:ph type="sldNum" sz="quarter" idx="5"/>
+          </p:nvPr>
+        </p:nvSpPr>
+        <p:spPr/>
+        <p:txBody>
+          <a:bodyPr/>
+          <a:lstStyle/>
+          <a:p>
+            <a:fld id="{DEF059D1-1E64-4095-816B-E25F58AA521B}" type="slidenum">
+              <a:rPr lang="de-DE" smtClean="0"/>
+              <a:t>4</a:t>
+            </a:fld>
+            <a:endParaRPr lang="de-DE"/>
+          </a:p>
+        </p:txBody>
+      </p:sp>
+    </p:spTree>
+    <p:extLst>
+      <p:ext uri="{BB962C8B-B14F-4D97-AF65-F5344CB8AC3E}">
+        <p14:creationId xmlns:p14="http://schemas.microsoft.com/office/powerpoint/2010/main" val="3414223961"/>
+      </p:ext>
+    </p:extLst>
+  </p:cSld>
+  <p:clrMapOvr>
+    <a:masterClrMapping/>
+  </p:clrMapOvr>
+</p:notes>
+</file>
+
+<file path=ppt/notesSlides/notesSlide6.xml><?xml version="1.0" encoding="utf-8"?>
+<p:notes xmlns:a="http://schemas.openxmlformats.org/drawingml/2006/main" xmlns:r="http://schemas.openxmlformats.org/officeDocument/2006/relationships" xmlns:p="http://schemas.openxmlformats.org/presentationml/2006/main">
+  <p:cSld>
+    <p:spTree>
+      <p:nvGrpSpPr>
+        <p:cNvPr id="1" name="">
+          <a:extLst>
+            <a:ext uri="{FF2B5EF4-FFF2-40B4-BE49-F238E27FC236}">
+              <a16:creationId xmlns:a16="http://schemas.microsoft.com/office/drawing/2014/main" id="{F6C2CAD6-07AE-B317-5645-72441950CC17}"/>
+            </a:ext>
+          </a:extLst>
+        </p:cNvPr>
+        <p:cNvGrpSpPr/>
+        <p:nvPr/>
+      </p:nvGrpSpPr>
+      <p:grpSpPr>
+        <a:xfrm>
+          <a:off x="0" y="0"/>
+          <a:ext cx="0" cy="0"/>
+          <a:chOff x="0" y="0"/>
+          <a:chExt cx="0" cy="0"/>
+        </a:xfrm>
+      </p:grpSpPr>
+      <p:sp>
+        <p:nvSpPr>
+          <p:cNvPr id="2" name="Folienbildplatzhalter 1">
+            <a:extLst>
+              <a:ext uri="{FF2B5EF4-FFF2-40B4-BE49-F238E27FC236}">
+                <a16:creationId xmlns:a16="http://schemas.microsoft.com/office/drawing/2014/main" id="{4C4D91C3-8D2B-905C-E62B-334607BBDCA9}"/>
+              </a:ext>
+            </a:extLst>
+          </p:cNvPr>
+          <p:cNvSpPr>
+            <a:spLocks noGrp="1" noRot="1" noChangeAspect="1"/>
+          </p:cNvSpPr>
+          <p:nvPr>
+            <p:ph type="sldImg"/>
+          </p:nvPr>
+        </p:nvSpPr>
+        <p:spPr/>
+      </p:sp>
+      <p:sp>
+        <p:nvSpPr>
+          <p:cNvPr id="3" name="Notizenplatzhalter 2">
+            <a:extLst>
+              <a:ext uri="{FF2B5EF4-FFF2-40B4-BE49-F238E27FC236}">
+                <a16:creationId xmlns:a16="http://schemas.microsoft.com/office/drawing/2014/main" id="{B8AF6DE4-0B44-E9D4-2D04-D2208AB067AA}"/>
+              </a:ext>
+            </a:extLst>
+          </p:cNvPr>
+          <p:cNvSpPr>
+            <a:spLocks noGrp="1"/>
+          </p:cNvSpPr>
+          <p:nvPr>
+            <p:ph type="body" idx="1"/>
+          </p:nvPr>
+        </p:nvSpPr>
+        <p:spPr/>
+        <p:txBody>
+          <a:bodyPr/>
+          <a:lstStyle/>
+          <a:p>
+            <a:endParaRPr lang="de-DE"/>
+          </a:p>
+        </p:txBody>
+      </p:sp>
+      <p:sp>
+        <p:nvSpPr>
+          <p:cNvPr id="4" name="Foliennummernplatzhalter 3">
+            <a:extLst>
+              <a:ext uri="{FF2B5EF4-FFF2-40B4-BE49-F238E27FC236}">
+                <a16:creationId xmlns:a16="http://schemas.microsoft.com/office/drawing/2014/main" id="{F4A4161E-3FA2-505E-A97D-2BD061BDF642}"/>
+              </a:ext>
+            </a:extLst>
+          </p:cNvPr>
+          <p:cNvSpPr>
+            <a:spLocks noGrp="1"/>
+          </p:cNvSpPr>
+          <p:nvPr>
+            <p:ph type="sldNum" sz="quarter" idx="5"/>
+          </p:nvPr>
+        </p:nvSpPr>
+        <p:spPr/>
+        <p:txBody>
+          <a:bodyPr/>
+          <a:lstStyle/>
+          <a:p>
+            <a:fld id="{DEF059D1-1E64-4095-816B-E25F58AA521B}" type="slidenum">
+              <a:rPr lang="de-DE" smtClean="0"/>
+              <a:t>6</a:t>
+            </a:fld>
+            <a:endParaRPr lang="de-DE"/>
+          </a:p>
+        </p:txBody>
+      </p:sp>
+    </p:spTree>
+    <p:extLst>
+      <p:ext uri="{BB962C8B-B14F-4D97-AF65-F5344CB8AC3E}">
+        <p14:creationId xmlns:p14="http://schemas.microsoft.com/office/powerpoint/2010/main" val="329167103"/>
+      </p:ext>
+    </p:extLst>
+  </p:cSld>
+  <p:clrMapOvr>
+    <a:masterClrMapping/>
+  </p:clrMapOvr>
+</p:notes>
+</file>
+
+<file path=ppt/notesSlides/notesSlide7.xml><?xml version="1.0" encoding="utf-8"?>
+<p:notes xmlns:a="http://schemas.openxmlformats.org/drawingml/2006/main" xmlns:r="http://schemas.openxmlformats.org/officeDocument/2006/relationships" xmlns:p="http://schemas.openxmlformats.org/presentationml/2006/main">
+  <p:cSld>
+    <p:spTree>
+      <p:nvGrpSpPr>
+        <p:cNvPr id="1" name=""/>
+        <p:cNvGrpSpPr/>
+        <p:nvPr/>
+      </p:nvGrpSpPr>
+      <p:grpSpPr>
+        <a:xfrm>
+          <a:off x="0" y="0"/>
+          <a:ext cx="0" cy="0"/>
+          <a:chOff x="0" y="0"/>
+          <a:chExt cx="0" cy="0"/>
+        </a:xfrm>
+      </p:grpSpPr>
+      <p:sp>
+        <p:nvSpPr>
+          <p:cNvPr id="2" name="Folienbildplatzhalter 1"/>
+          <p:cNvSpPr>
+            <a:spLocks noGrp="1" noRot="1" noChangeAspect="1"/>
+          </p:cNvSpPr>
+          <p:nvPr>
+            <p:ph type="sldImg"/>
+          </p:nvPr>
+        </p:nvSpPr>
+        <p:spPr/>
+      </p:sp>
+      <p:sp>
+        <p:nvSpPr>
+          <p:cNvPr id="3" name="Notizenplatzhalter 2"/>
+          <p:cNvSpPr>
+            <a:spLocks noGrp="1"/>
+          </p:cNvSpPr>
+          <p:nvPr>
+            <p:ph type="body" idx="1"/>
+          </p:nvPr>
+        </p:nvSpPr>
+        <p:spPr/>
+        <p:txBody>
+          <a:bodyPr/>
+          <a:lstStyle/>
+          <a:p>
+            <a:endParaRPr lang="de-DE"/>
+          </a:p>
+        </p:txBody>
+      </p:sp>
+      <p:sp>
+        <p:nvSpPr>
+          <p:cNvPr id="4" name="Foliennummernplatzhalter 3"/>
+          <p:cNvSpPr>
+            <a:spLocks noGrp="1"/>
+          </p:cNvSpPr>
+          <p:nvPr>
+            <p:ph type="sldNum" sz="quarter" idx="5"/>
+          </p:nvPr>
+        </p:nvSpPr>
+        <p:spPr/>
+        <p:txBody>
+          <a:bodyPr/>
+          <a:lstStyle/>
+          <a:p>
+            <a:fld id="{DEF059D1-1E64-4095-816B-E25F58AA521B}" type="slidenum">
+              <a:rPr lang="de-DE" smtClean="0"/>
               <a:t>4</a:t>
             </a:fld>
             <a:endParaRPr lang="de-DE"/>
@@ -4796,7 +5131,7 @@
 </p:notes>
 </file>
 
-<file path=ppt/notesSlides/notesSlide5.xml><?xml version="1.0" encoding="utf-8"?>
+<file path=ppt/notesSlides/notesSlide8.xml><?xml version="1.0" encoding="utf-8"?>
 <p:notes xmlns:a="http://schemas.openxmlformats.org/drawingml/2006/main" xmlns:r="http://schemas.openxmlformats.org/officeDocument/2006/relationships" xmlns:p="http://schemas.openxmlformats.org/presentationml/2006/main">
   <p:cSld>
     <p:spTree>
@@ -5157,7 +5492,7 @@
             <a:pPr rtl="0"/>
             <a:fld id="{6F017FFA-7AEE-4C00-88EF-1712D868907B}" type="datetime1">
               <a:rPr lang="de-DE" noProof="0" smtClean="0"/>
-              <a:t>26.04.2026</a:t>
+              <a:t>27.04.2026</a:t>
             </a:fld>
             <a:endParaRPr lang="de-DE" noProof="0"/>
           </a:p>
@@ -5233,8 +5568,8 @@
             <a:pPr rtl="0"/>
             <a:fld id="{D57F1E4F-1CFF-5643-939E-217C01CDF565}" type="slidenum">
               <a:rPr lang="de-DE" noProof="0" smtClean="0"/>
-              <a:pPr/>
-              <a:t>‹Nr.›</a:t>
+              <a:pPr rtl="0"/>
+              <a:t>‹#›</a:t>
             </a:fld>
             <a:endParaRPr lang="de-DE" noProof="0"/>
           </a:p>
@@ -5422,7 +5757,7 @@
             <a:pPr rtl="0"/>
             <a:fld id="{E40C8376-9E33-4792-89DD-E496184A2796}" type="datetime1">
               <a:rPr lang="de-DE" noProof="0" smtClean="0"/>
-              <a:t>26.04.2026</a:t>
+              <a:t>27.04.2026</a:t>
             </a:fld>
             <a:endParaRPr lang="de-DE" noProof="0"/>
           </a:p>
@@ -5466,8 +5801,8 @@
             <a:pPr rtl="0"/>
             <a:fld id="{D57F1E4F-1CFF-5643-939E-217C01CDF565}" type="slidenum">
               <a:rPr lang="de-DE" noProof="0" smtClean="0"/>
-              <a:pPr/>
-              <a:t>‹Nr.›</a:t>
+              <a:pPr rtl="0"/>
+              <a:t>‹#›</a:t>
             </a:fld>
             <a:endParaRPr lang="de-DE" noProof="0"/>
           </a:p>
@@ -5660,7 +5995,7 @@
             <a:pPr rtl="0"/>
             <a:fld id="{3B2E4CCC-08DB-477E-9152-1DAD05168712}" type="datetime1">
               <a:rPr lang="de-DE" noProof="0" smtClean="0"/>
-              <a:t>26.04.2026</a:t>
+              <a:t>27.04.2026</a:t>
             </a:fld>
             <a:endParaRPr lang="de-DE" noProof="0"/>
           </a:p>
@@ -5725,8 +6060,8 @@
             <a:pPr rtl="0"/>
             <a:fld id="{D57F1E4F-1CFF-5643-939E-217C01CDF565}" type="slidenum">
               <a:rPr lang="de-DE" noProof="0" smtClean="0"/>
-              <a:pPr/>
-              <a:t>‹Nr.›</a:t>
+              <a:pPr rtl="0"/>
+              <a:t>‹#›</a:t>
             </a:fld>
             <a:endParaRPr lang="de-DE" noProof="0"/>
           </a:p>
@@ -5910,7 +6245,7 @@
             <a:pPr rtl="0"/>
             <a:fld id="{9500A958-47F8-4A25-9D65-93789F465065}" type="datetime1">
               <a:rPr lang="de-DE" noProof="0" smtClean="0"/>
-              <a:t>26.04.2026</a:t>
+              <a:t>27.04.2026</a:t>
             </a:fld>
             <a:endParaRPr lang="de-DE" noProof="0"/>
           </a:p>
@@ -5959,8 +6294,8 @@
             <a:pPr rtl="0"/>
             <a:fld id="{D57F1E4F-1CFF-5643-939E-217C01CDF565}" type="slidenum">
               <a:rPr lang="de-DE" noProof="0" smtClean="0"/>
-              <a:pPr/>
-              <a:t>‹Nr.›</a:t>
+              <a:pPr rtl="0"/>
+              <a:t>‹#›</a:t>
             </a:fld>
             <a:endParaRPr lang="de-DE" noProof="0"/>
           </a:p>
@@ -6221,7 +6556,7 @@
             <a:pPr rtl="0"/>
             <a:fld id="{52FD7EF8-B80C-4EAF-BDE9-3F6BA4E2A20F}" type="datetime1">
               <a:rPr lang="de-DE" noProof="0" smtClean="0"/>
-              <a:t>26.04.2026</a:t>
+              <a:t>27.04.2026</a:t>
             </a:fld>
             <a:endParaRPr lang="de-DE" noProof="0"/>
           </a:p>
@@ -6287,8 +6622,8 @@
             <a:pPr rtl="0"/>
             <a:fld id="{D57F1E4F-1CFF-5643-939E-217C01CDF565}" type="slidenum">
               <a:rPr lang="de-DE" noProof="0" smtClean="0"/>
-              <a:pPr/>
-              <a:t>‹Nr.›</a:t>
+              <a:pPr rtl="0"/>
+              <a:t>‹#›</a:t>
             </a:fld>
             <a:endParaRPr lang="de-DE" noProof="0"/>
           </a:p>
@@ -6532,7 +6867,7 @@
             <a:pPr rtl="0"/>
             <a:fld id="{ECF5CBA0-3018-4AED-9709-ED5ED6DE6464}" type="datetime1">
               <a:rPr lang="de-DE" noProof="0" smtClean="0"/>
-              <a:t>26.04.2026</a:t>
+              <a:t>27.04.2026</a:t>
             </a:fld>
             <a:endParaRPr lang="de-DE" noProof="0"/>
           </a:p>
@@ -6576,8 +6911,8 @@
             <a:pPr rtl="0"/>
             <a:fld id="{D57F1E4F-1CFF-5643-939E-217C01CDF565}" type="slidenum">
               <a:rPr lang="de-DE" noProof="0" smtClean="0"/>
-              <a:pPr/>
-              <a:t>‹Nr.›</a:t>
+              <a:pPr rtl="0"/>
+              <a:t>‹#›</a:t>
             </a:fld>
             <a:endParaRPr lang="de-DE" noProof="0"/>
           </a:p>
@@ -6956,7 +7291,7 @@
             <a:pPr rtl="0"/>
             <a:fld id="{3C9E23F0-8CA4-4891-BD20-E4745AC04CDA}" type="datetime1">
               <a:rPr lang="de-DE" noProof="0" smtClean="0"/>
-              <a:t>26.04.2026</a:t>
+              <a:t>27.04.2026</a:t>
             </a:fld>
             <a:endParaRPr lang="de-DE" noProof="0"/>
           </a:p>
@@ -7000,8 +7335,8 @@
             <a:pPr rtl="0"/>
             <a:fld id="{D57F1E4F-1CFF-5643-939E-217C01CDF565}" type="slidenum">
               <a:rPr lang="de-DE" noProof="0" smtClean="0"/>
-              <a:pPr/>
-              <a:t>‹Nr.›</a:t>
+              <a:pPr rtl="0"/>
+              <a:t>‹#›</a:t>
             </a:fld>
             <a:endParaRPr lang="de-DE" noProof="0"/>
           </a:p>
@@ -7055,7 +7390,7 @@
             <a:pPr rtl="0"/>
             <a:fld id="{97049BD8-EDBB-43F8-A43A-C3DFCBD8BA18}" type="datetime1">
               <a:rPr lang="de-DE" noProof="0" smtClean="0"/>
-              <a:t>26.04.2026</a:t>
+              <a:t>27.04.2026</a:t>
             </a:fld>
             <a:endParaRPr lang="de-DE" noProof="0"/>
           </a:p>
@@ -7099,8 +7434,8 @@
             <a:pPr rtl="0"/>
             <a:fld id="{D57F1E4F-1CFF-5643-939E-217C01CDF565}" type="slidenum">
               <a:rPr lang="de-DE" noProof="0" smtClean="0"/>
-              <a:pPr/>
-              <a:t>‹Nr.›</a:t>
+              <a:pPr rtl="0"/>
+              <a:t>‹#›</a:t>
             </a:fld>
             <a:endParaRPr lang="de-DE" noProof="0"/>
           </a:p>
@@ -7221,7 +7556,7 @@
             <a:pPr rtl="0"/>
             <a:fld id="{71C89A48-29B7-4D5A-8AB0-E4BA246CFAD2}" type="datetime1">
               <a:rPr lang="de-DE" noProof="0" smtClean="0"/>
-              <a:t>26.04.2026</a:t>
+              <a:t>27.04.2026</a:t>
             </a:fld>
             <a:endParaRPr lang="de-DE" noProof="0"/>
           </a:p>
@@ -7265,8 +7600,8 @@
             <a:pPr rtl="0"/>
             <a:fld id="{D57F1E4F-1CFF-5643-939E-217C01CDF565}" type="slidenum">
               <a:rPr lang="de-DE" noProof="0" smtClean="0"/>
-              <a:pPr/>
-              <a:t>‹Nr.›</a:t>
+              <a:pPr rtl="0"/>
+              <a:t>‹#›</a:t>
             </a:fld>
             <a:endParaRPr lang="de-DE" noProof="0"/>
           </a:p>
@@ -7602,7 +7937,7 @@
             <a:pPr rtl="0"/>
             <a:fld id="{AFD730BD-5937-405C-BD95-FF3ACE1D618D}" type="datetime1">
               <a:rPr lang="de-DE" noProof="0" smtClean="0"/>
-              <a:t>26.04.2026</a:t>
+              <a:t>27.04.2026</a:t>
             </a:fld>
             <a:endParaRPr lang="de-DE" noProof="0"/>
           </a:p>
@@ -7668,8 +8003,8 @@
             <a:pPr rtl="0"/>
             <a:fld id="{D57F1E4F-1CFF-5643-939E-217C01CDF565}" type="slidenum">
               <a:rPr lang="de-DE" noProof="0" smtClean="0"/>
-              <a:pPr/>
-              <a:t>‹Nr.›</a:t>
+              <a:pPr rtl="0"/>
+              <a:t>‹#›</a:t>
             </a:fld>
             <a:endParaRPr lang="de-DE" noProof="0"/>
           </a:p>
@@ -7895,7 +8230,7 @@
             <a:pPr rtl="0"/>
             <a:fld id="{F7AB63DA-8489-4CDE-978B-BB7BCFF91C84}" type="datetime1">
               <a:rPr lang="de-DE" noProof="0" smtClean="0"/>
-              <a:t>26.04.2026</a:t>
+              <a:t>27.04.2026</a:t>
             </a:fld>
             <a:endParaRPr lang="de-DE" noProof="0"/>
           </a:p>
@@ -7939,8 +8274,8 @@
             <a:pPr rtl="0"/>
             <a:fld id="{D57F1E4F-1CFF-5643-939E-217C01CDF565}" type="slidenum">
               <a:rPr lang="de-DE" noProof="0" smtClean="0"/>
-              <a:pPr/>
-              <a:t>‹Nr.›</a:t>
+              <a:pPr rtl="0"/>
+              <a:t>‹#›</a:t>
             </a:fld>
             <a:endParaRPr lang="de-DE" noProof="0"/>
           </a:p>
@@ -8109,7 +8444,7 @@
             <a:pPr rtl="0"/>
             <a:fld id="{16D808DD-B590-408B-8826-B4C3892F22C7}" type="datetime1">
               <a:rPr lang="de-DE" noProof="0" smtClean="0"/>
-              <a:t>26.04.2026</a:t>
+              <a:t>27.04.2026</a:t>
             </a:fld>
             <a:endParaRPr lang="de-DE" noProof="0"/>
           </a:p>
@@ -8185,8 +8520,8 @@
             <a:pPr rtl="0"/>
             <a:fld id="{D57F1E4F-1CFF-5643-939E-217C01CDF565}" type="slidenum">
               <a:rPr lang="de-DE" noProof="0" smtClean="0"/>
-              <a:pPr/>
-              <a:t>‹Nr.›</a:t>
+              <a:pPr rtl="0"/>
+              <a:t>‹#›</a:t>
             </a:fld>
             <a:endParaRPr lang="de-DE" noProof="0"/>
           </a:p>
@@ -9273,11 +9608,11 @@
           <a:bodyPr rtlCol="0"/>
           <a:lstStyle/>
           <a:p>
-            <a:pPr rtl="0"/>
             <a:r>
-              <a:rPr lang="de-DE" dirty="0"/>
-              <a:t>Generelles Vorgehen</a:t>
+              <a:rPr lang="de-DE"/>
+              <a:t>Verwendete Technologien</a:t>
             </a:r>
+            <a:endParaRPr lang="en-US"/>
           </a:p>
         </p:txBody>
       </p:sp>
@@ -9307,11 +9642,52 @@
           <a:bodyPr/>
           <a:lstStyle/>
           <a:p>
+            <a:pPr marL="305435" indent="-305435"/>
             <a:r>
-              <a:rPr lang="de-AT" dirty="0" err="1"/>
-              <a:t>test</a:t>
+              <a:rPr lang="de-AT" sz="2400"/>
+              <a:t>Auswahl von </a:t>
             </a:r>
-            <a:endParaRPr lang="de-AT" dirty="0"/>
+            <a:r>
+              <a:rPr lang="de-AT" sz="2400" b="1"/>
+              <a:t>PostgreSQL</a:t>
+            </a:r>
+            <a:r>
+              <a:rPr lang="de-AT" sz="2400"/>
+              <a:t> (mit DBeaver) als DBMS.</a:t>
+            </a:r>
+            <a:endParaRPr lang="en-US" sz="2400"/>
+          </a:p>
+          <a:p>
+            <a:pPr marL="305435" indent="-305435"/>
+            <a:r>
+              <a:rPr lang="de-AT" sz="2400"/>
+              <a:t>Auswahl von </a:t>
+            </a:r>
+            <a:r>
+              <a:rPr lang="de-AT" sz="2400" b="1"/>
+              <a:t>Python</a:t>
+            </a:r>
+            <a:r>
+              <a:rPr lang="de-AT" sz="2400"/>
+              <a:t> als backend Anfragesprache.</a:t>
+            </a:r>
+            <a:endParaRPr lang="en-US" sz="2400"/>
+          </a:p>
+          <a:p>
+            <a:pPr marL="305435" indent="-305435"/>
+            <a:r>
+              <a:rPr lang="de-AT" sz="2400"/>
+              <a:t>Public </a:t>
+            </a:r>
+            <a:r>
+              <a:rPr lang="de-AT" sz="2400" b="1"/>
+              <a:t>GitHub Repo</a:t>
+            </a:r>
+            <a:r>
+              <a:rPr lang="de-AT" sz="2400"/>
+              <a:t> zur bearbeitung und abgabe de Projekts.</a:t>
+            </a:r>
+            <a:endParaRPr lang="de-AT"/>
           </a:p>
         </p:txBody>
       </p:sp>
@@ -9329,6 +9705,180 @@
 </file>
 
 <file path=ppt/slides/slide3.xml><?xml version="1.0" encoding="utf-8"?>
+<p:sld xmlns:a="http://schemas.openxmlformats.org/drawingml/2006/main" xmlns:r="http://schemas.openxmlformats.org/officeDocument/2006/relationships" xmlns:p="http://schemas.openxmlformats.org/presentationml/2006/main">
+  <p:cSld>
+    <p:bg>
+      <p:bgPr>
+        <a:solidFill>
+          <a:schemeClr val="bg1"/>
+        </a:solidFill>
+        <a:effectLst/>
+      </p:bgPr>
+    </p:bg>
+    <p:spTree>
+      <p:nvGrpSpPr>
+        <p:cNvPr id="1" name="">
+          <a:extLst>
+            <a:ext uri="{FF2B5EF4-FFF2-40B4-BE49-F238E27FC236}">
+              <a16:creationId xmlns:a16="http://schemas.microsoft.com/office/drawing/2014/main" id="{64D4A36A-FD03-89FD-B23D-0466F1B1E075}"/>
+            </a:ext>
+          </a:extLst>
+        </p:cNvPr>
+        <p:cNvGrpSpPr/>
+        <p:nvPr/>
+      </p:nvGrpSpPr>
+      <p:grpSpPr>
+        <a:xfrm>
+          <a:off x="0" y="0"/>
+          <a:ext cx="0" cy="0"/>
+          <a:chOff x="0" y="0"/>
+          <a:chExt cx="0" cy="0"/>
+        </a:xfrm>
+      </p:grpSpPr>
+      <p:sp>
+        <p:nvSpPr>
+          <p:cNvPr id="2" name="Titel 1">
+            <a:extLst>
+              <a:ext uri="{FF2B5EF4-FFF2-40B4-BE49-F238E27FC236}">
+                <a16:creationId xmlns:a16="http://schemas.microsoft.com/office/drawing/2014/main" id="{D9C8D5BE-DD76-586F-7D09-101E03FE1E3B}"/>
+              </a:ext>
+            </a:extLst>
+          </p:cNvPr>
+          <p:cNvSpPr>
+            <a:spLocks noGrp="1"/>
+          </p:cNvSpPr>
+          <p:nvPr>
+            <p:ph type="title"/>
+          </p:nvPr>
+        </p:nvSpPr>
+        <p:spPr/>
+        <p:txBody>
+          <a:bodyPr rtlCol="0"/>
+          <a:lstStyle/>
+          <a:p>
+            <a:r>
+              <a:rPr lang="de-DE"/>
+              <a:t>Legen der Basis</a:t>
+            </a:r>
+            <a:endParaRPr lang="de-DE" dirty="0"/>
+          </a:p>
+        </p:txBody>
+      </p:sp>
+      <p:sp>
+        <p:nvSpPr>
+          <p:cNvPr id="6" name="Inhaltsplatzhalter 5">
+            <a:extLst>
+              <a:ext uri="{FF2B5EF4-FFF2-40B4-BE49-F238E27FC236}">
+                <a16:creationId xmlns:a16="http://schemas.microsoft.com/office/drawing/2014/main" id="{5826B2E9-2296-E89D-AC0C-32DE496D5592}"/>
+              </a:ext>
+            </a:extLst>
+          </p:cNvPr>
+          <p:cNvSpPr>
+            <a:spLocks noGrp="1"/>
+          </p:cNvSpPr>
+          <p:nvPr>
+            <p:ph sz="half" idx="2"/>
+          </p:nvPr>
+        </p:nvSpPr>
+        <p:spPr>
+          <a:xfrm>
+            <a:off x="581193" y="2228003"/>
+            <a:ext cx="8802992" cy="3633047"/>
+          </a:xfrm>
+        </p:spPr>
+        <p:txBody>
+          <a:bodyPr/>
+          <a:lstStyle/>
+          <a:p>
+            <a:pPr marL="305435" indent="-305435"/>
+            <a:r>
+              <a:rPr lang="de-AT" sz="2400"/>
+              <a:t>Verwendung von lib. </a:t>
+            </a:r>
+            <a:r>
+              <a:rPr lang="de-AT" sz="2400" b="1"/>
+              <a:t>psycopg </a:t>
+            </a:r>
+            <a:r>
+              <a:rPr lang="de-AT" sz="2400"/>
+              <a:t>und </a:t>
+            </a:r>
+            <a:r>
+              <a:rPr lang="de-AT" sz="2400" b="1"/>
+              <a:t>dotenv </a:t>
+            </a:r>
+            <a:r>
+              <a:rPr lang="en-US" sz="2400"/>
+              <a:t>zum Verbindungsaufbau.</a:t>
+            </a:r>
+          </a:p>
+          <a:p>
+            <a:pPr marL="305435" indent="-305435"/>
+            <a:r>
+              <a:rPr lang="en-US" sz="2400"/>
+              <a:t>Erstellung von unabhängigen, test-daten-scripts wie </a:t>
+            </a:r>
+            <a:r>
+              <a:rPr lang="en-US" sz="2400" b="1"/>
+              <a:t>toy_setup </a:t>
+            </a:r>
+            <a:r>
+              <a:rPr lang="en-US" sz="2400"/>
+              <a:t>und </a:t>
+            </a:r>
+            <a:r>
+              <a:rPr lang="en-US" sz="2400" b="1"/>
+              <a:t>generate</a:t>
+            </a:r>
+            <a:r>
+              <a:rPr lang="en-US" sz="2400"/>
+              <a:t>.</a:t>
+            </a:r>
+          </a:p>
+          <a:p>
+            <a:pPr marL="305435" indent="-305435"/>
+            <a:r>
+              <a:rPr lang="en-US" sz="2400"/>
+              <a:t>Erstellen von </a:t>
+            </a:r>
+            <a:r>
+              <a:rPr lang="en-US" sz="2400" b="1"/>
+              <a:t>H2V </a:t>
+            </a:r>
+            <a:r>
+              <a:rPr lang="en-US" sz="2400"/>
+              <a:t>und </a:t>
+            </a:r>
+            <a:r>
+              <a:rPr lang="en-US" sz="2400" b="1"/>
+              <a:t>V2H</a:t>
+            </a:r>
+            <a:r>
+              <a:rPr lang="en-US" sz="2400"/>
+              <a:t>, sowie eines </a:t>
+            </a:r>
+            <a:r>
+              <a:rPr lang="en-US" sz="2400" b="1"/>
+              <a:t>client-side proxy.</a:t>
+            </a:r>
+            <a:endParaRPr lang="en-US" sz="2400" dirty="0"/>
+          </a:p>
+        </p:txBody>
+      </p:sp>
+    </p:spTree>
+    <p:extLst>
+      <p:ext uri="{BB962C8B-B14F-4D97-AF65-F5344CB8AC3E}">
+        <p14:creationId xmlns:p14="http://schemas.microsoft.com/office/powerpoint/2010/main" val="2820873714"/>
+      </p:ext>
+    </p:extLst>
+  </p:cSld>
+  <p:clrMapOvr>
+    <a:masterClrMapping/>
+  </p:clrMapOvr>
+</p:sld>
+</file>
+
+<file path=ppt/slides/slide4.xml><?xml version="1.0" encoding="utf-8"?>
 <p:sld xmlns:a="http://schemas.openxmlformats.org/drawingml/2006/main" xmlns:r="http://schemas.openxmlformats.org/officeDocument/2006/relationships" xmlns:p="http://schemas.openxmlformats.org/presentationml/2006/main">
   <p:cSld>
     <p:bg>
@@ -9739,7 +10289,1285 @@
 </p:sld>
 </file>
 
-<file path=ppt/slides/slide4.xml><?xml version="1.0" encoding="utf-8"?>
+<file path=ppt/slides/slide5.xml><?xml version="1.0" encoding="utf-8"?>
+<p:sld xmlns:a="http://schemas.openxmlformats.org/drawingml/2006/main" xmlns:r="http://schemas.openxmlformats.org/officeDocument/2006/relationships" xmlns:p="http://schemas.openxmlformats.org/presentationml/2006/main">
+  <p:cSld>
+    <p:bg>
+      <p:bgPr>
+        <a:solidFill>
+          <a:schemeClr val="bg1"/>
+        </a:solidFill>
+        <a:effectLst/>
+      </p:bgPr>
+    </p:bg>
+    <p:spTree>
+      <p:nvGrpSpPr>
+        <p:cNvPr id="1" name="">
+          <a:extLst>
+            <a:ext uri="{FF2B5EF4-FFF2-40B4-BE49-F238E27FC236}">
+              <a16:creationId xmlns:a16="http://schemas.microsoft.com/office/drawing/2014/main" id="{77B3DAD2-4C88-8A46-CFC2-07C2246983B9}"/>
+            </a:ext>
+          </a:extLst>
+        </p:cNvPr>
+        <p:cNvGrpSpPr/>
+        <p:nvPr/>
+      </p:nvGrpSpPr>
+      <p:grpSpPr>
+        <a:xfrm>
+          <a:off x="0" y="0"/>
+          <a:ext cx="0" cy="0"/>
+          <a:chOff x="0" y="0"/>
+          <a:chExt cx="0" cy="0"/>
+        </a:xfrm>
+      </p:grpSpPr>
+      <p:sp>
+        <p:nvSpPr>
+          <p:cNvPr id="15" name="Rectangle 14">
+            <a:extLst>
+              <a:ext uri="{FF2B5EF4-FFF2-40B4-BE49-F238E27FC236}">
+                <a16:creationId xmlns:a16="http://schemas.microsoft.com/office/drawing/2014/main" id="{A078A52F-85EA-4C0B-962B-D9D9DD4DD78C}"/>
+              </a:ext>
+              <a:ext uri="{C183D7F6-B498-43B3-948B-1728B52AA6E4}">
+                <adec:decorative xmlns:adec="http://schemas.microsoft.com/office/drawing/2017/decorative" val="1"/>
+              </a:ext>
+            </a:extLst>
+          </p:cNvPr>
+          <p:cNvSpPr>
+            <a:spLocks noGrp="1" noRot="1" noChangeAspect="1" noMove="1" noResize="1" noEditPoints="1" noAdjustHandles="1" noChangeArrowheads="1" noChangeShapeType="1" noTextEdit="1"/>
+          </p:cNvSpPr>
+          <p:nvPr>
+            <p:extLst>
+              <p:ext uri="{386F3935-93C4-4BCD-93E2-E3B085C9AB24}">
+                <p16:designElem xmlns:p16="http://schemas.microsoft.com/office/powerpoint/2015/main" val="1"/>
+              </p:ext>
+            </p:extLst>
+          </p:nvPr>
+        </p:nvSpPr>
+        <p:spPr>
+          <a:xfrm>
+            <a:off x="446534" y="457200"/>
+            <a:ext cx="3703320" cy="94997"/>
+          </a:xfrm>
+          <a:prstGeom prst="rect">
+            <a:avLst/>
+          </a:prstGeom>
+          <a:solidFill>
+            <a:schemeClr val="accent1"/>
+          </a:solidFill>
+          <a:ln>
+            <a:noFill/>
+          </a:ln>
+          <a:effectLst/>
+        </p:spPr>
+        <p:style>
+          <a:lnRef idx="1">
+            <a:schemeClr val="accent1"/>
+          </a:lnRef>
+          <a:fillRef idx="3">
+            <a:schemeClr val="accent1"/>
+          </a:fillRef>
+          <a:effectRef idx="2">
+            <a:schemeClr val="accent1"/>
+          </a:effectRef>
+          <a:fontRef idx="minor">
+            <a:schemeClr val="lt1"/>
+          </a:fontRef>
+        </p:style>
+      </p:sp>
+      <p:sp>
+        <p:nvSpPr>
+          <p:cNvPr id="17" name="Rectangle 16">
+            <a:extLst>
+              <a:ext uri="{FF2B5EF4-FFF2-40B4-BE49-F238E27FC236}">
+                <a16:creationId xmlns:a16="http://schemas.microsoft.com/office/drawing/2014/main" id="{919797D5-5700-4683-B30A-5B4D56CB8270}"/>
+              </a:ext>
+              <a:ext uri="{C183D7F6-B498-43B3-948B-1728B52AA6E4}">
+                <adec:decorative xmlns:adec="http://schemas.microsoft.com/office/drawing/2017/decorative" val="1"/>
+              </a:ext>
+            </a:extLst>
+          </p:cNvPr>
+          <p:cNvSpPr>
+            <a:spLocks noGrp="1" noRot="1" noChangeAspect="1" noMove="1" noResize="1" noEditPoints="1" noAdjustHandles="1" noChangeArrowheads="1" noChangeShapeType="1" noTextEdit="1"/>
+          </p:cNvSpPr>
+          <p:nvPr>
+            <p:extLst>
+              <p:ext uri="{386F3935-93C4-4BCD-93E2-E3B085C9AB24}">
+                <p16:designElem xmlns:p16="http://schemas.microsoft.com/office/powerpoint/2015/main" val="1"/>
+              </p:ext>
+            </p:extLst>
+          </p:nvPr>
+        </p:nvSpPr>
+        <p:spPr>
+          <a:xfrm>
+            <a:off x="8042147" y="453643"/>
+            <a:ext cx="3703320" cy="98554"/>
+          </a:xfrm>
+          <a:prstGeom prst="rect">
+            <a:avLst/>
+          </a:prstGeom>
+          <a:solidFill>
+            <a:schemeClr val="accent4"/>
+          </a:solidFill>
+          <a:ln>
+            <a:noFill/>
+          </a:ln>
+          <a:effectLst/>
+        </p:spPr>
+        <p:style>
+          <a:lnRef idx="1">
+            <a:schemeClr val="accent1"/>
+          </a:lnRef>
+          <a:fillRef idx="3">
+            <a:schemeClr val="accent1"/>
+          </a:fillRef>
+          <a:effectRef idx="2">
+            <a:schemeClr val="accent1"/>
+          </a:effectRef>
+          <a:fontRef idx="minor">
+            <a:schemeClr val="lt1"/>
+          </a:fontRef>
+        </p:style>
+      </p:sp>
+      <p:sp>
+        <p:nvSpPr>
+          <p:cNvPr id="19" name="Rectangle 18">
+            <a:extLst>
+              <a:ext uri="{FF2B5EF4-FFF2-40B4-BE49-F238E27FC236}">
+                <a16:creationId xmlns:a16="http://schemas.microsoft.com/office/drawing/2014/main" id="{4856A7B9-9801-42EC-A4C9-7E22A56EF53D}"/>
+              </a:ext>
+              <a:ext uri="{C183D7F6-B498-43B3-948B-1728B52AA6E4}">
+                <adec:decorative xmlns:adec="http://schemas.microsoft.com/office/drawing/2017/decorative" val="1"/>
+              </a:ext>
+            </a:extLst>
+          </p:cNvPr>
+          <p:cNvSpPr>
+            <a:spLocks noGrp="1" noRot="1" noChangeAspect="1" noMove="1" noResize="1" noEditPoints="1" noAdjustHandles="1" noChangeArrowheads="1" noChangeShapeType="1" noTextEdit="1"/>
+          </p:cNvSpPr>
+          <p:nvPr>
+            <p:extLst>
+              <p:ext uri="{386F3935-93C4-4BCD-93E2-E3B085C9AB24}">
+                <p16:designElem xmlns:p16="http://schemas.microsoft.com/office/powerpoint/2015/main" val="1"/>
+              </p:ext>
+            </p:extLst>
+          </p:nvPr>
+        </p:nvSpPr>
+        <p:spPr>
+          <a:xfrm>
+            <a:off x="4241830" y="457200"/>
+            <a:ext cx="3703320" cy="91440"/>
+          </a:xfrm>
+          <a:prstGeom prst="rect">
+            <a:avLst/>
+          </a:prstGeom>
+          <a:solidFill>
+            <a:schemeClr val="accent2"/>
+          </a:solidFill>
+          <a:ln>
+            <a:noFill/>
+          </a:ln>
+          <a:effectLst/>
+        </p:spPr>
+        <p:style>
+          <a:lnRef idx="1">
+            <a:schemeClr val="accent1"/>
+          </a:lnRef>
+          <a:fillRef idx="3">
+            <a:schemeClr val="accent1"/>
+          </a:fillRef>
+          <a:effectRef idx="2">
+            <a:schemeClr val="accent1"/>
+          </a:effectRef>
+          <a:fontRef idx="minor">
+            <a:schemeClr val="lt1"/>
+          </a:fontRef>
+        </p:style>
+      </p:sp>
+      <p:sp>
+        <p:nvSpPr>
+          <p:cNvPr id="21" name="Rectangle 20">
+            <a:extLst>
+              <a:ext uri="{FF2B5EF4-FFF2-40B4-BE49-F238E27FC236}">
+                <a16:creationId xmlns:a16="http://schemas.microsoft.com/office/drawing/2014/main" id="{8AD54DB8-C150-4290-85D6-F5B0262BFEEF}"/>
+              </a:ext>
+              <a:ext uri="{C183D7F6-B498-43B3-948B-1728B52AA6E4}">
+                <adec:decorative xmlns:adec="http://schemas.microsoft.com/office/drawing/2017/decorative" val="1"/>
+              </a:ext>
+            </a:extLst>
+          </p:cNvPr>
+          <p:cNvSpPr>
+            <a:spLocks noGrp="1" noRot="1" noChangeAspect="1" noMove="1" noResize="1" noEditPoints="1" noAdjustHandles="1" noChangeArrowheads="1" noChangeShapeType="1" noTextEdit="1"/>
+          </p:cNvSpPr>
+          <p:nvPr>
+            <p:extLst>
+              <p:ext uri="{386F3935-93C4-4BCD-93E2-E3B085C9AB24}">
+                <p16:designElem xmlns:p16="http://schemas.microsoft.com/office/powerpoint/2015/main" val="1"/>
+              </p:ext>
+            </p:extLst>
+          </p:nvPr>
+        </p:nvSpPr>
+        <p:spPr>
+          <a:xfrm>
+            <a:off x="446534" y="3085765"/>
+            <a:ext cx="11262866" cy="3304800"/>
+          </a:xfrm>
+          <a:prstGeom prst="rect">
+            <a:avLst/>
+          </a:prstGeom>
+          <a:solidFill>
+            <a:schemeClr val="accent1"/>
+          </a:solidFill>
+          <a:ln>
+            <a:noFill/>
+          </a:ln>
+          <a:effectLst/>
+        </p:spPr>
+        <p:style>
+          <a:lnRef idx="1">
+            <a:schemeClr val="accent1"/>
+          </a:lnRef>
+          <a:fillRef idx="3">
+            <a:schemeClr val="accent1"/>
+          </a:fillRef>
+          <a:effectRef idx="2">
+            <a:schemeClr val="accent1"/>
+          </a:effectRef>
+          <a:fontRef idx="minor">
+            <a:schemeClr val="lt1"/>
+          </a:fontRef>
+        </p:style>
+      </p:sp>
+      <p:sp useBgFill="1">
+        <p:nvSpPr>
+          <p:cNvPr id="23" name="Rectangle 22">
+            <a:extLst>
+              <a:ext uri="{FF2B5EF4-FFF2-40B4-BE49-F238E27FC236}">
+                <a16:creationId xmlns:a16="http://schemas.microsoft.com/office/drawing/2014/main" id="{379F11E2-8BA5-4C5C-AE7C-361E5EA011FF}"/>
+              </a:ext>
+              <a:ext uri="{C183D7F6-B498-43B3-948B-1728B52AA6E4}">
+                <adec:decorative xmlns:adec="http://schemas.microsoft.com/office/drawing/2017/decorative" val="1"/>
+              </a:ext>
+            </a:extLst>
+          </p:cNvPr>
+          <p:cNvSpPr>
+            <a:spLocks noGrp="1" noRot="1" noChangeAspect="1" noMove="1" noResize="1" noEditPoints="1" noAdjustHandles="1" noChangeArrowheads="1" noChangeShapeType="1" noTextEdit="1"/>
+          </p:cNvSpPr>
+          <p:nvPr>
+            <p:extLst>
+              <p:ext uri="{386F3935-93C4-4BCD-93E2-E3B085C9AB24}">
+                <p16:designElem xmlns:p16="http://schemas.microsoft.com/office/powerpoint/2015/main" val="1"/>
+              </p:ext>
+            </p:extLst>
+          </p:nvPr>
+        </p:nvSpPr>
+        <p:spPr>
+          <a:xfrm>
+            <a:off x="0" y="1"/>
+            <a:ext cx="12191999" cy="6858000"/>
+          </a:xfrm>
+          <a:prstGeom prst="rect">
+            <a:avLst/>
+          </a:prstGeom>
+          <a:ln>
+            <a:noFill/>
+          </a:ln>
+        </p:spPr>
+        <p:style>
+          <a:lnRef idx="2">
+            <a:schemeClr val="accent1">
+              <a:shade val="50000"/>
+            </a:schemeClr>
+          </a:lnRef>
+          <a:fillRef idx="1">
+            <a:schemeClr val="accent1"/>
+          </a:fillRef>
+          <a:effectRef idx="0">
+            <a:schemeClr val="accent1"/>
+          </a:effectRef>
+          <a:fontRef idx="minor">
+            <a:schemeClr val="lt1"/>
+          </a:fontRef>
+        </p:style>
+        <p:txBody>
+          <a:bodyPr rtlCol="0" anchor="ctr"/>
+          <a:lstStyle/>
+          <a:p>
+            <a:pPr algn="ctr"/>
+            <a:endParaRPr lang="en-US"/>
+          </a:p>
+        </p:txBody>
+      </p:sp>
+      <p:pic>
+        <p:nvPicPr>
+          <p:cNvPr id="10" name="Content Placeholder 9" descr="A screen shot of a computer program&#10;&#10;AI-generated content may be incorrect.">
+            <a:extLst>
+              <a:ext uri="{FF2B5EF4-FFF2-40B4-BE49-F238E27FC236}">
+                <a16:creationId xmlns:a16="http://schemas.microsoft.com/office/drawing/2014/main" id="{4C84E358-A8E5-C7D0-D4C2-4CB9CD27C240}"/>
+              </a:ext>
+            </a:extLst>
+          </p:cNvPr>
+          <p:cNvPicPr>
+            <a:picLocks noGrp="1" noChangeAspect="1"/>
+          </p:cNvPicPr>
+          <p:nvPr>
+            <p:ph sz="half" idx="2"/>
+          </p:nvPr>
+        </p:nvPicPr>
+        <p:blipFill>
+          <a:blip r:embed="rId3"/>
+          <a:srcRect r="19425"/>
+          <a:stretch>
+            <a:fillRect/>
+          </a:stretch>
+        </p:blipFill>
+        <p:spPr>
+          <a:xfrm>
+            <a:off x="446534" y="723899"/>
+            <a:ext cx="7498616" cy="5676901"/>
+          </a:xfrm>
+          <a:prstGeom prst="rect">
+            <a:avLst/>
+          </a:prstGeom>
+        </p:spPr>
+      </p:pic>
+      <p:sp>
+        <p:nvSpPr>
+          <p:cNvPr id="25" name="Rectangle 24">
+            <a:extLst>
+              <a:ext uri="{FF2B5EF4-FFF2-40B4-BE49-F238E27FC236}">
+                <a16:creationId xmlns:a16="http://schemas.microsoft.com/office/drawing/2014/main" id="{7C00E1DA-EC7C-40FC-95E3-11FDCD2E4291}"/>
+              </a:ext>
+              <a:ext uri="{C183D7F6-B498-43B3-948B-1728B52AA6E4}">
+                <adec:decorative xmlns:adec="http://schemas.microsoft.com/office/drawing/2017/decorative" val="1"/>
+              </a:ext>
+            </a:extLst>
+          </p:cNvPr>
+          <p:cNvSpPr>
+            <a:spLocks noGrp="1" noRot="1" noChangeAspect="1" noMove="1" noResize="1" noEditPoints="1" noAdjustHandles="1" noChangeArrowheads="1" noChangeShapeType="1" noTextEdit="1"/>
+          </p:cNvSpPr>
+          <p:nvPr>
+            <p:extLst>
+              <p:ext uri="{386F3935-93C4-4BCD-93E2-E3B085C9AB24}">
+                <p16:designElem xmlns:p16="http://schemas.microsoft.com/office/powerpoint/2015/main" val="1"/>
+              </p:ext>
+            </p:extLst>
+          </p:nvPr>
+        </p:nvSpPr>
+        <p:spPr>
+          <a:xfrm>
+            <a:off x="8042147" y="723899"/>
+            <a:ext cx="3703320" cy="5666666"/>
+          </a:xfrm>
+          <a:prstGeom prst="rect">
+            <a:avLst/>
+          </a:prstGeom>
+          <a:solidFill>
+            <a:schemeClr val="accent1"/>
+          </a:solidFill>
+          <a:ln>
+            <a:noFill/>
+          </a:ln>
+          <a:effectLst/>
+        </p:spPr>
+        <p:style>
+          <a:lnRef idx="1">
+            <a:schemeClr val="accent1"/>
+          </a:lnRef>
+          <a:fillRef idx="3">
+            <a:schemeClr val="accent1"/>
+          </a:fillRef>
+          <a:effectRef idx="2">
+            <a:schemeClr val="accent1"/>
+          </a:effectRef>
+          <a:fontRef idx="minor">
+            <a:schemeClr val="lt1"/>
+          </a:fontRef>
+        </p:style>
+      </p:sp>
+      <p:sp>
+        <p:nvSpPr>
+          <p:cNvPr id="2" name="Titel 1">
+            <a:extLst>
+              <a:ext uri="{FF2B5EF4-FFF2-40B4-BE49-F238E27FC236}">
+                <a16:creationId xmlns:a16="http://schemas.microsoft.com/office/drawing/2014/main" id="{DD720C44-0030-5C0D-7822-9E2B7B10FB06}"/>
+              </a:ext>
+            </a:extLst>
+          </p:cNvPr>
+          <p:cNvSpPr>
+            <a:spLocks noGrp="1"/>
+          </p:cNvSpPr>
+          <p:nvPr>
+            <p:ph type="title"/>
+          </p:nvPr>
+        </p:nvSpPr>
+        <p:spPr>
+          <a:xfrm>
+            <a:off x="8296275" y="1419225"/>
+            <a:ext cx="3081576" cy="2085869"/>
+          </a:xfrm>
+        </p:spPr>
+        <p:txBody>
+          <a:bodyPr vert="horz" lIns="91440" tIns="45720" rIns="91440" bIns="45720" rtlCol="0" anchor="b">
+            <a:normAutofit/>
+          </a:bodyPr>
+          <a:lstStyle/>
+          <a:p>
+            <a:pPr>
+              <a:lnSpc>
+                <a:spcPct val="90000"/>
+              </a:lnSpc>
+            </a:pPr>
+            <a:r>
+              <a:rPr lang="en-US" sz="2300">
+                <a:solidFill>
+                  <a:srgbClr val="FFFFFF"/>
+                </a:solidFill>
+              </a:rPr>
+              <a:t>Proxy - Gros der Implementiereung</a:t>
+            </a:r>
+          </a:p>
+        </p:txBody>
+      </p:sp>
+      <p:grpSp>
+        <p:nvGrpSpPr>
+          <p:cNvPr id="27" name="Group 26">
+            <a:extLst>
+              <a:ext uri="{FF2B5EF4-FFF2-40B4-BE49-F238E27FC236}">
+                <a16:creationId xmlns:a16="http://schemas.microsoft.com/office/drawing/2014/main" id="{9A421166-2996-41A7-B094-AE5316F347DD}"/>
+              </a:ext>
+              <a:ext uri="{C183D7F6-B498-43B3-948B-1728B52AA6E4}">
+                <adec:decorative xmlns:adec="http://schemas.microsoft.com/office/drawing/2017/decorative" val="1"/>
+              </a:ext>
+            </a:extLst>
+          </p:cNvPr>
+          <p:cNvGrpSpPr>
+            <a:grpSpLocks noGrp="1" noUngrp="1" noRot="1" noChangeAspect="1" noMove="1" noResize="1"/>
+          </p:cNvGrpSpPr>
+          <p:nvPr>
+            <p:extLst>
+              <p:ext uri="{386F3935-93C4-4BCD-93E2-E3B085C9AB24}">
+                <p16:designElem xmlns:p16="http://schemas.microsoft.com/office/powerpoint/2015/main" val="1"/>
+              </p:ext>
+            </p:extLst>
+          </p:nvPr>
+        </p:nvGrpSpPr>
+        <p:grpSpPr>
+          <a:xfrm>
+            <a:off x="446534" y="453643"/>
+            <a:ext cx="11298933" cy="98554"/>
+            <a:chOff x="446534" y="453643"/>
+            <a:chExt cx="11298933" cy="98554"/>
+          </a:xfrm>
+        </p:grpSpPr>
+        <p:sp>
+          <p:nvSpPr>
+            <p:cNvPr id="28" name="Rectangle 27">
+              <a:extLst>
+                <a:ext uri="{FF2B5EF4-FFF2-40B4-BE49-F238E27FC236}">
+                  <a16:creationId xmlns:a16="http://schemas.microsoft.com/office/drawing/2014/main" id="{FDBB1B92-A3EB-43E4-8FAB-D20E8ED14CEF}"/>
+                </a:ext>
+                <a:ext uri="{C183D7F6-B498-43B3-948B-1728B52AA6E4}">
+                  <adec:decorative xmlns:adec="http://schemas.microsoft.com/office/drawing/2017/decorative" val="1"/>
+                </a:ext>
+              </a:extLst>
+            </p:cNvPr>
+            <p:cNvSpPr/>
+            <p:nvPr>
+              <p:extLst>
+                <p:ext uri="{386F3935-93C4-4BCD-93E2-E3B085C9AB24}">
+                  <p16:designElem xmlns:p16="http://schemas.microsoft.com/office/powerpoint/2015/main" val="1"/>
+                </p:ext>
+              </p:extLst>
+            </p:nvPr>
+          </p:nvSpPr>
+          <p:spPr>
+            <a:xfrm>
+              <a:off x="446534" y="457200"/>
+              <a:ext cx="3703320" cy="94997"/>
+            </a:xfrm>
+            <a:prstGeom prst="rect">
+              <a:avLst/>
+            </a:prstGeom>
+            <a:solidFill>
+              <a:schemeClr val="accent1"/>
+            </a:solidFill>
+            <a:ln>
+              <a:noFill/>
+            </a:ln>
+            <a:effectLst/>
+          </p:spPr>
+          <p:style>
+            <a:lnRef idx="1">
+              <a:schemeClr val="accent1"/>
+            </a:lnRef>
+            <a:fillRef idx="3">
+              <a:schemeClr val="accent1"/>
+            </a:fillRef>
+            <a:effectRef idx="2">
+              <a:schemeClr val="accent1"/>
+            </a:effectRef>
+            <a:fontRef idx="minor">
+              <a:schemeClr val="lt1"/>
+            </a:fontRef>
+          </p:style>
+        </p:sp>
+        <p:sp>
+          <p:nvSpPr>
+            <p:cNvPr id="29" name="Rectangle 28">
+              <a:extLst>
+                <a:ext uri="{FF2B5EF4-FFF2-40B4-BE49-F238E27FC236}">
+                  <a16:creationId xmlns:a16="http://schemas.microsoft.com/office/drawing/2014/main" id="{3F3972F4-FE7E-48EA-AAD8-9BE5750A6672}"/>
+                </a:ext>
+                <a:ext uri="{C183D7F6-B498-43B3-948B-1728B52AA6E4}">
+                  <adec:decorative xmlns:adec="http://schemas.microsoft.com/office/drawing/2017/decorative" val="1"/>
+                </a:ext>
+              </a:extLst>
+            </p:cNvPr>
+            <p:cNvSpPr/>
+            <p:nvPr>
+              <p:extLst>
+                <p:ext uri="{386F3935-93C4-4BCD-93E2-E3B085C9AB24}">
+                  <p16:designElem xmlns:p16="http://schemas.microsoft.com/office/powerpoint/2015/main" val="1"/>
+                </p:ext>
+              </p:extLst>
+            </p:nvPr>
+          </p:nvSpPr>
+          <p:spPr>
+            <a:xfrm>
+              <a:off x="8042147" y="453643"/>
+              <a:ext cx="3703320" cy="98554"/>
+            </a:xfrm>
+            <a:prstGeom prst="rect">
+              <a:avLst/>
+            </a:prstGeom>
+            <a:solidFill>
+              <a:schemeClr val="accent4"/>
+            </a:solidFill>
+            <a:ln>
+              <a:noFill/>
+            </a:ln>
+            <a:effectLst/>
+          </p:spPr>
+          <p:style>
+            <a:lnRef idx="1">
+              <a:schemeClr val="accent1"/>
+            </a:lnRef>
+            <a:fillRef idx="3">
+              <a:schemeClr val="accent1"/>
+            </a:fillRef>
+            <a:effectRef idx="2">
+              <a:schemeClr val="accent1"/>
+            </a:effectRef>
+            <a:fontRef idx="minor">
+              <a:schemeClr val="lt1"/>
+            </a:fontRef>
+          </p:style>
+        </p:sp>
+        <p:sp>
+          <p:nvSpPr>
+            <p:cNvPr id="30" name="Rectangle 29">
+              <a:extLst>
+                <a:ext uri="{FF2B5EF4-FFF2-40B4-BE49-F238E27FC236}">
+                  <a16:creationId xmlns:a16="http://schemas.microsoft.com/office/drawing/2014/main" id="{221614E5-870B-4D5E-A43B-8FF7E5323484}"/>
+                </a:ext>
+                <a:ext uri="{C183D7F6-B498-43B3-948B-1728B52AA6E4}">
+                  <adec:decorative xmlns:adec="http://schemas.microsoft.com/office/drawing/2017/decorative" val="1"/>
+                </a:ext>
+              </a:extLst>
+            </p:cNvPr>
+            <p:cNvSpPr/>
+            <p:nvPr>
+              <p:extLst>
+                <p:ext uri="{386F3935-93C4-4BCD-93E2-E3B085C9AB24}">
+                  <p16:designElem xmlns:p16="http://schemas.microsoft.com/office/powerpoint/2015/main" val="1"/>
+                </p:ext>
+              </p:extLst>
+            </p:nvPr>
+          </p:nvSpPr>
+          <p:spPr>
+            <a:xfrm>
+              <a:off x="4241830" y="457200"/>
+              <a:ext cx="3703320" cy="91440"/>
+            </a:xfrm>
+            <a:prstGeom prst="rect">
+              <a:avLst/>
+            </a:prstGeom>
+            <a:solidFill>
+              <a:schemeClr val="accent2"/>
+            </a:solidFill>
+            <a:ln>
+              <a:noFill/>
+            </a:ln>
+            <a:effectLst/>
+          </p:spPr>
+          <p:style>
+            <a:lnRef idx="1">
+              <a:schemeClr val="accent1"/>
+            </a:lnRef>
+            <a:fillRef idx="3">
+              <a:schemeClr val="accent1"/>
+            </a:fillRef>
+            <a:effectRef idx="2">
+              <a:schemeClr val="accent1"/>
+            </a:effectRef>
+            <a:fontRef idx="minor">
+              <a:schemeClr val="lt1"/>
+            </a:fontRef>
+          </p:style>
+        </p:sp>
+      </p:grpSp>
+    </p:spTree>
+    <p:extLst>
+      <p:ext uri="{BB962C8B-B14F-4D97-AF65-F5344CB8AC3E}">
+        <p14:creationId xmlns:p14="http://schemas.microsoft.com/office/powerpoint/2010/main" val="931135336"/>
+      </p:ext>
+    </p:extLst>
+  </p:cSld>
+  <p:clrMapOvr>
+    <a:masterClrMapping/>
+  </p:clrMapOvr>
+</p:sld>
+</file>
+
+<file path=ppt/slides/slide6.xml><?xml version="1.0" encoding="utf-8"?>
+<p:sld xmlns:a="http://schemas.openxmlformats.org/drawingml/2006/main" xmlns:r="http://schemas.openxmlformats.org/officeDocument/2006/relationships" xmlns:p="http://schemas.openxmlformats.org/presentationml/2006/main">
+  <p:cSld>
+    <p:bg>
+      <p:bgPr>
+        <a:solidFill>
+          <a:schemeClr val="bg1"/>
+        </a:solidFill>
+        <a:effectLst/>
+      </p:bgPr>
+    </p:bg>
+    <p:spTree>
+      <p:nvGrpSpPr>
+        <p:cNvPr id="1" name="">
+          <a:extLst>
+            <a:ext uri="{FF2B5EF4-FFF2-40B4-BE49-F238E27FC236}">
+              <a16:creationId xmlns:a16="http://schemas.microsoft.com/office/drawing/2014/main" id="{FE816E35-059E-2904-FDBA-9F15603CD448}"/>
+            </a:ext>
+          </a:extLst>
+        </p:cNvPr>
+        <p:cNvGrpSpPr/>
+        <p:nvPr/>
+      </p:nvGrpSpPr>
+      <p:grpSpPr>
+        <a:xfrm>
+          <a:off x="0" y="0"/>
+          <a:ext cx="0" cy="0"/>
+          <a:chOff x="0" y="0"/>
+          <a:chExt cx="0" cy="0"/>
+        </a:xfrm>
+      </p:grpSpPr>
+      <p:sp>
+        <p:nvSpPr>
+          <p:cNvPr id="35" name="Rectangle 34">
+            <a:extLst>
+              <a:ext uri="{FF2B5EF4-FFF2-40B4-BE49-F238E27FC236}">
+                <a16:creationId xmlns:a16="http://schemas.microsoft.com/office/drawing/2014/main" id="{A078A52F-85EA-4C0B-962B-D9D9DD4DD78C}"/>
+              </a:ext>
+              <a:ext uri="{C183D7F6-B498-43B3-948B-1728B52AA6E4}">
+                <adec:decorative xmlns:adec="http://schemas.microsoft.com/office/drawing/2017/decorative" val="1"/>
+              </a:ext>
+            </a:extLst>
+          </p:cNvPr>
+          <p:cNvSpPr>
+            <a:spLocks noGrp="1" noRot="1" noChangeAspect="1" noMove="1" noResize="1" noEditPoints="1" noAdjustHandles="1" noChangeArrowheads="1" noChangeShapeType="1" noTextEdit="1"/>
+          </p:cNvSpPr>
+          <p:nvPr>
+            <p:extLst>
+              <p:ext uri="{386F3935-93C4-4BCD-93E2-E3B085C9AB24}">
+                <p16:designElem xmlns:p16="http://schemas.microsoft.com/office/powerpoint/2015/main" val="1"/>
+              </p:ext>
+            </p:extLst>
+          </p:nvPr>
+        </p:nvSpPr>
+        <p:spPr>
+          <a:xfrm>
+            <a:off x="446534" y="457200"/>
+            <a:ext cx="3703320" cy="94997"/>
+          </a:xfrm>
+          <a:prstGeom prst="rect">
+            <a:avLst/>
+          </a:prstGeom>
+          <a:solidFill>
+            <a:schemeClr val="accent1"/>
+          </a:solidFill>
+          <a:ln>
+            <a:noFill/>
+          </a:ln>
+          <a:effectLst/>
+        </p:spPr>
+        <p:style>
+          <a:lnRef idx="1">
+            <a:schemeClr val="accent1"/>
+          </a:lnRef>
+          <a:fillRef idx="3">
+            <a:schemeClr val="accent1"/>
+          </a:fillRef>
+          <a:effectRef idx="2">
+            <a:schemeClr val="accent1"/>
+          </a:effectRef>
+          <a:fontRef idx="minor">
+            <a:schemeClr val="lt1"/>
+          </a:fontRef>
+        </p:style>
+      </p:sp>
+      <p:sp>
+        <p:nvSpPr>
+          <p:cNvPr id="37" name="Rectangle 36">
+            <a:extLst>
+              <a:ext uri="{FF2B5EF4-FFF2-40B4-BE49-F238E27FC236}">
+                <a16:creationId xmlns:a16="http://schemas.microsoft.com/office/drawing/2014/main" id="{919797D5-5700-4683-B30A-5B4D56CB8270}"/>
+              </a:ext>
+              <a:ext uri="{C183D7F6-B498-43B3-948B-1728B52AA6E4}">
+                <adec:decorative xmlns:adec="http://schemas.microsoft.com/office/drawing/2017/decorative" val="1"/>
+              </a:ext>
+            </a:extLst>
+          </p:cNvPr>
+          <p:cNvSpPr>
+            <a:spLocks noGrp="1" noRot="1" noChangeAspect="1" noMove="1" noResize="1" noEditPoints="1" noAdjustHandles="1" noChangeArrowheads="1" noChangeShapeType="1" noTextEdit="1"/>
+          </p:cNvSpPr>
+          <p:nvPr>
+            <p:extLst>
+              <p:ext uri="{386F3935-93C4-4BCD-93E2-E3B085C9AB24}">
+                <p16:designElem xmlns:p16="http://schemas.microsoft.com/office/powerpoint/2015/main" val="1"/>
+              </p:ext>
+            </p:extLst>
+          </p:nvPr>
+        </p:nvSpPr>
+        <p:spPr>
+          <a:xfrm>
+            <a:off x="8042147" y="453643"/>
+            <a:ext cx="3703320" cy="98554"/>
+          </a:xfrm>
+          <a:prstGeom prst="rect">
+            <a:avLst/>
+          </a:prstGeom>
+          <a:solidFill>
+            <a:schemeClr val="accent4"/>
+          </a:solidFill>
+          <a:ln>
+            <a:noFill/>
+          </a:ln>
+          <a:effectLst/>
+        </p:spPr>
+        <p:style>
+          <a:lnRef idx="1">
+            <a:schemeClr val="accent1"/>
+          </a:lnRef>
+          <a:fillRef idx="3">
+            <a:schemeClr val="accent1"/>
+          </a:fillRef>
+          <a:effectRef idx="2">
+            <a:schemeClr val="accent1"/>
+          </a:effectRef>
+          <a:fontRef idx="minor">
+            <a:schemeClr val="lt1"/>
+          </a:fontRef>
+        </p:style>
+      </p:sp>
+      <p:sp>
+        <p:nvSpPr>
+          <p:cNvPr id="39" name="Rectangle 38">
+            <a:extLst>
+              <a:ext uri="{FF2B5EF4-FFF2-40B4-BE49-F238E27FC236}">
+                <a16:creationId xmlns:a16="http://schemas.microsoft.com/office/drawing/2014/main" id="{4856A7B9-9801-42EC-A4C9-7E22A56EF53D}"/>
+              </a:ext>
+              <a:ext uri="{C183D7F6-B498-43B3-948B-1728B52AA6E4}">
+                <adec:decorative xmlns:adec="http://schemas.microsoft.com/office/drawing/2017/decorative" val="1"/>
+              </a:ext>
+            </a:extLst>
+          </p:cNvPr>
+          <p:cNvSpPr>
+            <a:spLocks noGrp="1" noRot="1" noChangeAspect="1" noMove="1" noResize="1" noEditPoints="1" noAdjustHandles="1" noChangeArrowheads="1" noChangeShapeType="1" noTextEdit="1"/>
+          </p:cNvSpPr>
+          <p:nvPr>
+            <p:extLst>
+              <p:ext uri="{386F3935-93C4-4BCD-93E2-E3B085C9AB24}">
+                <p16:designElem xmlns:p16="http://schemas.microsoft.com/office/powerpoint/2015/main" val="1"/>
+              </p:ext>
+            </p:extLst>
+          </p:nvPr>
+        </p:nvSpPr>
+        <p:spPr>
+          <a:xfrm>
+            <a:off x="4241830" y="457200"/>
+            <a:ext cx="3703320" cy="91440"/>
+          </a:xfrm>
+          <a:prstGeom prst="rect">
+            <a:avLst/>
+          </a:prstGeom>
+          <a:solidFill>
+            <a:schemeClr val="accent2"/>
+          </a:solidFill>
+          <a:ln>
+            <a:noFill/>
+          </a:ln>
+          <a:effectLst/>
+        </p:spPr>
+        <p:style>
+          <a:lnRef idx="1">
+            <a:schemeClr val="accent1"/>
+          </a:lnRef>
+          <a:fillRef idx="3">
+            <a:schemeClr val="accent1"/>
+          </a:fillRef>
+          <a:effectRef idx="2">
+            <a:schemeClr val="accent1"/>
+          </a:effectRef>
+          <a:fontRef idx="minor">
+            <a:schemeClr val="lt1"/>
+          </a:fontRef>
+        </p:style>
+      </p:sp>
+      <p:sp>
+        <p:nvSpPr>
+          <p:cNvPr id="41" name="Rectangle 40">
+            <a:extLst>
+              <a:ext uri="{FF2B5EF4-FFF2-40B4-BE49-F238E27FC236}">
+                <a16:creationId xmlns:a16="http://schemas.microsoft.com/office/drawing/2014/main" id="{8AD54DB8-C150-4290-85D6-F5B0262BFEEF}"/>
+              </a:ext>
+              <a:ext uri="{C183D7F6-B498-43B3-948B-1728B52AA6E4}">
+                <adec:decorative xmlns:adec="http://schemas.microsoft.com/office/drawing/2017/decorative" val="1"/>
+              </a:ext>
+            </a:extLst>
+          </p:cNvPr>
+          <p:cNvSpPr>
+            <a:spLocks noGrp="1" noRot="1" noChangeAspect="1" noMove="1" noResize="1" noEditPoints="1" noAdjustHandles="1" noChangeArrowheads="1" noChangeShapeType="1" noTextEdit="1"/>
+          </p:cNvSpPr>
+          <p:nvPr>
+            <p:extLst>
+              <p:ext uri="{386F3935-93C4-4BCD-93E2-E3B085C9AB24}">
+                <p16:designElem xmlns:p16="http://schemas.microsoft.com/office/powerpoint/2015/main" val="1"/>
+              </p:ext>
+            </p:extLst>
+          </p:nvPr>
+        </p:nvSpPr>
+        <p:spPr>
+          <a:xfrm>
+            <a:off x="446534" y="3085765"/>
+            <a:ext cx="11262866" cy="3304800"/>
+          </a:xfrm>
+          <a:prstGeom prst="rect">
+            <a:avLst/>
+          </a:prstGeom>
+          <a:solidFill>
+            <a:schemeClr val="accent1"/>
+          </a:solidFill>
+          <a:ln>
+            <a:noFill/>
+          </a:ln>
+          <a:effectLst/>
+        </p:spPr>
+        <p:style>
+          <a:lnRef idx="1">
+            <a:schemeClr val="accent1"/>
+          </a:lnRef>
+          <a:fillRef idx="3">
+            <a:schemeClr val="accent1"/>
+          </a:fillRef>
+          <a:effectRef idx="2">
+            <a:schemeClr val="accent1"/>
+          </a:effectRef>
+          <a:fontRef idx="minor">
+            <a:schemeClr val="lt1"/>
+          </a:fontRef>
+        </p:style>
+      </p:sp>
+      <p:sp useBgFill="1">
+        <p:nvSpPr>
+          <p:cNvPr id="43" name="Rectangle 42">
+            <a:extLst>
+              <a:ext uri="{FF2B5EF4-FFF2-40B4-BE49-F238E27FC236}">
+                <a16:creationId xmlns:a16="http://schemas.microsoft.com/office/drawing/2014/main" id="{379F11E2-8BA5-4C5C-AE7C-361E5EA011FF}"/>
+              </a:ext>
+              <a:ext uri="{C183D7F6-B498-43B3-948B-1728B52AA6E4}">
+                <adec:decorative xmlns:adec="http://schemas.microsoft.com/office/drawing/2017/decorative" val="1"/>
+              </a:ext>
+            </a:extLst>
+          </p:cNvPr>
+          <p:cNvSpPr>
+            <a:spLocks noGrp="1" noRot="1" noChangeAspect="1" noMove="1" noResize="1" noEditPoints="1" noAdjustHandles="1" noChangeArrowheads="1" noChangeShapeType="1" noTextEdit="1"/>
+          </p:cNvSpPr>
+          <p:nvPr>
+            <p:extLst>
+              <p:ext uri="{386F3935-93C4-4BCD-93E2-E3B085C9AB24}">
+                <p16:designElem xmlns:p16="http://schemas.microsoft.com/office/powerpoint/2015/main" val="1"/>
+              </p:ext>
+            </p:extLst>
+          </p:nvPr>
+        </p:nvSpPr>
+        <p:spPr>
+          <a:xfrm>
+            <a:off x="0" y="1"/>
+            <a:ext cx="12191999" cy="6858000"/>
+          </a:xfrm>
+          <a:prstGeom prst="rect">
+            <a:avLst/>
+          </a:prstGeom>
+          <a:ln>
+            <a:noFill/>
+          </a:ln>
+        </p:spPr>
+        <p:style>
+          <a:lnRef idx="2">
+            <a:schemeClr val="accent1">
+              <a:shade val="50000"/>
+            </a:schemeClr>
+          </a:lnRef>
+          <a:fillRef idx="1">
+            <a:schemeClr val="accent1"/>
+          </a:fillRef>
+          <a:effectRef idx="0">
+            <a:schemeClr val="accent1"/>
+          </a:effectRef>
+          <a:fontRef idx="minor">
+            <a:schemeClr val="lt1"/>
+          </a:fontRef>
+        </p:style>
+        <p:txBody>
+          <a:bodyPr rtlCol="0" anchor="ctr"/>
+          <a:lstStyle/>
+          <a:p>
+            <a:pPr algn="ctr"/>
+            <a:endParaRPr lang="en-US"/>
+          </a:p>
+        </p:txBody>
+      </p:sp>
+      <p:pic>
+        <p:nvPicPr>
+          <p:cNvPr id="5" name="Content Placeholder 4" descr="A computer screen shot of text&#10;&#10;AI-generated content may be incorrect.">
+            <a:extLst>
+              <a:ext uri="{FF2B5EF4-FFF2-40B4-BE49-F238E27FC236}">
+                <a16:creationId xmlns:a16="http://schemas.microsoft.com/office/drawing/2014/main" id="{FC28D6BA-63E4-BC89-14AD-4175565045C3}"/>
+              </a:ext>
+            </a:extLst>
+          </p:cNvPr>
+          <p:cNvPicPr>
+            <a:picLocks noGrp="1" noChangeAspect="1"/>
+          </p:cNvPicPr>
+          <p:nvPr>
+            <p:ph sz="half" idx="2"/>
+          </p:nvPr>
+        </p:nvPicPr>
+        <p:blipFill>
+          <a:blip r:embed="rId3"/>
+          <a:srcRect l="5068" t="-990" r="28321" b="959"/>
+          <a:stretch>
+            <a:fillRect/>
+          </a:stretch>
+        </p:blipFill>
+        <p:spPr>
+          <a:xfrm>
+            <a:off x="446534" y="723899"/>
+            <a:ext cx="7487848" cy="5678542"/>
+          </a:xfrm>
+          <a:prstGeom prst="rect">
+            <a:avLst/>
+          </a:prstGeom>
+        </p:spPr>
+      </p:pic>
+      <p:sp>
+        <p:nvSpPr>
+          <p:cNvPr id="45" name="Rectangle 44">
+            <a:extLst>
+              <a:ext uri="{FF2B5EF4-FFF2-40B4-BE49-F238E27FC236}">
+                <a16:creationId xmlns:a16="http://schemas.microsoft.com/office/drawing/2014/main" id="{7C00E1DA-EC7C-40FC-95E3-11FDCD2E4291}"/>
+              </a:ext>
+              <a:ext uri="{C183D7F6-B498-43B3-948B-1728B52AA6E4}">
+                <adec:decorative xmlns:adec="http://schemas.microsoft.com/office/drawing/2017/decorative" val="1"/>
+              </a:ext>
+            </a:extLst>
+          </p:cNvPr>
+          <p:cNvSpPr>
+            <a:spLocks noGrp="1" noRot="1" noChangeAspect="1" noMove="1" noResize="1" noEditPoints="1" noAdjustHandles="1" noChangeArrowheads="1" noChangeShapeType="1" noTextEdit="1"/>
+          </p:cNvSpPr>
+          <p:nvPr>
+            <p:extLst>
+              <p:ext uri="{386F3935-93C4-4BCD-93E2-E3B085C9AB24}">
+                <p16:designElem xmlns:p16="http://schemas.microsoft.com/office/powerpoint/2015/main" val="1"/>
+              </p:ext>
+            </p:extLst>
+          </p:nvPr>
+        </p:nvSpPr>
+        <p:spPr>
+          <a:xfrm>
+            <a:off x="8042147" y="723899"/>
+            <a:ext cx="3703320" cy="5666666"/>
+          </a:xfrm>
+          <a:prstGeom prst="rect">
+            <a:avLst/>
+          </a:prstGeom>
+          <a:solidFill>
+            <a:schemeClr val="accent1"/>
+          </a:solidFill>
+          <a:ln>
+            <a:noFill/>
+          </a:ln>
+          <a:effectLst/>
+        </p:spPr>
+        <p:style>
+          <a:lnRef idx="1">
+            <a:schemeClr val="accent1"/>
+          </a:lnRef>
+          <a:fillRef idx="3">
+            <a:schemeClr val="accent1"/>
+          </a:fillRef>
+          <a:effectRef idx="2">
+            <a:schemeClr val="accent1"/>
+          </a:effectRef>
+          <a:fontRef idx="minor">
+            <a:schemeClr val="lt1"/>
+          </a:fontRef>
+        </p:style>
+      </p:sp>
+      <p:sp>
+        <p:nvSpPr>
+          <p:cNvPr id="2" name="Titel 1">
+            <a:extLst>
+              <a:ext uri="{FF2B5EF4-FFF2-40B4-BE49-F238E27FC236}">
+                <a16:creationId xmlns:a16="http://schemas.microsoft.com/office/drawing/2014/main" id="{B081486C-7C0F-8D42-BA8F-41210DAF3296}"/>
+              </a:ext>
+            </a:extLst>
+          </p:cNvPr>
+          <p:cNvSpPr>
+            <a:spLocks noGrp="1"/>
+          </p:cNvSpPr>
+          <p:nvPr>
+            <p:ph type="title"/>
+          </p:nvPr>
+        </p:nvSpPr>
+        <p:spPr>
+          <a:xfrm>
+            <a:off x="8296275" y="1419225"/>
+            <a:ext cx="3081576" cy="2085869"/>
+          </a:xfrm>
+        </p:spPr>
+        <p:txBody>
+          <a:bodyPr vert="horz" lIns="91440" tIns="45720" rIns="91440" bIns="45720" rtlCol="0" anchor="b">
+            <a:normAutofit/>
+          </a:bodyPr>
+          <a:lstStyle/>
+          <a:p>
+            <a:pPr>
+              <a:lnSpc>
+                <a:spcPct val="90000"/>
+              </a:lnSpc>
+            </a:pPr>
+            <a:r>
+              <a:rPr lang="en-US" sz="2300">
+                <a:solidFill>
+                  <a:srgbClr val="FFFFFF"/>
+                </a:solidFill>
+              </a:rPr>
+              <a:t>Proxy - CAVEAT</a:t>
+            </a:r>
+          </a:p>
+        </p:txBody>
+      </p:sp>
+      <p:grpSp>
+        <p:nvGrpSpPr>
+          <p:cNvPr id="47" name="Group 46">
+            <a:extLst>
+              <a:ext uri="{FF2B5EF4-FFF2-40B4-BE49-F238E27FC236}">
+                <a16:creationId xmlns:a16="http://schemas.microsoft.com/office/drawing/2014/main" id="{9A421166-2996-41A7-B094-AE5316F347DD}"/>
+              </a:ext>
+              <a:ext uri="{C183D7F6-B498-43B3-948B-1728B52AA6E4}">
+                <adec:decorative xmlns:adec="http://schemas.microsoft.com/office/drawing/2017/decorative" val="1"/>
+              </a:ext>
+            </a:extLst>
+          </p:cNvPr>
+          <p:cNvGrpSpPr>
+            <a:grpSpLocks noGrp="1" noUngrp="1" noRot="1" noChangeAspect="1" noMove="1" noResize="1"/>
+          </p:cNvGrpSpPr>
+          <p:nvPr>
+            <p:extLst>
+              <p:ext uri="{386F3935-93C4-4BCD-93E2-E3B085C9AB24}">
+                <p16:designElem xmlns:p16="http://schemas.microsoft.com/office/powerpoint/2015/main" val="1"/>
+              </p:ext>
+            </p:extLst>
+          </p:nvPr>
+        </p:nvGrpSpPr>
+        <p:grpSpPr>
+          <a:xfrm>
+            <a:off x="446534" y="453643"/>
+            <a:ext cx="11298933" cy="98554"/>
+            <a:chOff x="446534" y="453643"/>
+            <a:chExt cx="11298933" cy="98554"/>
+          </a:xfrm>
+        </p:grpSpPr>
+        <p:sp>
+          <p:nvSpPr>
+            <p:cNvPr id="48" name="Rectangle 47">
+              <a:extLst>
+                <a:ext uri="{FF2B5EF4-FFF2-40B4-BE49-F238E27FC236}">
+                  <a16:creationId xmlns:a16="http://schemas.microsoft.com/office/drawing/2014/main" id="{FDBB1B92-A3EB-43E4-8FAB-D20E8ED14CEF}"/>
+                </a:ext>
+                <a:ext uri="{C183D7F6-B498-43B3-948B-1728B52AA6E4}">
+                  <adec:decorative xmlns:adec="http://schemas.microsoft.com/office/drawing/2017/decorative" val="1"/>
+                </a:ext>
+              </a:extLst>
+            </p:cNvPr>
+            <p:cNvSpPr/>
+            <p:nvPr>
+              <p:extLst>
+                <p:ext uri="{386F3935-93C4-4BCD-93E2-E3B085C9AB24}">
+                  <p16:designElem xmlns:p16="http://schemas.microsoft.com/office/powerpoint/2015/main" val="1"/>
+                </p:ext>
+              </p:extLst>
+            </p:nvPr>
+          </p:nvSpPr>
+          <p:spPr>
+            <a:xfrm>
+              <a:off x="446534" y="457200"/>
+              <a:ext cx="3703320" cy="94997"/>
+            </a:xfrm>
+            <a:prstGeom prst="rect">
+              <a:avLst/>
+            </a:prstGeom>
+            <a:solidFill>
+              <a:schemeClr val="accent1"/>
+            </a:solidFill>
+            <a:ln>
+              <a:noFill/>
+            </a:ln>
+            <a:effectLst/>
+          </p:spPr>
+          <p:style>
+            <a:lnRef idx="1">
+              <a:schemeClr val="accent1"/>
+            </a:lnRef>
+            <a:fillRef idx="3">
+              <a:schemeClr val="accent1"/>
+            </a:fillRef>
+            <a:effectRef idx="2">
+              <a:schemeClr val="accent1"/>
+            </a:effectRef>
+            <a:fontRef idx="minor">
+              <a:schemeClr val="lt1"/>
+            </a:fontRef>
+          </p:style>
+        </p:sp>
+        <p:sp>
+          <p:nvSpPr>
+            <p:cNvPr id="49" name="Rectangle 48">
+              <a:extLst>
+                <a:ext uri="{FF2B5EF4-FFF2-40B4-BE49-F238E27FC236}">
+                  <a16:creationId xmlns:a16="http://schemas.microsoft.com/office/drawing/2014/main" id="{3F3972F4-FE7E-48EA-AAD8-9BE5750A6672}"/>
+                </a:ext>
+                <a:ext uri="{C183D7F6-B498-43B3-948B-1728B52AA6E4}">
+                  <adec:decorative xmlns:adec="http://schemas.microsoft.com/office/drawing/2017/decorative" val="1"/>
+                </a:ext>
+              </a:extLst>
+            </p:cNvPr>
+            <p:cNvSpPr/>
+            <p:nvPr>
+              <p:extLst>
+                <p:ext uri="{386F3935-93C4-4BCD-93E2-E3B085C9AB24}">
+                  <p16:designElem xmlns:p16="http://schemas.microsoft.com/office/powerpoint/2015/main" val="1"/>
+                </p:ext>
+              </p:extLst>
+            </p:nvPr>
+          </p:nvSpPr>
+          <p:spPr>
+            <a:xfrm>
+              <a:off x="8042147" y="453643"/>
+              <a:ext cx="3703320" cy="98554"/>
+            </a:xfrm>
+            <a:prstGeom prst="rect">
+              <a:avLst/>
+            </a:prstGeom>
+            <a:solidFill>
+              <a:schemeClr val="accent4"/>
+            </a:solidFill>
+            <a:ln>
+              <a:noFill/>
+            </a:ln>
+            <a:effectLst/>
+          </p:spPr>
+          <p:style>
+            <a:lnRef idx="1">
+              <a:schemeClr val="accent1"/>
+            </a:lnRef>
+            <a:fillRef idx="3">
+              <a:schemeClr val="accent1"/>
+            </a:fillRef>
+            <a:effectRef idx="2">
+              <a:schemeClr val="accent1"/>
+            </a:effectRef>
+            <a:fontRef idx="minor">
+              <a:schemeClr val="lt1"/>
+            </a:fontRef>
+          </p:style>
+        </p:sp>
+        <p:sp>
+          <p:nvSpPr>
+            <p:cNvPr id="50" name="Rectangle 49">
+              <a:extLst>
+                <a:ext uri="{FF2B5EF4-FFF2-40B4-BE49-F238E27FC236}">
+                  <a16:creationId xmlns:a16="http://schemas.microsoft.com/office/drawing/2014/main" id="{221614E5-870B-4D5E-A43B-8FF7E5323484}"/>
+                </a:ext>
+                <a:ext uri="{C183D7F6-B498-43B3-948B-1728B52AA6E4}">
+                  <adec:decorative xmlns:adec="http://schemas.microsoft.com/office/drawing/2017/decorative" val="1"/>
+                </a:ext>
+              </a:extLst>
+            </p:cNvPr>
+            <p:cNvSpPr/>
+            <p:nvPr>
+              <p:extLst>
+                <p:ext uri="{386F3935-93C4-4BCD-93E2-E3B085C9AB24}">
+                  <p16:designElem xmlns:p16="http://schemas.microsoft.com/office/powerpoint/2015/main" val="1"/>
+                </p:ext>
+              </p:extLst>
+            </p:nvPr>
+          </p:nvSpPr>
+          <p:spPr>
+            <a:xfrm>
+              <a:off x="4241830" y="457200"/>
+              <a:ext cx="3703320" cy="91440"/>
+            </a:xfrm>
+            <a:prstGeom prst="rect">
+              <a:avLst/>
+            </a:prstGeom>
+            <a:solidFill>
+              <a:schemeClr val="accent2"/>
+            </a:solidFill>
+            <a:ln>
+              <a:noFill/>
+            </a:ln>
+            <a:effectLst/>
+          </p:spPr>
+          <p:style>
+            <a:lnRef idx="1">
+              <a:schemeClr val="accent1"/>
+            </a:lnRef>
+            <a:fillRef idx="3">
+              <a:schemeClr val="accent1"/>
+            </a:fillRef>
+            <a:effectRef idx="2">
+              <a:schemeClr val="accent1"/>
+            </a:effectRef>
+            <a:fontRef idx="minor">
+              <a:schemeClr val="lt1"/>
+            </a:fontRef>
+          </p:style>
+        </p:sp>
+      </p:grpSp>
+    </p:spTree>
+    <p:extLst>
+      <p:ext uri="{BB962C8B-B14F-4D97-AF65-F5344CB8AC3E}">
+        <p14:creationId xmlns:p14="http://schemas.microsoft.com/office/powerpoint/2010/main" val="681392355"/>
+      </p:ext>
+    </p:extLst>
+  </p:cSld>
+  <p:clrMapOvr>
+    <a:masterClrMapping/>
+  </p:clrMapOvr>
+</p:sld>
+</file>
+
+<file path=ppt/slides/slide7.xml><?xml version="1.0" encoding="utf-8"?>
 <p:sld xmlns:a="http://schemas.openxmlformats.org/drawingml/2006/main" xmlns:r="http://schemas.openxmlformats.org/officeDocument/2006/relationships" xmlns:p="http://schemas.openxmlformats.org/presentationml/2006/main">
   <p:cSld>
     <p:bg>
@@ -10207,7 +12035,7 @@
 </p:sld>
 </file>
 
-<file path=ppt/slides/slide5.xml><?xml version="1.0" encoding="utf-8"?>
+<file path=ppt/slides/slide8.xml><?xml version="1.0" encoding="utf-8"?>
 <p:sld xmlns:a="http://schemas.openxmlformats.org/drawingml/2006/main" xmlns:r="http://schemas.openxmlformats.org/officeDocument/2006/relationships" xmlns:p="http://schemas.openxmlformats.org/presentationml/2006/main">
   <p:cSld>
     <p:bg>
@@ -11174,20 +13002,20 @@
 </file>
 
 <file path=customXml/item1.xml><?xml version="1.0" encoding="utf-8"?>
-<p:properties xmlns:p="http://schemas.microsoft.com/office/2006/metadata/properties" xmlns:xsi="http://www.w3.org/2001/XMLSchema-instance" xmlns:pc="http://schemas.microsoft.com/office/infopath/2007/PartnerControls">
-  <documentManagement>
-    <MediaServiceKeyPoints xmlns="71af3243-3dd4-4a8d-8c0d-dd76da1f02a5" xsi:nil="true"/>
-  </documentManagement>
-</p:properties>
-</file>
-
-<file path=customXml/item2.xml><?xml version="1.0" encoding="utf-8"?>
 <?mso-contentType ?>
 <FormTemplates xmlns="http://schemas.microsoft.com/sharepoint/v3/contenttype/forms">
   <Display>DocumentLibraryForm</Display>
   <Edit>DocumentLibraryForm</Edit>
   <New>DocumentLibraryForm</New>
 </FormTemplates>
+</file>
+
+<file path=customXml/item2.xml><?xml version="1.0" encoding="utf-8"?>
+<p:properties xmlns:p="http://schemas.microsoft.com/office/2006/metadata/properties" xmlns:xsi="http://www.w3.org/2001/XMLSchema-instance" xmlns:pc="http://schemas.microsoft.com/office/infopath/2007/PartnerControls">
+  <documentManagement>
+    <MediaServiceKeyPoints xmlns="71af3243-3dd4-4a8d-8c0d-dd76da1f02a5" xsi:nil="true"/>
+  </documentManagement>
+</p:properties>
 </file>
 
 <file path=customXml/item3.xml><?xml version="1.0" encoding="utf-8"?>
@@ -11402,19 +13230,19 @@
 </file>
 
 <file path=customXml/itemProps1.xml><?xml version="1.0" encoding="utf-8"?>
+<ds:datastoreItem xmlns:ds="http://schemas.openxmlformats.org/officeDocument/2006/customXml" ds:itemID="{BA0CF3B2-1F0F-4FC5-8002-3E4869ABAD55}">
+  <ds:schemaRefs>
+    <ds:schemaRef ds:uri="http://schemas.microsoft.com/sharepoint/v3/contenttype/forms"/>
+  </ds:schemaRefs>
+</ds:datastoreItem>
+</file>
+
+<file path=customXml/itemProps2.xml><?xml version="1.0" encoding="utf-8"?>
 <ds:datastoreItem xmlns:ds="http://schemas.openxmlformats.org/officeDocument/2006/customXml" ds:itemID="{1EBC12AA-1C15-4500-BC9C-8EE83A441DE9}">
   <ds:schemaRefs>
     <ds:schemaRef ds:uri="http://schemas.microsoft.com/office/2006/metadata/properties"/>
     <ds:schemaRef ds:uri="http://schemas.microsoft.com/office/infopath/2007/PartnerControls"/>
     <ds:schemaRef ds:uri="71af3243-3dd4-4a8d-8c0d-dd76da1f02a5"/>
-  </ds:schemaRefs>
-</ds:datastoreItem>
-</file>
-
-<file path=customXml/itemProps2.xml><?xml version="1.0" encoding="utf-8"?>
-<ds:datastoreItem xmlns:ds="http://schemas.openxmlformats.org/officeDocument/2006/customXml" ds:itemID="{BA0CF3B2-1F0F-4FC5-8002-3E4869ABAD55}">
-  <ds:schemaRefs>
-    <ds:schemaRef ds:uri="http://schemas.microsoft.com/sharepoint/v3/contenttype/forms"/>
   </ds:schemaRefs>
 </ds:datastoreItem>
 </file>

--- a/projektaufgabe_1/Abschlusspraesentation_proj1.pptx
+++ b/projektaufgabe_1/Abschlusspraesentation_proj1.pptx
@@ -5,17 +5,18 @@
     <p:sldMasterId id="2147483672" r:id="rId4"/>
   </p:sldMasterIdLst>
   <p:notesMasterIdLst>
-    <p:notesMasterId r:id="rId10"/>
+    <p:notesMasterId r:id="rId11"/>
   </p:notesMasterIdLst>
   <p:handoutMasterIdLst>
-    <p:handoutMasterId r:id="rId11"/>
+    <p:handoutMasterId r:id="rId12"/>
   </p:handoutMasterIdLst>
   <p:sldIdLst>
     <p:sldId id="256" r:id="rId5"/>
     <p:sldId id="258" r:id="rId6"/>
     <p:sldId id="259" r:id="rId7"/>
-    <p:sldId id="260" r:id="rId8"/>
-    <p:sldId id="262" r:id="rId9"/>
+    <p:sldId id="263" r:id="rId8"/>
+    <p:sldId id="260" r:id="rId9"/>
+    <p:sldId id="262" r:id="rId10"/>
   </p:sldIdLst>
   <p:sldSz cx="12192000" cy="6858000"/>
   <p:notesSz cx="6858000" cy="9144000"/>
@@ -123,6 +124,51 @@
     </p:ext>
   </p:extLst>
 </p:presentation>
+</file>
+
+<file path=ppt/revisionInfo.xml><?xml version="1.0" encoding="utf-8"?>
+<p1510:revInfo xmlns:a="http://schemas.openxmlformats.org/drawingml/2006/main" xmlns:r="http://schemas.openxmlformats.org/officeDocument/2006/relationships" xmlns:p1510="http://schemas.microsoft.com/office/powerpoint/2015/10/main">
+  <p1510:revLst>
+    <p1510:client id="{28EEE348-08C6-4117-8AD4-B18144D4F358}" v="1" dt="2026-04-27T11:05:21.283"/>
+  </p1510:revLst>
+</p1510:revInfo>
+</file>
+
+<file path=ppt/changesInfos/changesInfo1.xml><?xml version="1.0" encoding="utf-8"?>
+<pc:chgInfo xmlns:a="http://schemas.openxmlformats.org/drawingml/2006/main" xmlns:r="http://schemas.openxmlformats.org/officeDocument/2006/relationships" xmlns:ac="http://schemas.microsoft.com/office/drawing/2013/main/command" xmlns:pc="http://schemas.microsoft.com/office/powerpoint/2013/main/command">
+  <pc:docChgLst>
+    <pc:chgData name="David Ottino" userId="2e8b103f4c6c57f6" providerId="LiveId" clId="{4FBA45C3-B1BF-42F3-969B-7363B7F5A2BB}"/>
+    <pc:docChg chg="undo custSel addSld modSld sldOrd">
+      <pc:chgData name="David Ottino" userId="2e8b103f4c6c57f6" providerId="LiveId" clId="{4FBA45C3-B1BF-42F3-969B-7363B7F5A2BB}" dt="2026-04-27T11:55:10.424" v="619" actId="20577"/>
+      <pc:docMkLst>
+        <pc:docMk/>
+      </pc:docMkLst>
+      <pc:sldChg chg="modSp add mod ord">
+        <pc:chgData name="David Ottino" userId="2e8b103f4c6c57f6" providerId="LiveId" clId="{4FBA45C3-B1BF-42F3-969B-7363B7F5A2BB}" dt="2026-04-27T11:55:10.424" v="619" actId="20577"/>
+        <pc:sldMkLst>
+          <pc:docMk/>
+          <pc:sldMk cId="562372732" sldId="263"/>
+        </pc:sldMkLst>
+        <pc:spChg chg="mod">
+          <ac:chgData name="David Ottino" userId="2e8b103f4c6c57f6" providerId="LiveId" clId="{4FBA45C3-B1BF-42F3-969B-7363B7F5A2BB}" dt="2026-04-27T10:35:08.672" v="5" actId="20577"/>
+          <ac:spMkLst>
+            <pc:docMk/>
+            <pc:sldMk cId="562372732" sldId="263"/>
+            <ac:spMk id="2" creationId="{E41DB523-2AA5-E195-9B0E-2822584CDF15}"/>
+          </ac:spMkLst>
+        </pc:spChg>
+        <pc:spChg chg="mod">
+          <ac:chgData name="David Ottino" userId="2e8b103f4c6c57f6" providerId="LiveId" clId="{4FBA45C3-B1BF-42F3-969B-7363B7F5A2BB}" dt="2026-04-27T11:55:10.424" v="619" actId="20577"/>
+          <ac:spMkLst>
+            <pc:docMk/>
+            <pc:sldMk cId="562372732" sldId="263"/>
+            <ac:spMk id="6" creationId="{44965F44-0B7D-DABF-86EC-5F172101FEC2}"/>
+          </ac:spMkLst>
+        </pc:spChg>
+      </pc:sldChg>
+    </pc:docChg>
+  </pc:docChgLst>
+</pc:chgInfo>
 </file>
 
 <file path=ppt/diagrams/colors1.xml><?xml version="1.0" encoding="utf-8"?>
@@ -4014,7 +4060,7 @@
           <a:p>
             <a:fld id="{BA1CF449-96F2-4140-9ACD-00D2DB603D3A}" type="datetimeFigureOut">
               <a:rPr lang="de-DE" smtClean="0"/>
-              <a:t>26.04.2026</a:t>
+              <a:t>27.04.2026</a:t>
             </a:fld>
             <a:endParaRPr lang="de-DE"/>
           </a:p>
@@ -4192,7 +4238,7 @@
           <a:p>
             <a:fld id="{7EA953E0-B6BA-4FDC-A9D7-5E3E2548A0EF}" type="datetimeFigureOut">
               <a:rPr lang="de-DE" noProof="0" smtClean="0"/>
-              <a:t>26.04.2026</a:t>
+              <a:t>27.04.2026</a:t>
             </a:fld>
             <a:endParaRPr lang="de-DE" noProof="0"/>
           </a:p>
@@ -4717,6 +4763,114 @@
   <p:cSld>
     <p:spTree>
       <p:nvGrpSpPr>
+        <p:cNvPr id="1" name="">
+          <a:extLst>
+            <a:ext uri="{FF2B5EF4-FFF2-40B4-BE49-F238E27FC236}">
+              <a16:creationId xmlns:a16="http://schemas.microsoft.com/office/drawing/2014/main" id="{3BCF92C4-BD0A-907D-309B-80ECEC6F01B4}"/>
+            </a:ext>
+          </a:extLst>
+        </p:cNvPr>
+        <p:cNvGrpSpPr/>
+        <p:nvPr/>
+      </p:nvGrpSpPr>
+      <p:grpSpPr>
+        <a:xfrm>
+          <a:off x="0" y="0"/>
+          <a:ext cx="0" cy="0"/>
+          <a:chOff x="0" y="0"/>
+          <a:chExt cx="0" cy="0"/>
+        </a:xfrm>
+      </p:grpSpPr>
+      <p:sp>
+        <p:nvSpPr>
+          <p:cNvPr id="2" name="Folienbildplatzhalter 1">
+            <a:extLst>
+              <a:ext uri="{FF2B5EF4-FFF2-40B4-BE49-F238E27FC236}">
+                <a16:creationId xmlns:a16="http://schemas.microsoft.com/office/drawing/2014/main" id="{93749952-C1B0-F7E2-8816-A4816E8D6059}"/>
+              </a:ext>
+            </a:extLst>
+          </p:cNvPr>
+          <p:cNvSpPr>
+            <a:spLocks noGrp="1" noRot="1" noChangeAspect="1"/>
+          </p:cNvSpPr>
+          <p:nvPr>
+            <p:ph type="sldImg"/>
+          </p:nvPr>
+        </p:nvSpPr>
+        <p:spPr/>
+      </p:sp>
+      <p:sp>
+        <p:nvSpPr>
+          <p:cNvPr id="3" name="Notizenplatzhalter 2">
+            <a:extLst>
+              <a:ext uri="{FF2B5EF4-FFF2-40B4-BE49-F238E27FC236}">
+                <a16:creationId xmlns:a16="http://schemas.microsoft.com/office/drawing/2014/main" id="{A47D2FED-E8B9-6A0E-1CE6-BFEAD5A68FA4}"/>
+              </a:ext>
+            </a:extLst>
+          </p:cNvPr>
+          <p:cNvSpPr>
+            <a:spLocks noGrp="1"/>
+          </p:cNvSpPr>
+          <p:nvPr>
+            <p:ph type="body" idx="1"/>
+          </p:nvPr>
+        </p:nvSpPr>
+        <p:spPr/>
+        <p:txBody>
+          <a:bodyPr/>
+          <a:lstStyle/>
+          <a:p>
+            <a:endParaRPr lang="de-DE"/>
+          </a:p>
+        </p:txBody>
+      </p:sp>
+      <p:sp>
+        <p:nvSpPr>
+          <p:cNvPr id="4" name="Foliennummernplatzhalter 3">
+            <a:extLst>
+              <a:ext uri="{FF2B5EF4-FFF2-40B4-BE49-F238E27FC236}">
+                <a16:creationId xmlns:a16="http://schemas.microsoft.com/office/drawing/2014/main" id="{4F02B3CC-B94D-ED2E-9A1D-DA590A649CBC}"/>
+              </a:ext>
+            </a:extLst>
+          </p:cNvPr>
+          <p:cNvSpPr>
+            <a:spLocks noGrp="1"/>
+          </p:cNvSpPr>
+          <p:nvPr>
+            <p:ph type="sldNum" sz="quarter" idx="5"/>
+          </p:nvPr>
+        </p:nvSpPr>
+        <p:spPr/>
+        <p:txBody>
+          <a:bodyPr/>
+          <a:lstStyle/>
+          <a:p>
+            <a:fld id="{DEF059D1-1E64-4095-816B-E25F58AA521B}" type="slidenum">
+              <a:rPr lang="de-DE" smtClean="0"/>
+              <a:t>4</a:t>
+            </a:fld>
+            <a:endParaRPr lang="de-DE"/>
+          </a:p>
+        </p:txBody>
+      </p:sp>
+    </p:spTree>
+    <p:extLst>
+      <p:ext uri="{BB962C8B-B14F-4D97-AF65-F5344CB8AC3E}">
+        <p14:creationId xmlns:p14="http://schemas.microsoft.com/office/powerpoint/2010/main" val="586538835"/>
+      </p:ext>
+    </p:extLst>
+  </p:cSld>
+  <p:clrMapOvr>
+    <a:masterClrMapping/>
+  </p:clrMapOvr>
+</p:notes>
+</file>
+
+<file path=ppt/notesSlides/notesSlide5.xml><?xml version="1.0" encoding="utf-8"?>
+<p:notes xmlns:a="http://schemas.openxmlformats.org/drawingml/2006/main" xmlns:r="http://schemas.openxmlformats.org/officeDocument/2006/relationships" xmlns:p="http://schemas.openxmlformats.org/presentationml/2006/main">
+  <p:cSld>
+    <p:spTree>
+      <p:nvGrpSpPr>
         <p:cNvPr id="1" name=""/>
         <p:cNvGrpSpPr/>
         <p:nvPr/>
@@ -4777,7 +4931,7 @@
           <a:p>
             <a:fld id="{DEF059D1-1E64-4095-816B-E25F58AA521B}" type="slidenum">
               <a:rPr lang="de-DE" smtClean="0"/>
-              <a:t>4</a:t>
+              <a:t>5</a:t>
             </a:fld>
             <a:endParaRPr lang="de-DE"/>
           </a:p>
@@ -4796,7 +4950,7 @@
 </p:notes>
 </file>
 
-<file path=ppt/notesSlides/notesSlide5.xml><?xml version="1.0" encoding="utf-8"?>
+<file path=ppt/notesSlides/notesSlide6.xml><?xml version="1.0" encoding="utf-8"?>
 <p:notes xmlns:a="http://schemas.openxmlformats.org/drawingml/2006/main" xmlns:r="http://schemas.openxmlformats.org/officeDocument/2006/relationships" xmlns:p="http://schemas.openxmlformats.org/presentationml/2006/main">
   <p:cSld>
     <p:spTree>
@@ -4885,7 +5039,7 @@
           <a:p>
             <a:fld id="{DEF059D1-1E64-4095-816B-E25F58AA521B}" type="slidenum">
               <a:rPr lang="de-DE" smtClean="0"/>
-              <a:t>5</a:t>
+              <a:t>6</a:t>
             </a:fld>
             <a:endParaRPr lang="de-DE"/>
           </a:p>
@@ -5157,7 +5311,7 @@
             <a:pPr rtl="0"/>
             <a:fld id="{6F017FFA-7AEE-4C00-88EF-1712D868907B}" type="datetime1">
               <a:rPr lang="de-DE" noProof="0" smtClean="0"/>
-              <a:t>26.04.2026</a:t>
+              <a:t>27.04.2026</a:t>
             </a:fld>
             <a:endParaRPr lang="de-DE" noProof="0"/>
           </a:p>
@@ -5422,7 +5576,7 @@
             <a:pPr rtl="0"/>
             <a:fld id="{E40C8376-9E33-4792-89DD-E496184A2796}" type="datetime1">
               <a:rPr lang="de-DE" noProof="0" smtClean="0"/>
-              <a:t>26.04.2026</a:t>
+              <a:t>27.04.2026</a:t>
             </a:fld>
             <a:endParaRPr lang="de-DE" noProof="0"/>
           </a:p>
@@ -5660,7 +5814,7 @@
             <a:pPr rtl="0"/>
             <a:fld id="{3B2E4CCC-08DB-477E-9152-1DAD05168712}" type="datetime1">
               <a:rPr lang="de-DE" noProof="0" smtClean="0"/>
-              <a:t>26.04.2026</a:t>
+              <a:t>27.04.2026</a:t>
             </a:fld>
             <a:endParaRPr lang="de-DE" noProof="0"/>
           </a:p>
@@ -5910,7 +6064,7 @@
             <a:pPr rtl="0"/>
             <a:fld id="{9500A958-47F8-4A25-9D65-93789F465065}" type="datetime1">
               <a:rPr lang="de-DE" noProof="0" smtClean="0"/>
-              <a:t>26.04.2026</a:t>
+              <a:t>27.04.2026</a:t>
             </a:fld>
             <a:endParaRPr lang="de-DE" noProof="0"/>
           </a:p>
@@ -6221,7 +6375,7 @@
             <a:pPr rtl="0"/>
             <a:fld id="{52FD7EF8-B80C-4EAF-BDE9-3F6BA4E2A20F}" type="datetime1">
               <a:rPr lang="de-DE" noProof="0" smtClean="0"/>
-              <a:t>26.04.2026</a:t>
+              <a:t>27.04.2026</a:t>
             </a:fld>
             <a:endParaRPr lang="de-DE" noProof="0"/>
           </a:p>
@@ -6532,7 +6686,7 @@
             <a:pPr rtl="0"/>
             <a:fld id="{ECF5CBA0-3018-4AED-9709-ED5ED6DE6464}" type="datetime1">
               <a:rPr lang="de-DE" noProof="0" smtClean="0"/>
-              <a:t>26.04.2026</a:t>
+              <a:t>27.04.2026</a:t>
             </a:fld>
             <a:endParaRPr lang="de-DE" noProof="0"/>
           </a:p>
@@ -6956,7 +7110,7 @@
             <a:pPr rtl="0"/>
             <a:fld id="{3C9E23F0-8CA4-4891-BD20-E4745AC04CDA}" type="datetime1">
               <a:rPr lang="de-DE" noProof="0" smtClean="0"/>
-              <a:t>26.04.2026</a:t>
+              <a:t>27.04.2026</a:t>
             </a:fld>
             <a:endParaRPr lang="de-DE" noProof="0"/>
           </a:p>
@@ -7055,7 +7209,7 @@
             <a:pPr rtl="0"/>
             <a:fld id="{97049BD8-EDBB-43F8-A43A-C3DFCBD8BA18}" type="datetime1">
               <a:rPr lang="de-DE" noProof="0" smtClean="0"/>
-              <a:t>26.04.2026</a:t>
+              <a:t>27.04.2026</a:t>
             </a:fld>
             <a:endParaRPr lang="de-DE" noProof="0"/>
           </a:p>
@@ -7221,7 +7375,7 @@
             <a:pPr rtl="0"/>
             <a:fld id="{71C89A48-29B7-4D5A-8AB0-E4BA246CFAD2}" type="datetime1">
               <a:rPr lang="de-DE" noProof="0" smtClean="0"/>
-              <a:t>26.04.2026</a:t>
+              <a:t>27.04.2026</a:t>
             </a:fld>
             <a:endParaRPr lang="de-DE" noProof="0"/>
           </a:p>
@@ -7602,7 +7756,7 @@
             <a:pPr rtl="0"/>
             <a:fld id="{AFD730BD-5937-405C-BD95-FF3ACE1D618D}" type="datetime1">
               <a:rPr lang="de-DE" noProof="0" smtClean="0"/>
-              <a:t>26.04.2026</a:t>
+              <a:t>27.04.2026</a:t>
             </a:fld>
             <a:endParaRPr lang="de-DE" noProof="0"/>
           </a:p>
@@ -7895,7 +8049,7 @@
             <a:pPr rtl="0"/>
             <a:fld id="{F7AB63DA-8489-4CDE-978B-BB7BCFF91C84}" type="datetime1">
               <a:rPr lang="de-DE" noProof="0" smtClean="0"/>
-              <a:t>26.04.2026</a:t>
+              <a:t>27.04.2026</a:t>
             </a:fld>
             <a:endParaRPr lang="de-DE" noProof="0"/>
           </a:p>
@@ -8109,7 +8263,7 @@
             <a:pPr rtl="0"/>
             <a:fld id="{16D808DD-B590-408B-8826-B4C3892F22C7}" type="datetime1">
               <a:rPr lang="de-DE" noProof="0" smtClean="0"/>
-              <a:t>26.04.2026</a:t>
+              <a:t>27.04.2026</a:t>
             </a:fld>
             <a:endParaRPr lang="de-DE" noProof="0"/>
           </a:p>
@@ -9752,6 +9906,202 @@
     </p:bg>
     <p:spTree>
       <p:nvGrpSpPr>
+        <p:cNvPr id="1" name="">
+          <a:extLst>
+            <a:ext uri="{FF2B5EF4-FFF2-40B4-BE49-F238E27FC236}">
+              <a16:creationId xmlns:a16="http://schemas.microsoft.com/office/drawing/2014/main" id="{17036203-F53B-C35D-ECDE-BD734F06B775}"/>
+            </a:ext>
+          </a:extLst>
+        </p:cNvPr>
+        <p:cNvGrpSpPr/>
+        <p:nvPr/>
+      </p:nvGrpSpPr>
+      <p:grpSpPr>
+        <a:xfrm>
+          <a:off x="0" y="0"/>
+          <a:ext cx="0" cy="0"/>
+          <a:chOff x="0" y="0"/>
+          <a:chExt cx="0" cy="0"/>
+        </a:xfrm>
+      </p:grpSpPr>
+      <p:sp>
+        <p:nvSpPr>
+          <p:cNvPr id="2" name="Titel 1">
+            <a:extLst>
+              <a:ext uri="{FF2B5EF4-FFF2-40B4-BE49-F238E27FC236}">
+                <a16:creationId xmlns:a16="http://schemas.microsoft.com/office/drawing/2014/main" id="{E41DB523-2AA5-E195-9B0E-2822584CDF15}"/>
+              </a:ext>
+            </a:extLst>
+          </p:cNvPr>
+          <p:cNvSpPr>
+            <a:spLocks noGrp="1"/>
+          </p:cNvSpPr>
+          <p:nvPr>
+            <p:ph type="title"/>
+          </p:nvPr>
+        </p:nvSpPr>
+        <p:spPr/>
+        <p:txBody>
+          <a:bodyPr rtlCol="0"/>
+          <a:lstStyle/>
+          <a:p>
+            <a:pPr rtl="0"/>
+            <a:r>
+              <a:rPr lang="de-DE" dirty="0"/>
+              <a:t>API</a:t>
+            </a:r>
+          </a:p>
+        </p:txBody>
+      </p:sp>
+      <p:sp>
+        <p:nvSpPr>
+          <p:cNvPr id="6" name="Inhaltsplatzhalter 5">
+            <a:extLst>
+              <a:ext uri="{FF2B5EF4-FFF2-40B4-BE49-F238E27FC236}">
+                <a16:creationId xmlns:a16="http://schemas.microsoft.com/office/drawing/2014/main" id="{44965F44-0B7D-DABF-86EC-5F172101FEC2}"/>
+              </a:ext>
+            </a:extLst>
+          </p:cNvPr>
+          <p:cNvSpPr>
+            <a:spLocks noGrp="1"/>
+          </p:cNvSpPr>
+          <p:nvPr>
+            <p:ph sz="half" idx="2"/>
+          </p:nvPr>
+        </p:nvSpPr>
+        <p:spPr>
+          <a:xfrm>
+            <a:off x="581193" y="1907458"/>
+            <a:ext cx="11029616" cy="4385187"/>
+          </a:xfrm>
+        </p:spPr>
+        <p:txBody>
+          <a:bodyPr>
+            <a:normAutofit/>
+          </a:bodyPr>
+          <a:lstStyle/>
+          <a:p>
+            <a:r>
+              <a:rPr lang="de-AT" dirty="0"/>
+              <a:t>Vertikale Daten wurden über riesige View mit vielen </a:t>
+            </a:r>
+            <a:r>
+              <a:rPr lang="de-AT" dirty="0" err="1"/>
+              <a:t>Left</a:t>
+            </a:r>
+            <a:r>
+              <a:rPr lang="de-AT" dirty="0"/>
+              <a:t> </a:t>
+            </a:r>
+            <a:r>
+              <a:rPr lang="de-AT" dirty="0" err="1"/>
+              <a:t>Joins</a:t>
+            </a:r>
+            <a:r>
+              <a:rPr lang="de-AT" dirty="0"/>
+              <a:t> wieder zusammengefügt</a:t>
+            </a:r>
+          </a:p>
+          <a:p>
+            <a:r>
+              <a:rPr lang="de-AT" dirty="0"/>
+              <a:t>Statt statischer Tabelle Nutzung von prozeduralen Funktionen im DBMS</a:t>
+            </a:r>
+          </a:p>
+          <a:p>
+            <a:r>
+              <a:rPr lang="de-AT" dirty="0"/>
+              <a:t>Funktionen werden dynamisch für jeweiliges Datenbankschema generiert</a:t>
+            </a:r>
+          </a:p>
+          <a:p>
+            <a:r>
+              <a:rPr lang="de-AT" dirty="0" err="1"/>
+              <a:t>q_i</a:t>
+            </a:r>
+            <a:r>
+              <a:rPr lang="de-AT" dirty="0"/>
+              <a:t>:</a:t>
+            </a:r>
+          </a:p>
+          <a:p>
+            <a:pPr lvl="1"/>
+            <a:r>
+              <a:rPr lang="de-AT" dirty="0"/>
+              <a:t>Sammeln aller Attribute aus vertikalen Views</a:t>
+            </a:r>
+          </a:p>
+          <a:p>
+            <a:pPr lvl="1"/>
+            <a:r>
+              <a:rPr lang="de-AT" dirty="0"/>
+              <a:t>Generierung einer Unterabfrage für jede Spalte</a:t>
+            </a:r>
+          </a:p>
+          <a:p>
+            <a:pPr lvl="1"/>
+            <a:r>
+              <a:rPr lang="de-AT" dirty="0"/>
+              <a:t>Horizontale Rekonstruktion durch RETURNS TABLE</a:t>
+            </a:r>
+          </a:p>
+          <a:p>
+            <a:r>
+              <a:rPr lang="de-AT" dirty="0" err="1"/>
+              <a:t>q_ii</a:t>
+            </a:r>
+            <a:r>
+              <a:rPr lang="de-AT" dirty="0"/>
+              <a:t>:</a:t>
+            </a:r>
+          </a:p>
+          <a:p>
+            <a:pPr lvl="1"/>
+            <a:r>
+              <a:rPr lang="de-AT" dirty="0"/>
+              <a:t>Beide Partitionen werden nach Attribut und Wert mit Index durchsucht</a:t>
+            </a:r>
+          </a:p>
+          <a:p>
+            <a:pPr lvl="1"/>
+            <a:r>
+              <a:rPr lang="de-AT" dirty="0"/>
+              <a:t>Ergebnisse werden über </a:t>
+            </a:r>
+            <a:r>
+              <a:rPr lang="de-AT"/>
+              <a:t>UNION zusammengefügt</a:t>
+            </a:r>
+            <a:endParaRPr lang="de-AT" dirty="0"/>
+          </a:p>
+        </p:txBody>
+      </p:sp>
+    </p:spTree>
+    <p:extLst>
+      <p:ext uri="{BB962C8B-B14F-4D97-AF65-F5344CB8AC3E}">
+        <p14:creationId xmlns:p14="http://schemas.microsoft.com/office/powerpoint/2010/main" val="562372732"/>
+      </p:ext>
+    </p:extLst>
+  </p:cSld>
+  <p:clrMapOvr>
+    <a:masterClrMapping/>
+  </p:clrMapOvr>
+</p:sld>
+</file>
+
+<file path=ppt/slides/slide5.xml><?xml version="1.0" encoding="utf-8"?>
+<p:sld xmlns:a="http://schemas.openxmlformats.org/drawingml/2006/main" xmlns:r="http://schemas.openxmlformats.org/officeDocument/2006/relationships" xmlns:p="http://schemas.openxmlformats.org/presentationml/2006/main">
+  <p:cSld>
+    <p:bg>
+      <p:bgPr>
+        <a:solidFill>
+          <a:schemeClr val="bg1"/>
+        </a:solidFill>
+        <a:effectLst/>
+      </p:bgPr>
+    </p:bg>
+    <p:spTree>
+      <p:nvGrpSpPr>
         <p:cNvPr id="1" name=""/>
         <p:cNvGrpSpPr/>
         <p:nvPr/>
@@ -10207,7 +10557,7 @@
 </p:sld>
 </file>
 
-<file path=ppt/slides/slide5.xml><?xml version="1.0" encoding="utf-8"?>
+<file path=ppt/slides/slide6.xml><?xml version="1.0" encoding="utf-8"?>
 <p:sld xmlns:a="http://schemas.openxmlformats.org/drawingml/2006/main" xmlns:r="http://schemas.openxmlformats.org/officeDocument/2006/relationships" xmlns:p="http://schemas.openxmlformats.org/presentationml/2006/main">
   <p:cSld>
     <p:bg>
@@ -11174,20 +11524,20 @@
 </file>
 
 <file path=customXml/item1.xml><?xml version="1.0" encoding="utf-8"?>
-<p:properties xmlns:p="http://schemas.microsoft.com/office/2006/metadata/properties" xmlns:xsi="http://www.w3.org/2001/XMLSchema-instance" xmlns:pc="http://schemas.microsoft.com/office/infopath/2007/PartnerControls">
-  <documentManagement>
-    <MediaServiceKeyPoints xmlns="71af3243-3dd4-4a8d-8c0d-dd76da1f02a5" xsi:nil="true"/>
-  </documentManagement>
-</p:properties>
-</file>
-
-<file path=customXml/item2.xml><?xml version="1.0" encoding="utf-8"?>
 <?mso-contentType ?>
 <FormTemplates xmlns="http://schemas.microsoft.com/sharepoint/v3/contenttype/forms">
   <Display>DocumentLibraryForm</Display>
   <Edit>DocumentLibraryForm</Edit>
   <New>DocumentLibraryForm</New>
 </FormTemplates>
+</file>
+
+<file path=customXml/item2.xml><?xml version="1.0" encoding="utf-8"?>
+<p:properties xmlns:p="http://schemas.microsoft.com/office/2006/metadata/properties" xmlns:xsi="http://www.w3.org/2001/XMLSchema-instance" xmlns:pc="http://schemas.microsoft.com/office/infopath/2007/PartnerControls">
+  <documentManagement>
+    <MediaServiceKeyPoints xmlns="71af3243-3dd4-4a8d-8c0d-dd76da1f02a5" xsi:nil="true"/>
+  </documentManagement>
+</p:properties>
 </file>
 
 <file path=customXml/item3.xml><?xml version="1.0" encoding="utf-8"?>
@@ -11402,19 +11752,19 @@
 </file>
 
 <file path=customXml/itemProps1.xml><?xml version="1.0" encoding="utf-8"?>
+<ds:datastoreItem xmlns:ds="http://schemas.openxmlformats.org/officeDocument/2006/customXml" ds:itemID="{BA0CF3B2-1F0F-4FC5-8002-3E4869ABAD55}">
+  <ds:schemaRefs>
+    <ds:schemaRef ds:uri="http://schemas.microsoft.com/sharepoint/v3/contenttype/forms"/>
+  </ds:schemaRefs>
+</ds:datastoreItem>
+</file>
+
+<file path=customXml/itemProps2.xml><?xml version="1.0" encoding="utf-8"?>
 <ds:datastoreItem xmlns:ds="http://schemas.openxmlformats.org/officeDocument/2006/customXml" ds:itemID="{1EBC12AA-1C15-4500-BC9C-8EE83A441DE9}">
   <ds:schemaRefs>
     <ds:schemaRef ds:uri="http://schemas.microsoft.com/office/2006/metadata/properties"/>
     <ds:schemaRef ds:uri="http://schemas.microsoft.com/office/infopath/2007/PartnerControls"/>
     <ds:schemaRef ds:uri="71af3243-3dd4-4a8d-8c0d-dd76da1f02a5"/>
-  </ds:schemaRefs>
-</ds:datastoreItem>
-</file>
-
-<file path=customXml/itemProps2.xml><?xml version="1.0" encoding="utf-8"?>
-<ds:datastoreItem xmlns:ds="http://schemas.openxmlformats.org/officeDocument/2006/customXml" ds:itemID="{BA0CF3B2-1F0F-4FC5-8002-3E4869ABAD55}">
-  <ds:schemaRefs>
-    <ds:schemaRef ds:uri="http://schemas.microsoft.com/sharepoint/v3/contenttype/forms"/>
   </ds:schemaRefs>
 </ds:datastoreItem>
 </file>

--- a/projektaufgabe_1/Abschlusspraesentation_proj1.pptx
+++ b/projektaufgabe_1/Abschlusspraesentation_proj1.pptx
@@ -5,18 +5,21 @@
     <p:sldMasterId id="2147483672" r:id="rId4"/>
   </p:sldMasterIdLst>
   <p:notesMasterIdLst>
-    <p:notesMasterId r:id="rId11"/>
+    <p:notesMasterId r:id="rId14"/>
   </p:notesMasterIdLst>
   <p:handoutMasterIdLst>
-    <p:handoutMasterId r:id="rId12"/>
+    <p:handoutMasterId r:id="rId15"/>
   </p:handoutMasterIdLst>
   <p:sldIdLst>
     <p:sldId id="256" r:id="rId5"/>
     <p:sldId id="258" r:id="rId6"/>
-    <p:sldId id="259" r:id="rId7"/>
-    <p:sldId id="263" r:id="rId8"/>
-    <p:sldId id="260" r:id="rId9"/>
-    <p:sldId id="262" r:id="rId10"/>
+    <p:sldId id="264" r:id="rId7"/>
+    <p:sldId id="259" r:id="rId8"/>
+    <p:sldId id="265" r:id="rId9"/>
+    <p:sldId id="266" r:id="rId10"/>
+    <p:sldId id="263" r:id="rId11"/>
+    <p:sldId id="260" r:id="rId12"/>
+    <p:sldId id="262" r:id="rId13"/>
   </p:sldIdLst>
   <p:sldSz cx="12192000" cy="6858000"/>
   <p:notesSz cx="6858000" cy="9144000"/>
@@ -129,7 +132,7 @@
 <file path=ppt/revisionInfo.xml><?xml version="1.0" encoding="utf-8"?>
 <p1510:revInfo xmlns:a="http://schemas.openxmlformats.org/drawingml/2006/main" xmlns:r="http://schemas.openxmlformats.org/officeDocument/2006/relationships" xmlns:p1510="http://schemas.microsoft.com/office/powerpoint/2015/10/main">
   <p1510:revLst>
-    <p1510:client id="{28EEE348-08C6-4117-8AD4-B18144D4F358}" v="1" dt="2026-04-27T11:05:21.283"/>
+    <p1510:client id="{28EEE348-08C6-4117-8AD4-B18144D4F358}" v="5" dt="2026-04-27T12:07:25.110"/>
   </p1510:revLst>
 </p1510:revInfo>
 </file>
@@ -138,11 +141,18 @@
 <pc:chgInfo xmlns:a="http://schemas.openxmlformats.org/drawingml/2006/main" xmlns:r="http://schemas.openxmlformats.org/officeDocument/2006/relationships" xmlns:ac="http://schemas.microsoft.com/office/drawing/2013/main/command" xmlns:pc="http://schemas.microsoft.com/office/powerpoint/2013/main/command">
   <pc:docChgLst>
     <pc:chgData name="David Ottino" userId="2e8b103f4c6c57f6" providerId="LiveId" clId="{4FBA45C3-B1BF-42F3-969B-7363B7F5A2BB}"/>
-    <pc:docChg chg="undo custSel addSld modSld sldOrd">
-      <pc:chgData name="David Ottino" userId="2e8b103f4c6c57f6" providerId="LiveId" clId="{4FBA45C3-B1BF-42F3-969B-7363B7F5A2BB}" dt="2026-04-27T11:55:10.424" v="619" actId="20577"/>
+    <pc:docChg chg="undo custSel addSld delSld modSld sldOrd">
+      <pc:chgData name="David Ottino" userId="2e8b103f4c6c57f6" providerId="LiveId" clId="{4FBA45C3-B1BF-42F3-969B-7363B7F5A2BB}" dt="2026-04-27T12:07:25.110" v="626"/>
       <pc:docMkLst>
         <pc:docMk/>
       </pc:docMkLst>
+      <pc:sldChg chg="add del setBg">
+        <pc:chgData name="David Ottino" userId="2e8b103f4c6c57f6" providerId="LiveId" clId="{4FBA45C3-B1BF-42F3-969B-7363B7F5A2BB}" dt="2026-04-27T12:06:56.603" v="621"/>
+        <pc:sldMkLst>
+          <pc:docMk/>
+          <pc:sldMk cId="497607547" sldId="258"/>
+        </pc:sldMkLst>
+      </pc:sldChg>
       <pc:sldChg chg="modSp add mod ord">
         <pc:chgData name="David Ottino" userId="2e8b103f4c6c57f6" providerId="LiveId" clId="{4FBA45C3-B1BF-42F3-969B-7363B7F5A2BB}" dt="2026-04-27T11:55:10.424" v="619" actId="20577"/>
         <pc:sldMkLst>
@@ -165,6 +175,139 @@
             <ac:spMk id="6" creationId="{44965F44-0B7D-DABF-86EC-5F172101FEC2}"/>
           </ac:spMkLst>
         </pc:spChg>
+      </pc:sldChg>
+      <pc:sldChg chg="add setBg">
+        <pc:chgData name="David Ottino" userId="2e8b103f4c6c57f6" providerId="LiveId" clId="{4FBA45C3-B1BF-42F3-969B-7363B7F5A2BB}" dt="2026-04-27T12:07:02.968" v="622"/>
+        <pc:sldMkLst>
+          <pc:docMk/>
+          <pc:sldMk cId="2820873714" sldId="264"/>
+        </pc:sldMkLst>
+      </pc:sldChg>
+      <pc:sldChg chg="delSp add setBg delDesignElem">
+        <pc:chgData name="David Ottino" userId="2e8b103f4c6c57f6" providerId="LiveId" clId="{4FBA45C3-B1BF-42F3-969B-7363B7F5A2BB}" dt="2026-04-27T12:07:20.290" v="624"/>
+        <pc:sldMkLst>
+          <pc:docMk/>
+          <pc:sldMk cId="931135336" sldId="265"/>
+        </pc:sldMkLst>
+        <pc:spChg chg="del">
+          <ac:chgData name="David Ottino" userId="2e8b103f4c6c57f6" providerId="LiveId" clId="{4FBA45C3-B1BF-42F3-969B-7363B7F5A2BB}" dt="2026-04-27T12:07:20.290" v="624"/>
+          <ac:spMkLst>
+            <pc:docMk/>
+            <pc:sldMk cId="931135336" sldId="265"/>
+            <ac:spMk id="15" creationId="{A078A52F-85EA-4C0B-962B-D9D9DD4DD78C}"/>
+          </ac:spMkLst>
+        </pc:spChg>
+        <pc:spChg chg="del">
+          <ac:chgData name="David Ottino" userId="2e8b103f4c6c57f6" providerId="LiveId" clId="{4FBA45C3-B1BF-42F3-969B-7363B7F5A2BB}" dt="2026-04-27T12:07:20.290" v="624"/>
+          <ac:spMkLst>
+            <pc:docMk/>
+            <pc:sldMk cId="931135336" sldId="265"/>
+            <ac:spMk id="17" creationId="{919797D5-5700-4683-B30A-5B4D56CB8270}"/>
+          </ac:spMkLst>
+        </pc:spChg>
+        <pc:spChg chg="del">
+          <ac:chgData name="David Ottino" userId="2e8b103f4c6c57f6" providerId="LiveId" clId="{4FBA45C3-B1BF-42F3-969B-7363B7F5A2BB}" dt="2026-04-27T12:07:20.290" v="624"/>
+          <ac:spMkLst>
+            <pc:docMk/>
+            <pc:sldMk cId="931135336" sldId="265"/>
+            <ac:spMk id="19" creationId="{4856A7B9-9801-42EC-A4C9-7E22A56EF53D}"/>
+          </ac:spMkLst>
+        </pc:spChg>
+        <pc:spChg chg="del">
+          <ac:chgData name="David Ottino" userId="2e8b103f4c6c57f6" providerId="LiveId" clId="{4FBA45C3-B1BF-42F3-969B-7363B7F5A2BB}" dt="2026-04-27T12:07:20.290" v="624"/>
+          <ac:spMkLst>
+            <pc:docMk/>
+            <pc:sldMk cId="931135336" sldId="265"/>
+            <ac:spMk id="21" creationId="{8AD54DB8-C150-4290-85D6-F5B0262BFEEF}"/>
+          </ac:spMkLst>
+        </pc:spChg>
+        <pc:spChg chg="del">
+          <ac:chgData name="David Ottino" userId="2e8b103f4c6c57f6" providerId="LiveId" clId="{4FBA45C3-B1BF-42F3-969B-7363B7F5A2BB}" dt="2026-04-27T12:07:20.290" v="624"/>
+          <ac:spMkLst>
+            <pc:docMk/>
+            <pc:sldMk cId="931135336" sldId="265"/>
+            <ac:spMk id="23" creationId="{379F11E2-8BA5-4C5C-AE7C-361E5EA011FF}"/>
+          </ac:spMkLst>
+        </pc:spChg>
+        <pc:spChg chg="del">
+          <ac:chgData name="David Ottino" userId="2e8b103f4c6c57f6" providerId="LiveId" clId="{4FBA45C3-B1BF-42F3-969B-7363B7F5A2BB}" dt="2026-04-27T12:07:20.290" v="624"/>
+          <ac:spMkLst>
+            <pc:docMk/>
+            <pc:sldMk cId="931135336" sldId="265"/>
+            <ac:spMk id="25" creationId="{7C00E1DA-EC7C-40FC-95E3-11FDCD2E4291}"/>
+          </ac:spMkLst>
+        </pc:spChg>
+        <pc:grpChg chg="del">
+          <ac:chgData name="David Ottino" userId="2e8b103f4c6c57f6" providerId="LiveId" clId="{4FBA45C3-B1BF-42F3-969B-7363B7F5A2BB}" dt="2026-04-27T12:07:20.290" v="624"/>
+          <ac:grpSpMkLst>
+            <pc:docMk/>
+            <pc:sldMk cId="931135336" sldId="265"/>
+            <ac:grpSpMk id="27" creationId="{9A421166-2996-41A7-B094-AE5316F347DD}"/>
+          </ac:grpSpMkLst>
+        </pc:grpChg>
+      </pc:sldChg>
+      <pc:sldChg chg="delSp add setBg delDesignElem">
+        <pc:chgData name="David Ottino" userId="2e8b103f4c6c57f6" providerId="LiveId" clId="{4FBA45C3-B1BF-42F3-969B-7363B7F5A2BB}" dt="2026-04-27T12:07:25.110" v="626"/>
+        <pc:sldMkLst>
+          <pc:docMk/>
+          <pc:sldMk cId="681392355" sldId="266"/>
+        </pc:sldMkLst>
+        <pc:spChg chg="del">
+          <ac:chgData name="David Ottino" userId="2e8b103f4c6c57f6" providerId="LiveId" clId="{4FBA45C3-B1BF-42F3-969B-7363B7F5A2BB}" dt="2026-04-27T12:07:25.110" v="626"/>
+          <ac:spMkLst>
+            <pc:docMk/>
+            <pc:sldMk cId="681392355" sldId="266"/>
+            <ac:spMk id="35" creationId="{A078A52F-85EA-4C0B-962B-D9D9DD4DD78C}"/>
+          </ac:spMkLst>
+        </pc:spChg>
+        <pc:spChg chg="del">
+          <ac:chgData name="David Ottino" userId="2e8b103f4c6c57f6" providerId="LiveId" clId="{4FBA45C3-B1BF-42F3-969B-7363B7F5A2BB}" dt="2026-04-27T12:07:25.110" v="626"/>
+          <ac:spMkLst>
+            <pc:docMk/>
+            <pc:sldMk cId="681392355" sldId="266"/>
+            <ac:spMk id="37" creationId="{919797D5-5700-4683-B30A-5B4D56CB8270}"/>
+          </ac:spMkLst>
+        </pc:spChg>
+        <pc:spChg chg="del">
+          <ac:chgData name="David Ottino" userId="2e8b103f4c6c57f6" providerId="LiveId" clId="{4FBA45C3-B1BF-42F3-969B-7363B7F5A2BB}" dt="2026-04-27T12:07:25.110" v="626"/>
+          <ac:spMkLst>
+            <pc:docMk/>
+            <pc:sldMk cId="681392355" sldId="266"/>
+            <ac:spMk id="39" creationId="{4856A7B9-9801-42EC-A4C9-7E22A56EF53D}"/>
+          </ac:spMkLst>
+        </pc:spChg>
+        <pc:spChg chg="del">
+          <ac:chgData name="David Ottino" userId="2e8b103f4c6c57f6" providerId="LiveId" clId="{4FBA45C3-B1BF-42F3-969B-7363B7F5A2BB}" dt="2026-04-27T12:07:25.110" v="626"/>
+          <ac:spMkLst>
+            <pc:docMk/>
+            <pc:sldMk cId="681392355" sldId="266"/>
+            <ac:spMk id="41" creationId="{8AD54DB8-C150-4290-85D6-F5B0262BFEEF}"/>
+          </ac:spMkLst>
+        </pc:spChg>
+        <pc:spChg chg="del">
+          <ac:chgData name="David Ottino" userId="2e8b103f4c6c57f6" providerId="LiveId" clId="{4FBA45C3-B1BF-42F3-969B-7363B7F5A2BB}" dt="2026-04-27T12:07:25.110" v="626"/>
+          <ac:spMkLst>
+            <pc:docMk/>
+            <pc:sldMk cId="681392355" sldId="266"/>
+            <ac:spMk id="43" creationId="{379F11E2-8BA5-4C5C-AE7C-361E5EA011FF}"/>
+          </ac:spMkLst>
+        </pc:spChg>
+        <pc:spChg chg="del">
+          <ac:chgData name="David Ottino" userId="2e8b103f4c6c57f6" providerId="LiveId" clId="{4FBA45C3-B1BF-42F3-969B-7363B7F5A2BB}" dt="2026-04-27T12:07:25.110" v="626"/>
+          <ac:spMkLst>
+            <pc:docMk/>
+            <pc:sldMk cId="681392355" sldId="266"/>
+            <ac:spMk id="45" creationId="{7C00E1DA-EC7C-40FC-95E3-11FDCD2E4291}"/>
+          </ac:spMkLst>
+        </pc:spChg>
+        <pc:grpChg chg="del">
+          <ac:chgData name="David Ottino" userId="2e8b103f4c6c57f6" providerId="LiveId" clId="{4FBA45C3-B1BF-42F3-969B-7363B7F5A2BB}" dt="2026-04-27T12:07:25.110" v="626"/>
+          <ac:grpSpMkLst>
+            <pc:docMk/>
+            <pc:sldMk cId="681392355" sldId="266"/>
+            <ac:grpSpMk id="47" creationId="{9A421166-2996-41A7-B094-AE5316F347DD}"/>
+          </ac:grpSpMkLst>
+        </pc:grpChg>
       </pc:sldChg>
     </pc:docChg>
   </pc:docChgLst>
@@ -4679,6 +4822,114 @@
   <p:cSld>
     <p:spTree>
       <p:nvGrpSpPr>
+        <p:cNvPr id="1" name="">
+          <a:extLst>
+            <a:ext uri="{FF2B5EF4-FFF2-40B4-BE49-F238E27FC236}">
+              <a16:creationId xmlns:a16="http://schemas.microsoft.com/office/drawing/2014/main" id="{BC3A5E47-9F8C-73C9-9B12-E450E559BC87}"/>
+            </a:ext>
+          </a:extLst>
+        </p:cNvPr>
+        <p:cNvGrpSpPr/>
+        <p:nvPr/>
+      </p:nvGrpSpPr>
+      <p:grpSpPr>
+        <a:xfrm>
+          <a:off x="0" y="0"/>
+          <a:ext cx="0" cy="0"/>
+          <a:chOff x="0" y="0"/>
+          <a:chExt cx="0" cy="0"/>
+        </a:xfrm>
+      </p:grpSpPr>
+      <p:sp>
+        <p:nvSpPr>
+          <p:cNvPr id="2" name="Folienbildplatzhalter 1">
+            <a:extLst>
+              <a:ext uri="{FF2B5EF4-FFF2-40B4-BE49-F238E27FC236}">
+                <a16:creationId xmlns:a16="http://schemas.microsoft.com/office/drawing/2014/main" id="{D2E1E52C-9CB1-DA3C-B54C-AC47D292913D}"/>
+              </a:ext>
+            </a:extLst>
+          </p:cNvPr>
+          <p:cNvSpPr>
+            <a:spLocks noGrp="1" noRot="1" noChangeAspect="1"/>
+          </p:cNvSpPr>
+          <p:nvPr>
+            <p:ph type="sldImg"/>
+          </p:nvPr>
+        </p:nvSpPr>
+        <p:spPr/>
+      </p:sp>
+      <p:sp>
+        <p:nvSpPr>
+          <p:cNvPr id="3" name="Notizenplatzhalter 2">
+            <a:extLst>
+              <a:ext uri="{FF2B5EF4-FFF2-40B4-BE49-F238E27FC236}">
+                <a16:creationId xmlns:a16="http://schemas.microsoft.com/office/drawing/2014/main" id="{7EAF1470-E374-142B-AD81-C4298B8CA117}"/>
+              </a:ext>
+            </a:extLst>
+          </p:cNvPr>
+          <p:cNvSpPr>
+            <a:spLocks noGrp="1"/>
+          </p:cNvSpPr>
+          <p:nvPr>
+            <p:ph type="body" idx="1"/>
+          </p:nvPr>
+        </p:nvSpPr>
+        <p:spPr/>
+        <p:txBody>
+          <a:bodyPr/>
+          <a:lstStyle/>
+          <a:p>
+            <a:endParaRPr lang="de-DE"/>
+          </a:p>
+        </p:txBody>
+      </p:sp>
+      <p:sp>
+        <p:nvSpPr>
+          <p:cNvPr id="4" name="Foliennummernplatzhalter 3">
+            <a:extLst>
+              <a:ext uri="{FF2B5EF4-FFF2-40B4-BE49-F238E27FC236}">
+                <a16:creationId xmlns:a16="http://schemas.microsoft.com/office/drawing/2014/main" id="{DEBBD2CB-5A2F-F877-E07A-80033210918A}"/>
+              </a:ext>
+            </a:extLst>
+          </p:cNvPr>
+          <p:cNvSpPr>
+            <a:spLocks noGrp="1"/>
+          </p:cNvSpPr>
+          <p:nvPr>
+            <p:ph type="sldNum" sz="quarter" idx="5"/>
+          </p:nvPr>
+        </p:nvSpPr>
+        <p:spPr/>
+        <p:txBody>
+          <a:bodyPr/>
+          <a:lstStyle/>
+          <a:p>
+            <a:fld id="{DEF059D1-1E64-4095-816B-E25F58AA521B}" type="slidenum">
+              <a:rPr lang="de-DE" smtClean="0"/>
+              <a:t>3</a:t>
+            </a:fld>
+            <a:endParaRPr lang="de-DE"/>
+          </a:p>
+        </p:txBody>
+      </p:sp>
+    </p:spTree>
+    <p:extLst>
+      <p:ext uri="{BB962C8B-B14F-4D97-AF65-F5344CB8AC3E}">
+        <p14:creationId xmlns:p14="http://schemas.microsoft.com/office/powerpoint/2010/main" val="1519205283"/>
+      </p:ext>
+    </p:extLst>
+  </p:cSld>
+  <p:clrMapOvr>
+    <a:masterClrMapping/>
+  </p:clrMapOvr>
+</p:notes>
+</file>
+
+<file path=ppt/notesSlides/notesSlide4.xml><?xml version="1.0" encoding="utf-8"?>
+<p:notes xmlns:a="http://schemas.openxmlformats.org/drawingml/2006/main" xmlns:r="http://schemas.openxmlformats.org/officeDocument/2006/relationships" xmlns:p="http://schemas.openxmlformats.org/presentationml/2006/main">
+  <p:cSld>
+    <p:spTree>
+      <p:nvGrpSpPr>
         <p:cNvPr id="1" name=""/>
         <p:cNvGrpSpPr/>
         <p:nvPr/>
@@ -4739,7 +4990,7 @@
           <a:p>
             <a:fld id="{DEF059D1-1E64-4095-816B-E25F58AA521B}" type="slidenum">
               <a:rPr lang="de-DE" smtClean="0"/>
-              <a:t>3</a:t>
+              <a:t>4</a:t>
             </a:fld>
             <a:endParaRPr lang="de-DE"/>
           </a:p>
@@ -4758,7 +5009,223 @@
 </p:notes>
 </file>
 
-<file path=ppt/notesSlides/notesSlide4.xml><?xml version="1.0" encoding="utf-8"?>
+<file path=ppt/notesSlides/notesSlide5.xml><?xml version="1.0" encoding="utf-8"?>
+<p:notes xmlns:a="http://schemas.openxmlformats.org/drawingml/2006/main" xmlns:r="http://schemas.openxmlformats.org/officeDocument/2006/relationships" xmlns:p="http://schemas.openxmlformats.org/presentationml/2006/main">
+  <p:cSld>
+    <p:spTree>
+      <p:nvGrpSpPr>
+        <p:cNvPr id="1" name="">
+          <a:extLst>
+            <a:ext uri="{FF2B5EF4-FFF2-40B4-BE49-F238E27FC236}">
+              <a16:creationId xmlns:a16="http://schemas.microsoft.com/office/drawing/2014/main" id="{C3D8D370-7FED-CDDB-D915-010548C52B1D}"/>
+            </a:ext>
+          </a:extLst>
+        </p:cNvPr>
+        <p:cNvGrpSpPr/>
+        <p:nvPr/>
+      </p:nvGrpSpPr>
+      <p:grpSpPr>
+        <a:xfrm>
+          <a:off x="0" y="0"/>
+          <a:ext cx="0" cy="0"/>
+          <a:chOff x="0" y="0"/>
+          <a:chExt cx="0" cy="0"/>
+        </a:xfrm>
+      </p:grpSpPr>
+      <p:sp>
+        <p:nvSpPr>
+          <p:cNvPr id="2" name="Folienbildplatzhalter 1">
+            <a:extLst>
+              <a:ext uri="{FF2B5EF4-FFF2-40B4-BE49-F238E27FC236}">
+                <a16:creationId xmlns:a16="http://schemas.microsoft.com/office/drawing/2014/main" id="{89572507-0EC3-E37F-76BC-45D4B2559A9A}"/>
+              </a:ext>
+            </a:extLst>
+          </p:cNvPr>
+          <p:cNvSpPr>
+            <a:spLocks noGrp="1" noRot="1" noChangeAspect="1"/>
+          </p:cNvSpPr>
+          <p:nvPr>
+            <p:ph type="sldImg"/>
+          </p:nvPr>
+        </p:nvSpPr>
+        <p:spPr/>
+      </p:sp>
+      <p:sp>
+        <p:nvSpPr>
+          <p:cNvPr id="3" name="Notizenplatzhalter 2">
+            <a:extLst>
+              <a:ext uri="{FF2B5EF4-FFF2-40B4-BE49-F238E27FC236}">
+                <a16:creationId xmlns:a16="http://schemas.microsoft.com/office/drawing/2014/main" id="{9031693E-5CDD-B7E0-CF8A-EDB017E1A7F8}"/>
+              </a:ext>
+            </a:extLst>
+          </p:cNvPr>
+          <p:cNvSpPr>
+            <a:spLocks noGrp="1"/>
+          </p:cNvSpPr>
+          <p:nvPr>
+            <p:ph type="body" idx="1"/>
+          </p:nvPr>
+        </p:nvSpPr>
+        <p:spPr/>
+        <p:txBody>
+          <a:bodyPr/>
+          <a:lstStyle/>
+          <a:p>
+            <a:endParaRPr lang="de-DE"/>
+          </a:p>
+        </p:txBody>
+      </p:sp>
+      <p:sp>
+        <p:nvSpPr>
+          <p:cNvPr id="4" name="Foliennummernplatzhalter 3">
+            <a:extLst>
+              <a:ext uri="{FF2B5EF4-FFF2-40B4-BE49-F238E27FC236}">
+                <a16:creationId xmlns:a16="http://schemas.microsoft.com/office/drawing/2014/main" id="{B715219C-0EB4-E9B4-95B1-7BED20D6764B}"/>
+              </a:ext>
+            </a:extLst>
+          </p:cNvPr>
+          <p:cNvSpPr>
+            <a:spLocks noGrp="1"/>
+          </p:cNvSpPr>
+          <p:nvPr>
+            <p:ph type="sldNum" sz="quarter" idx="5"/>
+          </p:nvPr>
+        </p:nvSpPr>
+        <p:spPr/>
+        <p:txBody>
+          <a:bodyPr/>
+          <a:lstStyle/>
+          <a:p>
+            <a:fld id="{DEF059D1-1E64-4095-816B-E25F58AA521B}" type="slidenum">
+              <a:rPr lang="de-DE" smtClean="0"/>
+              <a:t>5</a:t>
+            </a:fld>
+            <a:endParaRPr lang="de-DE"/>
+          </a:p>
+        </p:txBody>
+      </p:sp>
+    </p:spTree>
+    <p:extLst>
+      <p:ext uri="{BB962C8B-B14F-4D97-AF65-F5344CB8AC3E}">
+        <p14:creationId xmlns:p14="http://schemas.microsoft.com/office/powerpoint/2010/main" val="3414223961"/>
+      </p:ext>
+    </p:extLst>
+  </p:cSld>
+  <p:clrMapOvr>
+    <a:masterClrMapping/>
+  </p:clrMapOvr>
+</p:notes>
+</file>
+
+<file path=ppt/notesSlides/notesSlide6.xml><?xml version="1.0" encoding="utf-8"?>
+<p:notes xmlns:a="http://schemas.openxmlformats.org/drawingml/2006/main" xmlns:r="http://schemas.openxmlformats.org/officeDocument/2006/relationships" xmlns:p="http://schemas.openxmlformats.org/presentationml/2006/main">
+  <p:cSld>
+    <p:spTree>
+      <p:nvGrpSpPr>
+        <p:cNvPr id="1" name="">
+          <a:extLst>
+            <a:ext uri="{FF2B5EF4-FFF2-40B4-BE49-F238E27FC236}">
+              <a16:creationId xmlns:a16="http://schemas.microsoft.com/office/drawing/2014/main" id="{F6C2CAD6-07AE-B317-5645-72441950CC17}"/>
+            </a:ext>
+          </a:extLst>
+        </p:cNvPr>
+        <p:cNvGrpSpPr/>
+        <p:nvPr/>
+      </p:nvGrpSpPr>
+      <p:grpSpPr>
+        <a:xfrm>
+          <a:off x="0" y="0"/>
+          <a:ext cx="0" cy="0"/>
+          <a:chOff x="0" y="0"/>
+          <a:chExt cx="0" cy="0"/>
+        </a:xfrm>
+      </p:grpSpPr>
+      <p:sp>
+        <p:nvSpPr>
+          <p:cNvPr id="2" name="Folienbildplatzhalter 1">
+            <a:extLst>
+              <a:ext uri="{FF2B5EF4-FFF2-40B4-BE49-F238E27FC236}">
+                <a16:creationId xmlns:a16="http://schemas.microsoft.com/office/drawing/2014/main" id="{4C4D91C3-8D2B-905C-E62B-334607BBDCA9}"/>
+              </a:ext>
+            </a:extLst>
+          </p:cNvPr>
+          <p:cNvSpPr>
+            <a:spLocks noGrp="1" noRot="1" noChangeAspect="1"/>
+          </p:cNvSpPr>
+          <p:nvPr>
+            <p:ph type="sldImg"/>
+          </p:nvPr>
+        </p:nvSpPr>
+        <p:spPr/>
+      </p:sp>
+      <p:sp>
+        <p:nvSpPr>
+          <p:cNvPr id="3" name="Notizenplatzhalter 2">
+            <a:extLst>
+              <a:ext uri="{FF2B5EF4-FFF2-40B4-BE49-F238E27FC236}">
+                <a16:creationId xmlns:a16="http://schemas.microsoft.com/office/drawing/2014/main" id="{B8AF6DE4-0B44-E9D4-2D04-D2208AB067AA}"/>
+              </a:ext>
+            </a:extLst>
+          </p:cNvPr>
+          <p:cNvSpPr>
+            <a:spLocks noGrp="1"/>
+          </p:cNvSpPr>
+          <p:nvPr>
+            <p:ph type="body" idx="1"/>
+          </p:nvPr>
+        </p:nvSpPr>
+        <p:spPr/>
+        <p:txBody>
+          <a:bodyPr/>
+          <a:lstStyle/>
+          <a:p>
+            <a:endParaRPr lang="de-DE"/>
+          </a:p>
+        </p:txBody>
+      </p:sp>
+      <p:sp>
+        <p:nvSpPr>
+          <p:cNvPr id="4" name="Foliennummernplatzhalter 3">
+            <a:extLst>
+              <a:ext uri="{FF2B5EF4-FFF2-40B4-BE49-F238E27FC236}">
+                <a16:creationId xmlns:a16="http://schemas.microsoft.com/office/drawing/2014/main" id="{F4A4161E-3FA2-505E-A97D-2BD061BDF642}"/>
+              </a:ext>
+            </a:extLst>
+          </p:cNvPr>
+          <p:cNvSpPr>
+            <a:spLocks noGrp="1"/>
+          </p:cNvSpPr>
+          <p:nvPr>
+            <p:ph type="sldNum" sz="quarter" idx="5"/>
+          </p:nvPr>
+        </p:nvSpPr>
+        <p:spPr/>
+        <p:txBody>
+          <a:bodyPr/>
+          <a:lstStyle/>
+          <a:p>
+            <a:fld id="{DEF059D1-1E64-4095-816B-E25F58AA521B}" type="slidenum">
+              <a:rPr lang="de-DE" smtClean="0"/>
+              <a:t>6</a:t>
+            </a:fld>
+            <a:endParaRPr lang="de-DE"/>
+          </a:p>
+        </p:txBody>
+      </p:sp>
+    </p:spTree>
+    <p:extLst>
+      <p:ext uri="{BB962C8B-B14F-4D97-AF65-F5344CB8AC3E}">
+        <p14:creationId xmlns:p14="http://schemas.microsoft.com/office/powerpoint/2010/main" val="329167103"/>
+      </p:ext>
+    </p:extLst>
+  </p:cSld>
+  <p:clrMapOvr>
+    <a:masterClrMapping/>
+  </p:clrMapOvr>
+</p:notes>
+</file>
+
+<file path=ppt/notesSlides/notesSlide7.xml><?xml version="1.0" encoding="utf-8"?>
 <p:notes xmlns:a="http://schemas.openxmlformats.org/drawingml/2006/main" xmlns:r="http://schemas.openxmlformats.org/officeDocument/2006/relationships" xmlns:p="http://schemas.openxmlformats.org/presentationml/2006/main">
   <p:cSld>
     <p:spTree>
@@ -4847,7 +5314,7 @@
           <a:p>
             <a:fld id="{DEF059D1-1E64-4095-816B-E25F58AA521B}" type="slidenum">
               <a:rPr lang="de-DE" smtClean="0"/>
-              <a:t>4</a:t>
+              <a:t>7</a:t>
             </a:fld>
             <a:endParaRPr lang="de-DE"/>
           </a:p>
@@ -4866,7 +5333,7 @@
 </p:notes>
 </file>
 
-<file path=ppt/notesSlides/notesSlide5.xml><?xml version="1.0" encoding="utf-8"?>
+<file path=ppt/notesSlides/notesSlide8.xml><?xml version="1.0" encoding="utf-8"?>
 <p:notes xmlns:a="http://schemas.openxmlformats.org/drawingml/2006/main" xmlns:r="http://schemas.openxmlformats.org/officeDocument/2006/relationships" xmlns:p="http://schemas.openxmlformats.org/presentationml/2006/main">
   <p:cSld>
     <p:spTree>
@@ -4931,7 +5398,7 @@
           <a:p>
             <a:fld id="{DEF059D1-1E64-4095-816B-E25F58AA521B}" type="slidenum">
               <a:rPr lang="de-DE" smtClean="0"/>
-              <a:t>5</a:t>
+              <a:t>8</a:t>
             </a:fld>
             <a:endParaRPr lang="de-DE"/>
           </a:p>
@@ -4950,7 +5417,7 @@
 </p:notes>
 </file>
 
-<file path=ppt/notesSlides/notesSlide6.xml><?xml version="1.0" encoding="utf-8"?>
+<file path=ppt/notesSlides/notesSlide9.xml><?xml version="1.0" encoding="utf-8"?>
 <p:notes xmlns:a="http://schemas.openxmlformats.org/drawingml/2006/main" xmlns:r="http://schemas.openxmlformats.org/officeDocument/2006/relationships" xmlns:p="http://schemas.openxmlformats.org/presentationml/2006/main">
   <p:cSld>
     <p:spTree>
@@ -5039,7 +5506,7 @@
           <a:p>
             <a:fld id="{DEF059D1-1E64-4095-816B-E25F58AA521B}" type="slidenum">
               <a:rPr lang="de-DE" smtClean="0"/>
-              <a:t>6</a:t>
+              <a:t>9</a:t>
             </a:fld>
             <a:endParaRPr lang="de-DE"/>
           </a:p>
@@ -9384,14 +9851,6 @@
 <file path=ppt/slides/slide2.xml><?xml version="1.0" encoding="utf-8"?>
 <p:sld xmlns:a="http://schemas.openxmlformats.org/drawingml/2006/main" xmlns:r="http://schemas.openxmlformats.org/officeDocument/2006/relationships" xmlns:p="http://schemas.openxmlformats.org/presentationml/2006/main">
   <p:cSld>
-    <p:bg>
-      <p:bgPr>
-        <a:solidFill>
-          <a:schemeClr val="bg1"/>
-        </a:solidFill>
-        <a:effectLst/>
-      </p:bgPr>
-    </p:bg>
     <p:spTree>
       <p:nvGrpSpPr>
         <p:cNvPr id="1" name=""/>
@@ -9427,11 +9886,11 @@
           <a:bodyPr rtlCol="0"/>
           <a:lstStyle/>
           <a:p>
-            <a:pPr rtl="0"/>
             <a:r>
-              <a:rPr lang="de-DE" dirty="0"/>
-              <a:t>Generelles Vorgehen</a:t>
+              <a:rPr lang="de-DE"/>
+              <a:t>Verwendete Technologien</a:t>
             </a:r>
+            <a:endParaRPr lang="en-US"/>
           </a:p>
         </p:txBody>
       </p:sp>
@@ -9461,11 +9920,52 @@
           <a:bodyPr/>
           <a:lstStyle/>
           <a:p>
+            <a:pPr marL="305435" indent="-305435"/>
             <a:r>
-              <a:rPr lang="de-AT" dirty="0" err="1"/>
-              <a:t>test</a:t>
+              <a:rPr lang="de-AT" sz="2400"/>
+              <a:t>Auswahl von </a:t>
             </a:r>
-            <a:endParaRPr lang="de-AT" dirty="0"/>
+            <a:r>
+              <a:rPr lang="de-AT" sz="2400" b="1"/>
+              <a:t>PostgreSQL</a:t>
+            </a:r>
+            <a:r>
+              <a:rPr lang="de-AT" sz="2400"/>
+              <a:t> (mit DBeaver) als DBMS.</a:t>
+            </a:r>
+            <a:endParaRPr lang="en-US" sz="2400"/>
+          </a:p>
+          <a:p>
+            <a:pPr marL="305435" indent="-305435"/>
+            <a:r>
+              <a:rPr lang="de-AT" sz="2400"/>
+              <a:t>Auswahl von </a:t>
+            </a:r>
+            <a:r>
+              <a:rPr lang="de-AT" sz="2400" b="1"/>
+              <a:t>Python</a:t>
+            </a:r>
+            <a:r>
+              <a:rPr lang="de-AT" sz="2400"/>
+              <a:t> als backend Anfragesprache.</a:t>
+            </a:r>
+            <a:endParaRPr lang="en-US" sz="2400"/>
+          </a:p>
+          <a:p>
+            <a:pPr marL="305435" indent="-305435"/>
+            <a:r>
+              <a:rPr lang="de-AT" sz="2400"/>
+              <a:t>Public </a:t>
+            </a:r>
+            <a:r>
+              <a:rPr lang="de-AT" sz="2400" b="1"/>
+              <a:t>GitHub Repo</a:t>
+            </a:r>
+            <a:r>
+              <a:rPr lang="de-AT" sz="2400"/>
+              <a:t> zur bearbeitung und abgabe de Projekts.</a:t>
+            </a:r>
+            <a:endParaRPr lang="de-AT"/>
           </a:p>
         </p:txBody>
       </p:sp>
@@ -9483,6 +9983,172 @@
 </file>
 
 <file path=ppt/slides/slide3.xml><?xml version="1.0" encoding="utf-8"?>
+<p:sld xmlns:a="http://schemas.openxmlformats.org/drawingml/2006/main" xmlns:r="http://schemas.openxmlformats.org/officeDocument/2006/relationships" xmlns:p="http://schemas.openxmlformats.org/presentationml/2006/main">
+  <p:cSld>
+    <p:spTree>
+      <p:nvGrpSpPr>
+        <p:cNvPr id="1" name="">
+          <a:extLst>
+            <a:ext uri="{FF2B5EF4-FFF2-40B4-BE49-F238E27FC236}">
+              <a16:creationId xmlns:a16="http://schemas.microsoft.com/office/drawing/2014/main" id="{64D4A36A-FD03-89FD-B23D-0466F1B1E075}"/>
+            </a:ext>
+          </a:extLst>
+        </p:cNvPr>
+        <p:cNvGrpSpPr/>
+        <p:nvPr/>
+      </p:nvGrpSpPr>
+      <p:grpSpPr>
+        <a:xfrm>
+          <a:off x="0" y="0"/>
+          <a:ext cx="0" cy="0"/>
+          <a:chOff x="0" y="0"/>
+          <a:chExt cx="0" cy="0"/>
+        </a:xfrm>
+      </p:grpSpPr>
+      <p:sp>
+        <p:nvSpPr>
+          <p:cNvPr id="2" name="Titel 1">
+            <a:extLst>
+              <a:ext uri="{FF2B5EF4-FFF2-40B4-BE49-F238E27FC236}">
+                <a16:creationId xmlns:a16="http://schemas.microsoft.com/office/drawing/2014/main" id="{D9C8D5BE-DD76-586F-7D09-101E03FE1E3B}"/>
+              </a:ext>
+            </a:extLst>
+          </p:cNvPr>
+          <p:cNvSpPr>
+            <a:spLocks noGrp="1"/>
+          </p:cNvSpPr>
+          <p:nvPr>
+            <p:ph type="title"/>
+          </p:nvPr>
+        </p:nvSpPr>
+        <p:spPr/>
+        <p:txBody>
+          <a:bodyPr rtlCol="0"/>
+          <a:lstStyle/>
+          <a:p>
+            <a:r>
+              <a:rPr lang="de-DE"/>
+              <a:t>Legen der Basis</a:t>
+            </a:r>
+            <a:endParaRPr lang="de-DE" dirty="0"/>
+          </a:p>
+        </p:txBody>
+      </p:sp>
+      <p:sp>
+        <p:nvSpPr>
+          <p:cNvPr id="6" name="Inhaltsplatzhalter 5">
+            <a:extLst>
+              <a:ext uri="{FF2B5EF4-FFF2-40B4-BE49-F238E27FC236}">
+                <a16:creationId xmlns:a16="http://schemas.microsoft.com/office/drawing/2014/main" id="{5826B2E9-2296-E89D-AC0C-32DE496D5592}"/>
+              </a:ext>
+            </a:extLst>
+          </p:cNvPr>
+          <p:cNvSpPr>
+            <a:spLocks noGrp="1"/>
+          </p:cNvSpPr>
+          <p:nvPr>
+            <p:ph sz="half" idx="2"/>
+          </p:nvPr>
+        </p:nvSpPr>
+        <p:spPr>
+          <a:xfrm>
+            <a:off x="581193" y="2228003"/>
+            <a:ext cx="8802992" cy="3633047"/>
+          </a:xfrm>
+        </p:spPr>
+        <p:txBody>
+          <a:bodyPr/>
+          <a:lstStyle/>
+          <a:p>
+            <a:pPr marL="305435" indent="-305435"/>
+            <a:r>
+              <a:rPr lang="de-AT" sz="2400"/>
+              <a:t>Verwendung von lib. </a:t>
+            </a:r>
+            <a:r>
+              <a:rPr lang="de-AT" sz="2400" b="1"/>
+              <a:t>psycopg </a:t>
+            </a:r>
+            <a:r>
+              <a:rPr lang="de-AT" sz="2400"/>
+              <a:t>und </a:t>
+            </a:r>
+            <a:r>
+              <a:rPr lang="de-AT" sz="2400" b="1"/>
+              <a:t>dotenv </a:t>
+            </a:r>
+            <a:r>
+              <a:rPr lang="en-US" sz="2400"/>
+              <a:t>zum Verbindungsaufbau.</a:t>
+            </a:r>
+          </a:p>
+          <a:p>
+            <a:pPr marL="305435" indent="-305435"/>
+            <a:r>
+              <a:rPr lang="en-US" sz="2400"/>
+              <a:t>Erstellung von unabhängigen, test-daten-scripts wie </a:t>
+            </a:r>
+            <a:r>
+              <a:rPr lang="en-US" sz="2400" b="1"/>
+              <a:t>toy_setup </a:t>
+            </a:r>
+            <a:r>
+              <a:rPr lang="en-US" sz="2400"/>
+              <a:t>und </a:t>
+            </a:r>
+            <a:r>
+              <a:rPr lang="en-US" sz="2400" b="1"/>
+              <a:t>generate</a:t>
+            </a:r>
+            <a:r>
+              <a:rPr lang="en-US" sz="2400"/>
+              <a:t>.</a:t>
+            </a:r>
+          </a:p>
+          <a:p>
+            <a:pPr marL="305435" indent="-305435"/>
+            <a:r>
+              <a:rPr lang="en-US" sz="2400"/>
+              <a:t>Erstellen von </a:t>
+            </a:r>
+            <a:r>
+              <a:rPr lang="en-US" sz="2400" b="1"/>
+              <a:t>H2V </a:t>
+            </a:r>
+            <a:r>
+              <a:rPr lang="en-US" sz="2400"/>
+              <a:t>und </a:t>
+            </a:r>
+            <a:r>
+              <a:rPr lang="en-US" sz="2400" b="1"/>
+              <a:t>V2H</a:t>
+            </a:r>
+            <a:r>
+              <a:rPr lang="en-US" sz="2400"/>
+              <a:t>, sowie eines </a:t>
+            </a:r>
+            <a:r>
+              <a:rPr lang="en-US" sz="2400" b="1"/>
+              <a:t>client-side proxy.</a:t>
+            </a:r>
+            <a:endParaRPr lang="en-US" sz="2400" dirty="0"/>
+          </a:p>
+        </p:txBody>
+      </p:sp>
+    </p:spTree>
+    <p:extLst>
+      <p:ext uri="{BB962C8B-B14F-4D97-AF65-F5344CB8AC3E}">
+        <p14:creationId xmlns:p14="http://schemas.microsoft.com/office/powerpoint/2010/main" val="2820873714"/>
+      </p:ext>
+    </p:extLst>
+  </p:cSld>
+  <p:clrMapOvr>
+    <a:masterClrMapping/>
+  </p:clrMapOvr>
+</p:sld>
+</file>
+
+<file path=ppt/slides/slide4.xml><?xml version="1.0" encoding="utf-8"?>
 <p:sld xmlns:a="http://schemas.openxmlformats.org/drawingml/2006/main" xmlns:r="http://schemas.openxmlformats.org/officeDocument/2006/relationships" xmlns:p="http://schemas.openxmlformats.org/presentationml/2006/main">
   <p:cSld>
     <p:bg>
@@ -9893,7 +10559,233 @@
 </p:sld>
 </file>
 
-<file path=ppt/slides/slide4.xml><?xml version="1.0" encoding="utf-8"?>
+<file path=ppt/slides/slide5.xml><?xml version="1.0" encoding="utf-8"?>
+<p:sld xmlns:a="http://schemas.openxmlformats.org/drawingml/2006/main" xmlns:r="http://schemas.openxmlformats.org/officeDocument/2006/relationships" xmlns:p="http://schemas.openxmlformats.org/presentationml/2006/main">
+  <p:cSld>
+    <p:spTree>
+      <p:nvGrpSpPr>
+        <p:cNvPr id="1" name="">
+          <a:extLst>
+            <a:ext uri="{FF2B5EF4-FFF2-40B4-BE49-F238E27FC236}">
+              <a16:creationId xmlns:a16="http://schemas.microsoft.com/office/drawing/2014/main" id="{77B3DAD2-4C88-8A46-CFC2-07C2246983B9}"/>
+            </a:ext>
+          </a:extLst>
+        </p:cNvPr>
+        <p:cNvGrpSpPr/>
+        <p:nvPr/>
+      </p:nvGrpSpPr>
+      <p:grpSpPr>
+        <a:xfrm>
+          <a:off x="0" y="0"/>
+          <a:ext cx="0" cy="0"/>
+          <a:chOff x="0" y="0"/>
+          <a:chExt cx="0" cy="0"/>
+        </a:xfrm>
+      </p:grpSpPr>
+      <p:pic>
+        <p:nvPicPr>
+          <p:cNvPr id="10" name="Content Placeholder 9" descr="A screen shot of a computer program&#10;&#10;AI-generated content may be incorrect.">
+            <a:extLst>
+              <a:ext uri="{FF2B5EF4-FFF2-40B4-BE49-F238E27FC236}">
+                <a16:creationId xmlns:a16="http://schemas.microsoft.com/office/drawing/2014/main" id="{4C84E358-A8E5-C7D0-D4C2-4CB9CD27C240}"/>
+              </a:ext>
+            </a:extLst>
+          </p:cNvPr>
+          <p:cNvPicPr>
+            <a:picLocks noGrp="1" noChangeAspect="1"/>
+          </p:cNvPicPr>
+          <p:nvPr>
+            <p:ph sz="half" idx="2"/>
+          </p:nvPr>
+        </p:nvPicPr>
+        <p:blipFill>
+          <a:blip r:embed="rId3"/>
+          <a:srcRect r="19425"/>
+          <a:stretch>
+            <a:fillRect/>
+          </a:stretch>
+        </p:blipFill>
+        <p:spPr>
+          <a:xfrm>
+            <a:off x="446534" y="723899"/>
+            <a:ext cx="7498616" cy="5676901"/>
+          </a:xfrm>
+          <a:prstGeom prst="rect">
+            <a:avLst/>
+          </a:prstGeom>
+        </p:spPr>
+      </p:pic>
+      <p:sp>
+        <p:nvSpPr>
+          <p:cNvPr id="2" name="Titel 1">
+            <a:extLst>
+              <a:ext uri="{FF2B5EF4-FFF2-40B4-BE49-F238E27FC236}">
+                <a16:creationId xmlns:a16="http://schemas.microsoft.com/office/drawing/2014/main" id="{DD720C44-0030-5C0D-7822-9E2B7B10FB06}"/>
+              </a:ext>
+            </a:extLst>
+          </p:cNvPr>
+          <p:cNvSpPr>
+            <a:spLocks noGrp="1"/>
+          </p:cNvSpPr>
+          <p:nvPr>
+            <p:ph type="title"/>
+          </p:nvPr>
+        </p:nvSpPr>
+        <p:spPr>
+          <a:xfrm>
+            <a:off x="8296275" y="1419225"/>
+            <a:ext cx="3081576" cy="2085869"/>
+          </a:xfrm>
+        </p:spPr>
+        <p:txBody>
+          <a:bodyPr vert="horz" lIns="91440" tIns="45720" rIns="91440" bIns="45720" rtlCol="0" anchor="b">
+            <a:normAutofit/>
+          </a:bodyPr>
+          <a:lstStyle/>
+          <a:p>
+            <a:pPr>
+              <a:lnSpc>
+                <a:spcPct val="90000"/>
+              </a:lnSpc>
+            </a:pPr>
+            <a:r>
+              <a:rPr lang="en-US" sz="2300">
+                <a:solidFill>
+                  <a:srgbClr val="FFFFFF"/>
+                </a:solidFill>
+              </a:rPr>
+              <a:t>Proxy - Gros der Implementiereung</a:t>
+            </a:r>
+          </a:p>
+        </p:txBody>
+      </p:sp>
+    </p:spTree>
+    <p:extLst>
+      <p:ext uri="{BB962C8B-B14F-4D97-AF65-F5344CB8AC3E}">
+        <p14:creationId xmlns:p14="http://schemas.microsoft.com/office/powerpoint/2010/main" val="931135336"/>
+      </p:ext>
+    </p:extLst>
+  </p:cSld>
+  <p:clrMapOvr>
+    <a:masterClrMapping/>
+  </p:clrMapOvr>
+</p:sld>
+</file>
+
+<file path=ppt/slides/slide6.xml><?xml version="1.0" encoding="utf-8"?>
+<p:sld xmlns:a="http://schemas.openxmlformats.org/drawingml/2006/main" xmlns:r="http://schemas.openxmlformats.org/officeDocument/2006/relationships" xmlns:p="http://schemas.openxmlformats.org/presentationml/2006/main">
+  <p:cSld>
+    <p:spTree>
+      <p:nvGrpSpPr>
+        <p:cNvPr id="1" name="">
+          <a:extLst>
+            <a:ext uri="{FF2B5EF4-FFF2-40B4-BE49-F238E27FC236}">
+              <a16:creationId xmlns:a16="http://schemas.microsoft.com/office/drawing/2014/main" id="{FE816E35-059E-2904-FDBA-9F15603CD448}"/>
+            </a:ext>
+          </a:extLst>
+        </p:cNvPr>
+        <p:cNvGrpSpPr/>
+        <p:nvPr/>
+      </p:nvGrpSpPr>
+      <p:grpSpPr>
+        <a:xfrm>
+          <a:off x="0" y="0"/>
+          <a:ext cx="0" cy="0"/>
+          <a:chOff x="0" y="0"/>
+          <a:chExt cx="0" cy="0"/>
+        </a:xfrm>
+      </p:grpSpPr>
+      <p:pic>
+        <p:nvPicPr>
+          <p:cNvPr id="5" name="Content Placeholder 4" descr="A computer screen shot of text&#10;&#10;AI-generated content may be incorrect.">
+            <a:extLst>
+              <a:ext uri="{FF2B5EF4-FFF2-40B4-BE49-F238E27FC236}">
+                <a16:creationId xmlns:a16="http://schemas.microsoft.com/office/drawing/2014/main" id="{FC28D6BA-63E4-BC89-14AD-4175565045C3}"/>
+              </a:ext>
+            </a:extLst>
+          </p:cNvPr>
+          <p:cNvPicPr>
+            <a:picLocks noGrp="1" noChangeAspect="1"/>
+          </p:cNvPicPr>
+          <p:nvPr>
+            <p:ph sz="half" idx="2"/>
+          </p:nvPr>
+        </p:nvPicPr>
+        <p:blipFill>
+          <a:blip r:embed="rId3"/>
+          <a:srcRect l="5068" t="-990" r="28321" b="959"/>
+          <a:stretch>
+            <a:fillRect/>
+          </a:stretch>
+        </p:blipFill>
+        <p:spPr>
+          <a:xfrm>
+            <a:off x="446534" y="723899"/>
+            <a:ext cx="7487848" cy="5678542"/>
+          </a:xfrm>
+          <a:prstGeom prst="rect">
+            <a:avLst/>
+          </a:prstGeom>
+        </p:spPr>
+      </p:pic>
+      <p:sp>
+        <p:nvSpPr>
+          <p:cNvPr id="2" name="Titel 1">
+            <a:extLst>
+              <a:ext uri="{FF2B5EF4-FFF2-40B4-BE49-F238E27FC236}">
+                <a16:creationId xmlns:a16="http://schemas.microsoft.com/office/drawing/2014/main" id="{B081486C-7C0F-8D42-BA8F-41210DAF3296}"/>
+              </a:ext>
+            </a:extLst>
+          </p:cNvPr>
+          <p:cNvSpPr>
+            <a:spLocks noGrp="1"/>
+          </p:cNvSpPr>
+          <p:nvPr>
+            <p:ph type="title"/>
+          </p:nvPr>
+        </p:nvSpPr>
+        <p:spPr>
+          <a:xfrm>
+            <a:off x="8296275" y="1419225"/>
+            <a:ext cx="3081576" cy="2085869"/>
+          </a:xfrm>
+        </p:spPr>
+        <p:txBody>
+          <a:bodyPr vert="horz" lIns="91440" tIns="45720" rIns="91440" bIns="45720" rtlCol="0" anchor="b">
+            <a:normAutofit/>
+          </a:bodyPr>
+          <a:lstStyle/>
+          <a:p>
+            <a:pPr>
+              <a:lnSpc>
+                <a:spcPct val="90000"/>
+              </a:lnSpc>
+            </a:pPr>
+            <a:r>
+              <a:rPr lang="en-US" sz="2300">
+                <a:solidFill>
+                  <a:srgbClr val="FFFFFF"/>
+                </a:solidFill>
+              </a:rPr>
+              <a:t>Proxy - CAVEAT</a:t>
+            </a:r>
+          </a:p>
+        </p:txBody>
+      </p:sp>
+    </p:spTree>
+    <p:extLst>
+      <p:ext uri="{BB962C8B-B14F-4D97-AF65-F5344CB8AC3E}">
+        <p14:creationId xmlns:p14="http://schemas.microsoft.com/office/powerpoint/2010/main" val="681392355"/>
+      </p:ext>
+    </p:extLst>
+  </p:cSld>
+  <p:clrMapOvr>
+    <a:masterClrMapping/>
+  </p:clrMapOvr>
+</p:sld>
+</file>
+
+<file path=ppt/slides/slide7.xml><?xml version="1.0" encoding="utf-8"?>
 <p:sld xmlns:a="http://schemas.openxmlformats.org/drawingml/2006/main" xmlns:r="http://schemas.openxmlformats.org/officeDocument/2006/relationships" xmlns:p="http://schemas.openxmlformats.org/presentationml/2006/main">
   <p:cSld>
     <p:bg>
@@ -10089,7 +10981,7 @@
 </p:sld>
 </file>
 
-<file path=ppt/slides/slide5.xml><?xml version="1.0" encoding="utf-8"?>
+<file path=ppt/slides/slide8.xml><?xml version="1.0" encoding="utf-8"?>
 <p:sld xmlns:a="http://schemas.openxmlformats.org/drawingml/2006/main" xmlns:r="http://schemas.openxmlformats.org/officeDocument/2006/relationships" xmlns:p="http://schemas.openxmlformats.org/presentationml/2006/main">
   <p:cSld>
     <p:bg>
@@ -10557,7 +11449,7 @@
 </p:sld>
 </file>
 
-<file path=ppt/slides/slide6.xml><?xml version="1.0" encoding="utf-8"?>
+<file path=ppt/slides/slide9.xml><?xml version="1.0" encoding="utf-8"?>
 <p:sld xmlns:a="http://schemas.openxmlformats.org/drawingml/2006/main" xmlns:r="http://schemas.openxmlformats.org/officeDocument/2006/relationships" xmlns:p="http://schemas.openxmlformats.org/presentationml/2006/main">
   <p:cSld>
     <p:bg>
@@ -11524,23 +12416,6 @@
 </file>
 
 <file path=customXml/item1.xml><?xml version="1.0" encoding="utf-8"?>
-<?mso-contentType ?>
-<FormTemplates xmlns="http://schemas.microsoft.com/sharepoint/v3/contenttype/forms">
-  <Display>DocumentLibraryForm</Display>
-  <Edit>DocumentLibraryForm</Edit>
-  <New>DocumentLibraryForm</New>
-</FormTemplates>
-</file>
-
-<file path=customXml/item2.xml><?xml version="1.0" encoding="utf-8"?>
-<p:properties xmlns:p="http://schemas.microsoft.com/office/2006/metadata/properties" xmlns:xsi="http://www.w3.org/2001/XMLSchema-instance" xmlns:pc="http://schemas.microsoft.com/office/infopath/2007/PartnerControls">
-  <documentManagement>
-    <MediaServiceKeyPoints xmlns="71af3243-3dd4-4a8d-8c0d-dd76da1f02a5" xsi:nil="true"/>
-  </documentManagement>
-</p:properties>
-</file>
-
-<file path=customXml/item3.xml><?xml version="1.0" encoding="utf-8"?>
 <ct:contentTypeSchema xmlns:ct="http://schemas.microsoft.com/office/2006/metadata/contentType" xmlns:ma="http://schemas.microsoft.com/office/2006/metadata/properties/metaAttributes" ct:_="" ma:_="" ma:contentTypeName="Document" ma:contentTypeID="0x01010079F111ED35F8CC479449609E8A0923A6" ma:contentTypeVersion="11" ma:contentTypeDescription="Create a new document." ma:contentTypeScope="" ma:versionID="1c2eb7a32e66fb6e4260f3771546a5e2">
   <xsd:schema xmlns:xsd="http://www.w3.org/2001/XMLSchema" xmlns:xs="http://www.w3.org/2001/XMLSchema" xmlns:p="http://schemas.microsoft.com/office/2006/metadata/properties" xmlns:ns2="71af3243-3dd4-4a8d-8c0d-dd76da1f02a5" xmlns:ns3="16c05727-aa75-4e4a-9b5f-8a80a1165891" targetNamespace="http://schemas.microsoft.com/office/2006/metadata/properties" ma:root="true" ma:fieldsID="04e1f6479c48b08974ba73b5ca973489" ns2:_="" ns3:_="">
     <xsd:import namespace="71af3243-3dd4-4a8d-8c0d-dd76da1f02a5"/>
@@ -11751,25 +12626,24 @@
 </ct:contentTypeSchema>
 </file>
 
-<file path=customXml/itemProps1.xml><?xml version="1.0" encoding="utf-8"?>
-<ds:datastoreItem xmlns:ds="http://schemas.openxmlformats.org/officeDocument/2006/customXml" ds:itemID="{BA0CF3B2-1F0F-4FC5-8002-3E4869ABAD55}">
-  <ds:schemaRefs>
-    <ds:schemaRef ds:uri="http://schemas.microsoft.com/sharepoint/v3/contenttype/forms"/>
-  </ds:schemaRefs>
-</ds:datastoreItem>
+<file path=customXml/item2.xml><?xml version="1.0" encoding="utf-8"?>
+<p:properties xmlns:p="http://schemas.microsoft.com/office/2006/metadata/properties" xmlns:xsi="http://www.w3.org/2001/XMLSchema-instance" xmlns:pc="http://schemas.microsoft.com/office/infopath/2007/PartnerControls">
+  <documentManagement>
+    <MediaServiceKeyPoints xmlns="71af3243-3dd4-4a8d-8c0d-dd76da1f02a5" xsi:nil="true"/>
+  </documentManagement>
+</p:properties>
 </file>
 
-<file path=customXml/itemProps2.xml><?xml version="1.0" encoding="utf-8"?>
-<ds:datastoreItem xmlns:ds="http://schemas.openxmlformats.org/officeDocument/2006/customXml" ds:itemID="{1EBC12AA-1C15-4500-BC9C-8EE83A441DE9}">
-  <ds:schemaRefs>
-    <ds:schemaRef ds:uri="http://schemas.microsoft.com/office/2006/metadata/properties"/>
-    <ds:schemaRef ds:uri="http://schemas.microsoft.com/office/infopath/2007/PartnerControls"/>
-    <ds:schemaRef ds:uri="71af3243-3dd4-4a8d-8c0d-dd76da1f02a5"/>
-  </ds:schemaRefs>
-</ds:datastoreItem>
+<file path=customXml/item3.xml><?xml version="1.0" encoding="utf-8"?>
+<?mso-contentType ?>
+<FormTemplates xmlns="http://schemas.microsoft.com/sharepoint/v3/contenttype/forms">
+  <Display>DocumentLibraryForm</Display>
+  <Edit>DocumentLibraryForm</Edit>
+  <New>DocumentLibraryForm</New>
+</FormTemplates>
 </file>
 
-<file path=customXml/itemProps3.xml><?xml version="1.0" encoding="utf-8"?>
+<file path=customXml/itemProps1.xml><?xml version="1.0" encoding="utf-8"?>
 <ds:datastoreItem xmlns:ds="http://schemas.openxmlformats.org/officeDocument/2006/customXml" ds:itemID="{1F69AFF4-BB30-4BA0-AD22-82CC3C43276B}">
   <ds:schemaRefs>
     <ds:schemaRef ds:uri="http://schemas.microsoft.com/office/2006/metadata/contentType"/>
@@ -11786,4 +12660,22 @@
     <ds:schemaRef ds:uri="http://schemas.microsoft.com/internal/obd"/>
   </ds:schemaRefs>
 </ds:datastoreItem>
+</file>
+
+<file path=customXml/itemProps2.xml><?xml version="1.0" encoding="utf-8"?>
+<ds:datastoreItem xmlns:ds="http://schemas.openxmlformats.org/officeDocument/2006/customXml" ds:itemID="{1EBC12AA-1C15-4500-BC9C-8EE83A441DE9}">
+  <ds:schemaRefs>
+    <ds:schemaRef ds:uri="http://schemas.microsoft.com/office/2006/metadata/properties"/>
+    <ds:schemaRef ds:uri="http://schemas.microsoft.com/office/infopath/2007/PartnerControls"/>
+    <ds:schemaRef ds:uri="71af3243-3dd4-4a8d-8c0d-dd76da1f02a5"/>
+  </ds:schemaRefs>
+</ds:datastoreItem>
+</file>
+
+<file path=customXml/itemProps3.xml><?xml version="1.0" encoding="utf-8"?>
+<ds:datastoreItem xmlns:ds="http://schemas.openxmlformats.org/officeDocument/2006/customXml" ds:itemID="{BA0CF3B2-1F0F-4FC5-8002-3E4869ABAD55}">
+  <ds:schemaRefs>
+    <ds:schemaRef ds:uri="http://schemas.microsoft.com/sharepoint/v3/contenttype/forms"/>
+  </ds:schemaRefs>
+</ds:datastoreItem>
 </file>
--- a/projektaufgabe_1/Abschlusspraesentation_proj1.pptx
+++ b/projektaufgabe_1/Abschlusspraesentation_proj1.pptx
@@ -5,10 +5,10 @@
     <p:sldMasterId id="2147483672" r:id="rId4"/>
   </p:sldMasterIdLst>
   <p:notesMasterIdLst>
-    <p:notesMasterId r:id="rId14"/>
+    <p:notesMasterId r:id="rId16"/>
   </p:notesMasterIdLst>
   <p:handoutMasterIdLst>
-    <p:handoutMasterId r:id="rId15"/>
+    <p:handoutMasterId r:id="rId17"/>
   </p:handoutMasterIdLst>
   <p:sldIdLst>
     <p:sldId id="256" r:id="rId5"/>
@@ -18,8 +18,10 @@
     <p:sldId id="265" r:id="rId9"/>
     <p:sldId id="266" r:id="rId10"/>
     <p:sldId id="263" r:id="rId11"/>
-    <p:sldId id="260" r:id="rId12"/>
-    <p:sldId id="262" r:id="rId13"/>
+    <p:sldId id="267" r:id="rId12"/>
+    <p:sldId id="268" r:id="rId13"/>
+    <p:sldId id="260" r:id="rId14"/>
+    <p:sldId id="262" r:id="rId15"/>
   </p:sldIdLst>
   <p:sldSz cx="12192000" cy="6858000"/>
   <p:notesSz cx="6858000" cy="9144000"/>
@@ -142,7 +144,7 @@
   <pc:docChgLst>
     <pc:chgData name="David Ottino" userId="2e8b103f4c6c57f6" providerId="LiveId" clId="{4FBA45C3-B1BF-42F3-969B-7363B7F5A2BB}"/>
     <pc:docChg chg="undo custSel addSld delSld modSld sldOrd">
-      <pc:chgData name="David Ottino" userId="2e8b103f4c6c57f6" providerId="LiveId" clId="{4FBA45C3-B1BF-42F3-969B-7363B7F5A2BB}" dt="2026-04-27T12:07:25.110" v="626"/>
+      <pc:chgData name="David Ottino" userId="2e8b103f4c6c57f6" providerId="LiveId" clId="{4FBA45C3-B1BF-42F3-969B-7363B7F5A2BB}" dt="2026-04-27T12:17:34.626" v="651"/>
       <pc:docMkLst>
         <pc:docMk/>
       </pc:docMkLst>
@@ -308,6 +310,212 @@
             <ac:grpSpMk id="47" creationId="{9A421166-2996-41A7-B094-AE5316F347DD}"/>
           </ac:grpSpMkLst>
         </pc:grpChg>
+      </pc:sldChg>
+      <pc:sldChg chg="addSp delSp modSp add mod">
+        <pc:chgData name="David Ottino" userId="2e8b103f4c6c57f6" providerId="LiveId" clId="{4FBA45C3-B1BF-42F3-969B-7363B7F5A2BB}" dt="2026-04-27T12:16:41.225" v="642" actId="26606"/>
+        <pc:sldMkLst>
+          <pc:docMk/>
+          <pc:sldMk cId="567447768" sldId="267"/>
+        </pc:sldMkLst>
+        <pc:spChg chg="mod ord">
+          <ac:chgData name="David Ottino" userId="2e8b103f4c6c57f6" providerId="LiveId" clId="{4FBA45C3-B1BF-42F3-969B-7363B7F5A2BB}" dt="2026-04-27T12:16:41.225" v="642" actId="26606"/>
+          <ac:spMkLst>
+            <pc:docMk/>
+            <pc:sldMk cId="567447768" sldId="267"/>
+            <ac:spMk id="2" creationId="{0A36710B-EE68-FFF0-09F8-08322FE3CD3C}"/>
+          </ac:spMkLst>
+        </pc:spChg>
+        <pc:spChg chg="add del mod">
+          <ac:chgData name="David Ottino" userId="2e8b103f4c6c57f6" providerId="LiveId" clId="{4FBA45C3-B1BF-42F3-969B-7363B7F5A2BB}" dt="2026-04-27T12:16:41.225" v="642" actId="26606"/>
+          <ac:spMkLst>
+            <pc:docMk/>
+            <pc:sldMk cId="567447768" sldId="267"/>
+            <ac:spMk id="4" creationId="{7A4B9157-7CF9-6EE5-96B1-A3B7F50CC402}"/>
+          </ac:spMkLst>
+        </pc:spChg>
+        <pc:spChg chg="del">
+          <ac:chgData name="David Ottino" userId="2e8b103f4c6c57f6" providerId="LiveId" clId="{4FBA45C3-B1BF-42F3-969B-7363B7F5A2BB}" dt="2026-04-27T12:15:55.605" v="638" actId="478"/>
+          <ac:spMkLst>
+            <pc:docMk/>
+            <pc:sldMk cId="567447768" sldId="267"/>
+            <ac:spMk id="6" creationId="{97078558-B470-2C1A-C3AE-22FFDB3B6EF4}"/>
+          </ac:spMkLst>
+        </pc:spChg>
+        <pc:spChg chg="add">
+          <ac:chgData name="David Ottino" userId="2e8b103f4c6c57f6" providerId="LiveId" clId="{4FBA45C3-B1BF-42F3-969B-7363B7F5A2BB}" dt="2026-04-27T12:16:41.225" v="642" actId="26606"/>
+          <ac:spMkLst>
+            <pc:docMk/>
+            <pc:sldMk cId="567447768" sldId="267"/>
+            <ac:spMk id="12" creationId="{A078A52F-85EA-4C0B-962B-D9D9DD4DD78C}"/>
+          </ac:spMkLst>
+        </pc:spChg>
+        <pc:spChg chg="add">
+          <ac:chgData name="David Ottino" userId="2e8b103f4c6c57f6" providerId="LiveId" clId="{4FBA45C3-B1BF-42F3-969B-7363B7F5A2BB}" dt="2026-04-27T12:16:41.225" v="642" actId="26606"/>
+          <ac:spMkLst>
+            <pc:docMk/>
+            <pc:sldMk cId="567447768" sldId="267"/>
+            <ac:spMk id="14" creationId="{919797D5-5700-4683-B30A-5B4D56CB8270}"/>
+          </ac:spMkLst>
+        </pc:spChg>
+        <pc:spChg chg="add">
+          <ac:chgData name="David Ottino" userId="2e8b103f4c6c57f6" providerId="LiveId" clId="{4FBA45C3-B1BF-42F3-969B-7363B7F5A2BB}" dt="2026-04-27T12:16:41.225" v="642" actId="26606"/>
+          <ac:spMkLst>
+            <pc:docMk/>
+            <pc:sldMk cId="567447768" sldId="267"/>
+            <ac:spMk id="16" creationId="{4856A7B9-9801-42EC-A4C9-7E22A56EF53D}"/>
+          </ac:spMkLst>
+        </pc:spChg>
+        <pc:spChg chg="add">
+          <ac:chgData name="David Ottino" userId="2e8b103f4c6c57f6" providerId="LiveId" clId="{4FBA45C3-B1BF-42F3-969B-7363B7F5A2BB}" dt="2026-04-27T12:16:41.225" v="642" actId="26606"/>
+          <ac:spMkLst>
+            <pc:docMk/>
+            <pc:sldMk cId="567447768" sldId="267"/>
+            <ac:spMk id="18" creationId="{8AD54DB8-C150-4290-85D6-F5B0262BFEEF}"/>
+          </ac:spMkLst>
+        </pc:spChg>
+        <pc:spChg chg="add">
+          <ac:chgData name="David Ottino" userId="2e8b103f4c6c57f6" providerId="LiveId" clId="{4FBA45C3-B1BF-42F3-969B-7363B7F5A2BB}" dt="2026-04-27T12:16:41.225" v="642" actId="26606"/>
+          <ac:spMkLst>
+            <pc:docMk/>
+            <pc:sldMk cId="567447768" sldId="267"/>
+            <ac:spMk id="20" creationId="{379F11E2-8BA5-4C5C-AE7C-361E5EA011FF}"/>
+          </ac:spMkLst>
+        </pc:spChg>
+        <pc:spChg chg="add">
+          <ac:chgData name="David Ottino" userId="2e8b103f4c6c57f6" providerId="LiveId" clId="{4FBA45C3-B1BF-42F3-969B-7363B7F5A2BB}" dt="2026-04-27T12:16:41.225" v="642" actId="26606"/>
+          <ac:spMkLst>
+            <pc:docMk/>
+            <pc:sldMk cId="567447768" sldId="267"/>
+            <ac:spMk id="22" creationId="{7C00E1DA-EC7C-40FC-95E3-11FDCD2E4291}"/>
+          </ac:spMkLst>
+        </pc:spChg>
+        <pc:grpChg chg="add">
+          <ac:chgData name="David Ottino" userId="2e8b103f4c6c57f6" providerId="LiveId" clId="{4FBA45C3-B1BF-42F3-969B-7363B7F5A2BB}" dt="2026-04-27T12:16:41.225" v="642" actId="26606"/>
+          <ac:grpSpMkLst>
+            <pc:docMk/>
+            <pc:sldMk cId="567447768" sldId="267"/>
+            <ac:grpSpMk id="24" creationId="{9A421166-2996-41A7-B094-AE5316F347DD}"/>
+          </ac:grpSpMkLst>
+        </pc:grpChg>
+        <pc:picChg chg="add mod">
+          <ac:chgData name="David Ottino" userId="2e8b103f4c6c57f6" providerId="LiveId" clId="{4FBA45C3-B1BF-42F3-969B-7363B7F5A2BB}" dt="2026-04-27T12:16:41.225" v="642" actId="26606"/>
+          <ac:picMkLst>
+            <pc:docMk/>
+            <pc:sldMk cId="567447768" sldId="267"/>
+            <ac:picMk id="7" creationId="{2C21C568-C9B8-4D3B-E123-497C2DB3DB86}"/>
+          </ac:picMkLst>
+        </pc:picChg>
+      </pc:sldChg>
+      <pc:sldChg chg="addSp delSp modSp add mod addAnim">
+        <pc:chgData name="David Ottino" userId="2e8b103f4c6c57f6" providerId="LiveId" clId="{4FBA45C3-B1BF-42F3-969B-7363B7F5A2BB}" dt="2026-04-27T12:17:34.626" v="651"/>
+        <pc:sldMkLst>
+          <pc:docMk/>
+          <pc:sldMk cId="2045613644" sldId="268"/>
+        </pc:sldMkLst>
+        <pc:spChg chg="mod ord">
+          <ac:chgData name="David Ottino" userId="2e8b103f4c6c57f6" providerId="LiveId" clId="{4FBA45C3-B1BF-42F3-969B-7363B7F5A2BB}" dt="2026-04-27T12:17:34.610" v="650" actId="26606"/>
+          <ac:spMkLst>
+            <pc:docMk/>
+            <pc:sldMk cId="2045613644" sldId="268"/>
+            <ac:spMk id="2" creationId="{176DFBAE-5471-E50C-F7BA-BA95A0C276DF}"/>
+          </ac:spMkLst>
+        </pc:spChg>
+        <pc:spChg chg="add del mod">
+          <ac:chgData name="David Ottino" userId="2e8b103f4c6c57f6" providerId="LiveId" clId="{4FBA45C3-B1BF-42F3-969B-7363B7F5A2BB}" dt="2026-04-27T12:17:01.759" v="645" actId="478"/>
+          <ac:spMkLst>
+            <pc:docMk/>
+            <pc:sldMk cId="2045613644" sldId="268"/>
+            <ac:spMk id="4" creationId="{19DC58BA-38F6-1B27-CAE2-98D12DFCAFD5}"/>
+          </ac:spMkLst>
+        </pc:spChg>
+        <pc:spChg chg="del">
+          <ac:chgData name="David Ottino" userId="2e8b103f4c6c57f6" providerId="LiveId" clId="{4FBA45C3-B1BF-42F3-969B-7363B7F5A2BB}" dt="2026-04-27T12:17:34.610" v="650" actId="26606"/>
+          <ac:spMkLst>
+            <pc:docMk/>
+            <pc:sldMk cId="2045613644" sldId="268"/>
+            <ac:spMk id="12" creationId="{8636DC44-31E8-EBAB-D4D5-F519A17BEF1D}"/>
+          </ac:spMkLst>
+        </pc:spChg>
+        <pc:spChg chg="del">
+          <ac:chgData name="David Ottino" userId="2e8b103f4c6c57f6" providerId="LiveId" clId="{4FBA45C3-B1BF-42F3-969B-7363B7F5A2BB}" dt="2026-04-27T12:17:34.610" v="650" actId="26606"/>
+          <ac:spMkLst>
+            <pc:docMk/>
+            <pc:sldMk cId="2045613644" sldId="268"/>
+            <ac:spMk id="18" creationId="{634FCC80-748E-E143-4001-EC7271DC5749}"/>
+          </ac:spMkLst>
+        </pc:spChg>
+        <pc:spChg chg="del">
+          <ac:chgData name="David Ottino" userId="2e8b103f4c6c57f6" providerId="LiveId" clId="{4FBA45C3-B1BF-42F3-969B-7363B7F5A2BB}" dt="2026-04-27T12:17:34.610" v="650" actId="26606"/>
+          <ac:spMkLst>
+            <pc:docMk/>
+            <pc:sldMk cId="2045613644" sldId="268"/>
+            <ac:spMk id="20" creationId="{D68E5DDA-28C0-E3BD-D60C-9096B10CB640}"/>
+          </ac:spMkLst>
+        </pc:spChg>
+        <pc:spChg chg="del">
+          <ac:chgData name="David Ottino" userId="2e8b103f4c6c57f6" providerId="LiveId" clId="{4FBA45C3-B1BF-42F3-969B-7363B7F5A2BB}" dt="2026-04-27T12:17:34.610" v="650" actId="26606"/>
+          <ac:spMkLst>
+            <pc:docMk/>
+            <pc:sldMk cId="2045613644" sldId="268"/>
+            <ac:spMk id="22" creationId="{8D120D35-C648-2891-4B4B-5AF073B8A264}"/>
+          </ac:spMkLst>
+        </pc:spChg>
+        <pc:spChg chg="add">
+          <ac:chgData name="David Ottino" userId="2e8b103f4c6c57f6" providerId="LiveId" clId="{4FBA45C3-B1BF-42F3-969B-7363B7F5A2BB}" dt="2026-04-27T12:17:34.610" v="650" actId="26606"/>
+          <ac:spMkLst>
+            <pc:docMk/>
+            <pc:sldMk cId="2045613644" sldId="268"/>
+            <ac:spMk id="32" creationId="{A078A52F-85EA-4C0B-962B-D9D9DD4DD78C}"/>
+          </ac:spMkLst>
+        </pc:spChg>
+        <pc:spChg chg="add">
+          <ac:chgData name="David Ottino" userId="2e8b103f4c6c57f6" providerId="LiveId" clId="{4FBA45C3-B1BF-42F3-969B-7363B7F5A2BB}" dt="2026-04-27T12:17:34.610" v="650" actId="26606"/>
+          <ac:spMkLst>
+            <pc:docMk/>
+            <pc:sldMk cId="2045613644" sldId="268"/>
+            <ac:spMk id="34" creationId="{919797D5-5700-4683-B30A-5B4D56CB8270}"/>
+          </ac:spMkLst>
+        </pc:spChg>
+        <pc:spChg chg="add">
+          <ac:chgData name="David Ottino" userId="2e8b103f4c6c57f6" providerId="LiveId" clId="{4FBA45C3-B1BF-42F3-969B-7363B7F5A2BB}" dt="2026-04-27T12:17:34.610" v="650" actId="26606"/>
+          <ac:spMkLst>
+            <pc:docMk/>
+            <pc:sldMk cId="2045613644" sldId="268"/>
+            <ac:spMk id="38" creationId="{8AD54DB8-C150-4290-85D6-F5B0262BFEEF}"/>
+          </ac:spMkLst>
+        </pc:spChg>
+        <pc:spChg chg="add">
+          <ac:chgData name="David Ottino" userId="2e8b103f4c6c57f6" providerId="LiveId" clId="{4FBA45C3-B1BF-42F3-969B-7363B7F5A2BB}" dt="2026-04-27T12:17:34.610" v="650" actId="26606"/>
+          <ac:spMkLst>
+            <pc:docMk/>
+            <pc:sldMk cId="2045613644" sldId="268"/>
+            <ac:spMk id="40" creationId="{379F11E2-8BA5-4C5C-AE7C-361E5EA011FF}"/>
+          </ac:spMkLst>
+        </pc:spChg>
+        <pc:spChg chg="add">
+          <ac:chgData name="David Ottino" userId="2e8b103f4c6c57f6" providerId="LiveId" clId="{4FBA45C3-B1BF-42F3-969B-7363B7F5A2BB}" dt="2026-04-27T12:17:34.610" v="650" actId="26606"/>
+          <ac:spMkLst>
+            <pc:docMk/>
+            <pc:sldMk cId="2045613644" sldId="268"/>
+            <ac:spMk id="42" creationId="{7C00E1DA-EC7C-40FC-95E3-11FDCD2E4291}"/>
+          </ac:spMkLst>
+        </pc:spChg>
+        <pc:picChg chg="add mod">
+          <ac:chgData name="David Ottino" userId="2e8b103f4c6c57f6" providerId="LiveId" clId="{4FBA45C3-B1BF-42F3-969B-7363B7F5A2BB}" dt="2026-04-27T12:17:33.785" v="649" actId="14100"/>
+          <ac:picMkLst>
+            <pc:docMk/>
+            <pc:sldMk cId="2045613644" sldId="268"/>
+            <ac:picMk id="6" creationId="{72EA7E18-3D88-A852-0D32-2BF964766F48}"/>
+          </ac:picMkLst>
+        </pc:picChg>
+        <pc:picChg chg="del">
+          <ac:chgData name="David Ottino" userId="2e8b103f4c6c57f6" providerId="LiveId" clId="{4FBA45C3-B1BF-42F3-969B-7363B7F5A2BB}" dt="2026-04-27T12:16:53.034" v="644" actId="478"/>
+          <ac:picMkLst>
+            <pc:docMk/>
+            <pc:sldMk cId="2045613644" sldId="268"/>
+            <ac:picMk id="7" creationId="{577BA31A-5E11-CE2E-DDE4-412948E26E8B}"/>
+          </ac:picMkLst>
+        </pc:picChg>
       </pc:sldChg>
     </pc:docChg>
   </pc:docChgLst>
@@ -4733,6 +4941,198 @@
 </p:notes>
 </file>
 
+<file path=ppt/notesSlides/notesSlide10.xml><?xml version="1.0" encoding="utf-8"?>
+<p:notes xmlns:a="http://schemas.openxmlformats.org/drawingml/2006/main" xmlns:r="http://schemas.openxmlformats.org/officeDocument/2006/relationships" xmlns:p="http://schemas.openxmlformats.org/presentationml/2006/main">
+  <p:cSld>
+    <p:spTree>
+      <p:nvGrpSpPr>
+        <p:cNvPr id="1" name=""/>
+        <p:cNvGrpSpPr/>
+        <p:nvPr/>
+      </p:nvGrpSpPr>
+      <p:grpSpPr>
+        <a:xfrm>
+          <a:off x="0" y="0"/>
+          <a:ext cx="0" cy="0"/>
+          <a:chOff x="0" y="0"/>
+          <a:chExt cx="0" cy="0"/>
+        </a:xfrm>
+      </p:grpSpPr>
+      <p:sp>
+        <p:nvSpPr>
+          <p:cNvPr id="2" name="Folienbildplatzhalter 1"/>
+          <p:cNvSpPr>
+            <a:spLocks noGrp="1" noRot="1" noChangeAspect="1"/>
+          </p:cNvSpPr>
+          <p:nvPr>
+            <p:ph type="sldImg"/>
+          </p:nvPr>
+        </p:nvSpPr>
+        <p:spPr/>
+      </p:sp>
+      <p:sp>
+        <p:nvSpPr>
+          <p:cNvPr id="3" name="Notizenplatzhalter 2"/>
+          <p:cNvSpPr>
+            <a:spLocks noGrp="1"/>
+          </p:cNvSpPr>
+          <p:nvPr>
+            <p:ph type="body" idx="1"/>
+          </p:nvPr>
+        </p:nvSpPr>
+        <p:spPr/>
+        <p:txBody>
+          <a:bodyPr/>
+          <a:lstStyle/>
+          <a:p>
+            <a:endParaRPr lang="de-DE"/>
+          </a:p>
+        </p:txBody>
+      </p:sp>
+      <p:sp>
+        <p:nvSpPr>
+          <p:cNvPr id="4" name="Foliennummernplatzhalter 3"/>
+          <p:cNvSpPr>
+            <a:spLocks noGrp="1"/>
+          </p:cNvSpPr>
+          <p:nvPr>
+            <p:ph type="sldNum" sz="quarter" idx="5"/>
+          </p:nvPr>
+        </p:nvSpPr>
+        <p:spPr/>
+        <p:txBody>
+          <a:bodyPr/>
+          <a:lstStyle/>
+          <a:p>
+            <a:fld id="{DEF059D1-1E64-4095-816B-E25F58AA521B}" type="slidenum">
+              <a:rPr lang="de-DE" smtClean="0"/>
+              <a:t>10</a:t>
+            </a:fld>
+            <a:endParaRPr lang="de-DE"/>
+          </a:p>
+        </p:txBody>
+      </p:sp>
+    </p:spTree>
+    <p:extLst>
+      <p:ext uri="{BB962C8B-B14F-4D97-AF65-F5344CB8AC3E}">
+        <p14:creationId xmlns:p14="http://schemas.microsoft.com/office/powerpoint/2010/main" val="1722163809"/>
+      </p:ext>
+    </p:extLst>
+  </p:cSld>
+  <p:clrMapOvr>
+    <a:masterClrMapping/>
+  </p:clrMapOvr>
+</p:notes>
+</file>
+
+<file path=ppt/notesSlides/notesSlide11.xml><?xml version="1.0" encoding="utf-8"?>
+<p:notes xmlns:a="http://schemas.openxmlformats.org/drawingml/2006/main" xmlns:r="http://schemas.openxmlformats.org/officeDocument/2006/relationships" xmlns:p="http://schemas.openxmlformats.org/presentationml/2006/main">
+  <p:cSld>
+    <p:spTree>
+      <p:nvGrpSpPr>
+        <p:cNvPr id="1" name="">
+          <a:extLst>
+            <a:ext uri="{FF2B5EF4-FFF2-40B4-BE49-F238E27FC236}">
+              <a16:creationId xmlns:a16="http://schemas.microsoft.com/office/drawing/2014/main" id="{07402912-FD73-6D93-1036-687993C00CFF}"/>
+            </a:ext>
+          </a:extLst>
+        </p:cNvPr>
+        <p:cNvGrpSpPr/>
+        <p:nvPr/>
+      </p:nvGrpSpPr>
+      <p:grpSpPr>
+        <a:xfrm>
+          <a:off x="0" y="0"/>
+          <a:ext cx="0" cy="0"/>
+          <a:chOff x="0" y="0"/>
+          <a:chExt cx="0" cy="0"/>
+        </a:xfrm>
+      </p:grpSpPr>
+      <p:sp>
+        <p:nvSpPr>
+          <p:cNvPr id="2" name="Folienbildplatzhalter 1">
+            <a:extLst>
+              <a:ext uri="{FF2B5EF4-FFF2-40B4-BE49-F238E27FC236}">
+                <a16:creationId xmlns:a16="http://schemas.microsoft.com/office/drawing/2014/main" id="{43EF5B76-200E-49A5-8BC8-59A4AE94B9EC}"/>
+              </a:ext>
+            </a:extLst>
+          </p:cNvPr>
+          <p:cNvSpPr>
+            <a:spLocks noGrp="1" noRot="1" noChangeAspect="1"/>
+          </p:cNvSpPr>
+          <p:nvPr>
+            <p:ph type="sldImg"/>
+          </p:nvPr>
+        </p:nvSpPr>
+        <p:spPr/>
+      </p:sp>
+      <p:sp>
+        <p:nvSpPr>
+          <p:cNvPr id="3" name="Notizenplatzhalter 2">
+            <a:extLst>
+              <a:ext uri="{FF2B5EF4-FFF2-40B4-BE49-F238E27FC236}">
+                <a16:creationId xmlns:a16="http://schemas.microsoft.com/office/drawing/2014/main" id="{96ABCAC8-6B02-A470-8D14-A9D675E1DD09}"/>
+              </a:ext>
+            </a:extLst>
+          </p:cNvPr>
+          <p:cNvSpPr>
+            <a:spLocks noGrp="1"/>
+          </p:cNvSpPr>
+          <p:nvPr>
+            <p:ph type="body" idx="1"/>
+          </p:nvPr>
+        </p:nvSpPr>
+        <p:spPr/>
+        <p:txBody>
+          <a:bodyPr/>
+          <a:lstStyle/>
+          <a:p>
+            <a:endParaRPr lang="de-DE"/>
+          </a:p>
+        </p:txBody>
+      </p:sp>
+      <p:sp>
+        <p:nvSpPr>
+          <p:cNvPr id="4" name="Foliennummernplatzhalter 3">
+            <a:extLst>
+              <a:ext uri="{FF2B5EF4-FFF2-40B4-BE49-F238E27FC236}">
+                <a16:creationId xmlns:a16="http://schemas.microsoft.com/office/drawing/2014/main" id="{5BE433D6-FEF0-EA7F-1D4F-F4FBE685FEB6}"/>
+              </a:ext>
+            </a:extLst>
+          </p:cNvPr>
+          <p:cNvSpPr>
+            <a:spLocks noGrp="1"/>
+          </p:cNvSpPr>
+          <p:nvPr>
+            <p:ph type="sldNum" sz="quarter" idx="5"/>
+          </p:nvPr>
+        </p:nvSpPr>
+        <p:spPr/>
+        <p:txBody>
+          <a:bodyPr/>
+          <a:lstStyle/>
+          <a:p>
+            <a:fld id="{DEF059D1-1E64-4095-816B-E25F58AA521B}" type="slidenum">
+              <a:rPr lang="de-DE" smtClean="0"/>
+              <a:t>11</a:t>
+            </a:fld>
+            <a:endParaRPr lang="de-DE"/>
+          </a:p>
+        </p:txBody>
+      </p:sp>
+    </p:spTree>
+    <p:extLst>
+      <p:ext uri="{BB962C8B-B14F-4D97-AF65-F5344CB8AC3E}">
+        <p14:creationId xmlns:p14="http://schemas.microsoft.com/office/powerpoint/2010/main" val="3916977617"/>
+      </p:ext>
+    </p:extLst>
+  </p:cSld>
+  <p:clrMapOvr>
+    <a:masterClrMapping/>
+  </p:clrMapOvr>
+</p:notes>
+</file>
+
 <file path=ppt/notesSlides/notesSlide2.xml><?xml version="1.0" encoding="utf-8"?>
 <p:notes xmlns:a="http://schemas.openxmlformats.org/drawingml/2006/main" xmlns:r="http://schemas.openxmlformats.org/officeDocument/2006/relationships" xmlns:p="http://schemas.openxmlformats.org/presentationml/2006/main">
   <p:cSld>
@@ -5338,7 +5738,13 @@
   <p:cSld>
     <p:spTree>
       <p:nvGrpSpPr>
-        <p:cNvPr id="1" name=""/>
+        <p:cNvPr id="1" name="">
+          <a:extLst>
+            <a:ext uri="{FF2B5EF4-FFF2-40B4-BE49-F238E27FC236}">
+              <a16:creationId xmlns:a16="http://schemas.microsoft.com/office/drawing/2014/main" id="{81B23F08-9B1A-638F-0305-C74572CDFDE1}"/>
+            </a:ext>
+          </a:extLst>
+        </p:cNvPr>
         <p:cNvGrpSpPr/>
         <p:nvPr/>
       </p:nvGrpSpPr>
@@ -5352,7 +5758,13 @@
       </p:grpSpPr>
       <p:sp>
         <p:nvSpPr>
-          <p:cNvPr id="2" name="Folienbildplatzhalter 1"/>
+          <p:cNvPr id="2" name="Folienbildplatzhalter 1">
+            <a:extLst>
+              <a:ext uri="{FF2B5EF4-FFF2-40B4-BE49-F238E27FC236}">
+                <a16:creationId xmlns:a16="http://schemas.microsoft.com/office/drawing/2014/main" id="{DF9F1B26-9E5F-64B3-A936-FFC249AB1845}"/>
+              </a:ext>
+            </a:extLst>
+          </p:cNvPr>
           <p:cNvSpPr>
             <a:spLocks noGrp="1" noRot="1" noChangeAspect="1"/>
           </p:cNvSpPr>
@@ -5364,7 +5776,13 @@
       </p:sp>
       <p:sp>
         <p:nvSpPr>
-          <p:cNvPr id="3" name="Notizenplatzhalter 2"/>
+          <p:cNvPr id="3" name="Notizenplatzhalter 2">
+            <a:extLst>
+              <a:ext uri="{FF2B5EF4-FFF2-40B4-BE49-F238E27FC236}">
+                <a16:creationId xmlns:a16="http://schemas.microsoft.com/office/drawing/2014/main" id="{F6171A45-4EE0-AF74-A88B-FB926621E06D}"/>
+              </a:ext>
+            </a:extLst>
+          </p:cNvPr>
           <p:cNvSpPr>
             <a:spLocks noGrp="1"/>
           </p:cNvSpPr>
@@ -5383,7 +5801,13 @@
       </p:sp>
       <p:sp>
         <p:nvSpPr>
-          <p:cNvPr id="4" name="Foliennummernplatzhalter 3"/>
+          <p:cNvPr id="4" name="Foliennummernplatzhalter 3">
+            <a:extLst>
+              <a:ext uri="{FF2B5EF4-FFF2-40B4-BE49-F238E27FC236}">
+                <a16:creationId xmlns:a16="http://schemas.microsoft.com/office/drawing/2014/main" id="{D2BD3A16-FB95-D1CF-A010-82A02715F4DC}"/>
+              </a:ext>
+            </a:extLst>
+          </p:cNvPr>
           <p:cNvSpPr>
             <a:spLocks noGrp="1"/>
           </p:cNvSpPr>
@@ -5407,7 +5831,7 @@
     </p:spTree>
     <p:extLst>
       <p:ext uri="{BB962C8B-B14F-4D97-AF65-F5344CB8AC3E}">
-        <p14:creationId xmlns:p14="http://schemas.microsoft.com/office/powerpoint/2010/main" val="1722163809"/>
+        <p14:creationId xmlns:p14="http://schemas.microsoft.com/office/powerpoint/2010/main" val="3282144631"/>
       </p:ext>
     </p:extLst>
   </p:cSld>
@@ -5425,7 +5849,7 @@
         <p:cNvPr id="1" name="">
           <a:extLst>
             <a:ext uri="{FF2B5EF4-FFF2-40B4-BE49-F238E27FC236}">
-              <a16:creationId xmlns:a16="http://schemas.microsoft.com/office/drawing/2014/main" id="{07402912-FD73-6D93-1036-687993C00CFF}"/>
+              <a16:creationId xmlns:a16="http://schemas.microsoft.com/office/drawing/2014/main" id="{551F245D-440E-A2CC-48FB-E69D995909BA}"/>
             </a:ext>
           </a:extLst>
         </p:cNvPr>
@@ -5445,7 +5869,7 @@
           <p:cNvPr id="2" name="Folienbildplatzhalter 1">
             <a:extLst>
               <a:ext uri="{FF2B5EF4-FFF2-40B4-BE49-F238E27FC236}">
-                <a16:creationId xmlns:a16="http://schemas.microsoft.com/office/drawing/2014/main" id="{43EF5B76-200E-49A5-8BC8-59A4AE94B9EC}"/>
+                <a16:creationId xmlns:a16="http://schemas.microsoft.com/office/drawing/2014/main" id="{2F5F2733-C1DA-74C2-DB92-E1788D08AA65}"/>
               </a:ext>
             </a:extLst>
           </p:cNvPr>
@@ -5463,7 +5887,7 @@
           <p:cNvPr id="3" name="Notizenplatzhalter 2">
             <a:extLst>
               <a:ext uri="{FF2B5EF4-FFF2-40B4-BE49-F238E27FC236}">
-                <a16:creationId xmlns:a16="http://schemas.microsoft.com/office/drawing/2014/main" id="{96ABCAC8-6B02-A470-8D14-A9D675E1DD09}"/>
+                <a16:creationId xmlns:a16="http://schemas.microsoft.com/office/drawing/2014/main" id="{C333A0E4-523C-0F44-15E7-2157422AE0E0}"/>
               </a:ext>
             </a:extLst>
           </p:cNvPr>
@@ -5488,7 +5912,7 @@
           <p:cNvPr id="4" name="Foliennummernplatzhalter 3">
             <a:extLst>
               <a:ext uri="{FF2B5EF4-FFF2-40B4-BE49-F238E27FC236}">
-                <a16:creationId xmlns:a16="http://schemas.microsoft.com/office/drawing/2014/main" id="{5BE433D6-FEF0-EA7F-1D4F-F4FBE685FEB6}"/>
+                <a16:creationId xmlns:a16="http://schemas.microsoft.com/office/drawing/2014/main" id="{AD92301E-49AA-EE22-00DC-EAEC6A7EE4AA}"/>
               </a:ext>
             </a:extLst>
           </p:cNvPr>
@@ -5515,7 +5939,7 @@
     </p:spTree>
     <p:extLst>
       <p:ext uri="{BB962C8B-B14F-4D97-AF65-F5344CB8AC3E}">
-        <p14:creationId xmlns:p14="http://schemas.microsoft.com/office/powerpoint/2010/main" val="3916977617"/>
+        <p14:creationId xmlns:p14="http://schemas.microsoft.com/office/powerpoint/2010/main" val="635035726"/>
       </p:ext>
     </p:extLst>
   </p:cSld>
@@ -9848,6 +10272,581 @@
 </p:sld>
 </file>
 
+<file path=ppt/slides/slide10.xml><?xml version="1.0" encoding="utf-8"?>
+<p:sld xmlns:a="http://schemas.openxmlformats.org/drawingml/2006/main" xmlns:r="http://schemas.openxmlformats.org/officeDocument/2006/relationships" xmlns:p="http://schemas.openxmlformats.org/presentationml/2006/main">
+  <p:cSld>
+    <p:bg>
+      <p:bgPr>
+        <a:solidFill>
+          <a:schemeClr val="bg1"/>
+        </a:solidFill>
+        <a:effectLst/>
+      </p:bgPr>
+    </p:bg>
+    <p:spTree>
+      <p:nvGrpSpPr>
+        <p:cNvPr id="1" name=""/>
+        <p:cNvGrpSpPr/>
+        <p:nvPr/>
+      </p:nvGrpSpPr>
+      <p:grpSpPr>
+        <a:xfrm>
+          <a:off x="0" y="0"/>
+          <a:ext cx="0" cy="0"/>
+          <a:chOff x="0" y="0"/>
+          <a:chExt cx="0" cy="0"/>
+        </a:xfrm>
+      </p:grpSpPr>
+      <p:sp useBgFill="1">
+        <p:nvSpPr>
+          <p:cNvPr id="10" name="Rechteck 9">
+            <a:extLst>
+              <a:ext uri="{FF2B5EF4-FFF2-40B4-BE49-F238E27FC236}">
+                <a16:creationId xmlns:a16="http://schemas.microsoft.com/office/drawing/2014/main" id="{379F11E2-8BA5-4C5C-AE7C-361E5EA011FF}"/>
+              </a:ext>
+              <a:ext uri="{C183D7F6-B498-43B3-948B-1728B52AA6E4}">
+                <adec:decorative xmlns:adec="http://schemas.microsoft.com/office/drawing/2017/decorative" val="1"/>
+              </a:ext>
+            </a:extLst>
+          </p:cNvPr>
+          <p:cNvSpPr>
+            <a:spLocks noGrp="1" noRot="1" noChangeAspect="1" noMove="1" noResize="1" noEditPoints="1" noAdjustHandles="1" noChangeArrowheads="1" noChangeShapeType="1" noTextEdit="1"/>
+          </p:cNvSpPr>
+          <p:nvPr>
+            <p:extLst>
+              <p:ext uri="{386F3935-93C4-4BCD-93E2-E3B085C9AB24}">
+                <p16:designElem xmlns:p16="http://schemas.microsoft.com/office/powerpoint/2015/main" val="1"/>
+              </p:ext>
+            </p:extLst>
+          </p:nvPr>
+        </p:nvSpPr>
+        <p:spPr>
+          <a:xfrm>
+            <a:off x="0" y="1"/>
+            <a:ext cx="12191999" cy="6858000"/>
+          </a:xfrm>
+          <a:prstGeom prst="rect">
+            <a:avLst/>
+          </a:prstGeom>
+          <a:ln>
+            <a:noFill/>
+          </a:ln>
+        </p:spPr>
+        <p:style>
+          <a:lnRef idx="2">
+            <a:schemeClr val="accent1">
+              <a:shade val="50000"/>
+            </a:schemeClr>
+          </a:lnRef>
+          <a:fillRef idx="1">
+            <a:schemeClr val="accent1"/>
+          </a:fillRef>
+          <a:effectRef idx="0">
+            <a:schemeClr val="accent1"/>
+          </a:effectRef>
+          <a:fontRef idx="minor">
+            <a:schemeClr val="lt1"/>
+          </a:fontRef>
+        </p:style>
+        <p:txBody>
+          <a:bodyPr rtlCol="0" anchor="ctr"/>
+          <a:lstStyle/>
+          <a:p>
+            <a:pPr algn="ctr" rtl="0"/>
+            <a:endParaRPr lang="de-DE"/>
+          </a:p>
+        </p:txBody>
+      </p:sp>
+      <p:pic>
+        <p:nvPicPr>
+          <p:cNvPr id="5" name="Bild 4" descr="Digitale Zahlen">
+            <a:extLst>
+              <a:ext uri="{FF2B5EF4-FFF2-40B4-BE49-F238E27FC236}">
+                <a16:creationId xmlns:a16="http://schemas.microsoft.com/office/drawing/2014/main" id="{A21EA617-6D48-425F-97A8-7FEC82C8F401}"/>
+              </a:ext>
+            </a:extLst>
+          </p:cNvPr>
+          <p:cNvPicPr>
+            <a:picLocks noChangeAspect="1"/>
+          </p:cNvPicPr>
+          <p:nvPr/>
+        </p:nvPicPr>
+        <p:blipFill rotWithShape="1">
+          <a:blip r:embed="rId3" cstate="screen">
+            <a:extLst>
+              <a:ext uri="{28A0092B-C50C-407E-A947-70E740481C1C}">
+                <a14:useLocalDpi xmlns:a14="http://schemas.microsoft.com/office/drawing/2010/main"/>
+              </a:ext>
+            </a:extLst>
+          </a:blip>
+          <a:srcRect l="2189" r="9642" b="1"/>
+          <a:stretch/>
+        </p:blipFill>
+        <p:spPr>
+          <a:xfrm>
+            <a:off x="446534" y="723899"/>
+            <a:ext cx="7498616" cy="5676901"/>
+          </a:xfrm>
+          <a:prstGeom prst="rect">
+            <a:avLst/>
+          </a:prstGeom>
+        </p:spPr>
+      </p:pic>
+      <p:sp>
+        <p:nvSpPr>
+          <p:cNvPr id="12" name="Rechteck 11">
+            <a:extLst>
+              <a:ext uri="{FF2B5EF4-FFF2-40B4-BE49-F238E27FC236}">
+                <a16:creationId xmlns:a16="http://schemas.microsoft.com/office/drawing/2014/main" id="{7C00E1DA-EC7C-40FC-95E3-11FDCD2E4291}"/>
+              </a:ext>
+              <a:ext uri="{C183D7F6-B498-43B3-948B-1728B52AA6E4}">
+                <adec:decorative xmlns:adec="http://schemas.microsoft.com/office/drawing/2017/decorative" val="1"/>
+              </a:ext>
+            </a:extLst>
+          </p:cNvPr>
+          <p:cNvSpPr>
+            <a:spLocks noGrp="1" noRot="1" noChangeAspect="1" noMove="1" noResize="1" noEditPoints="1" noAdjustHandles="1" noChangeArrowheads="1" noChangeShapeType="1" noTextEdit="1"/>
+          </p:cNvSpPr>
+          <p:nvPr>
+            <p:extLst>
+              <p:ext uri="{386F3935-93C4-4BCD-93E2-E3B085C9AB24}">
+                <p16:designElem xmlns:p16="http://schemas.microsoft.com/office/powerpoint/2015/main" val="1"/>
+              </p:ext>
+            </p:extLst>
+          </p:nvPr>
+        </p:nvSpPr>
+        <p:spPr>
+          <a:xfrm>
+            <a:off x="8042147" y="723899"/>
+            <a:ext cx="3703320" cy="5666666"/>
+          </a:xfrm>
+          <a:prstGeom prst="rect">
+            <a:avLst/>
+          </a:prstGeom>
+          <a:solidFill>
+            <a:schemeClr val="accent1"/>
+          </a:solidFill>
+          <a:ln>
+            <a:noFill/>
+          </a:ln>
+          <a:effectLst/>
+        </p:spPr>
+        <p:style>
+          <a:lnRef idx="1">
+            <a:schemeClr val="accent1"/>
+          </a:lnRef>
+          <a:fillRef idx="3">
+            <a:schemeClr val="accent1"/>
+          </a:fillRef>
+          <a:effectRef idx="2">
+            <a:schemeClr val="accent1"/>
+          </a:effectRef>
+          <a:fontRef idx="minor">
+            <a:schemeClr val="lt1"/>
+          </a:fontRef>
+        </p:style>
+        <p:txBody>
+          <a:bodyPr/>
+          <a:lstStyle/>
+          <a:p>
+            <a:endParaRPr lang="de-AT"/>
+          </a:p>
+        </p:txBody>
+      </p:sp>
+      <p:sp>
+        <p:nvSpPr>
+          <p:cNvPr id="2" name="Titel 1">
+            <a:extLst>
+              <a:ext uri="{FF2B5EF4-FFF2-40B4-BE49-F238E27FC236}">
+                <a16:creationId xmlns:a16="http://schemas.microsoft.com/office/drawing/2014/main" id="{0F87E73C-2B1A-4602-BFBE-CFE1E55D9B38}"/>
+              </a:ext>
+            </a:extLst>
+          </p:cNvPr>
+          <p:cNvSpPr>
+            <a:spLocks noGrp="1"/>
+          </p:cNvSpPr>
+          <p:nvPr>
+            <p:ph type="ctrTitle"/>
+          </p:nvPr>
+        </p:nvSpPr>
+        <p:spPr>
+          <a:xfrm>
+            <a:off x="8296275" y="1419226"/>
+            <a:ext cx="3081576" cy="1746762"/>
+          </a:xfrm>
+        </p:spPr>
+        <p:txBody>
+          <a:bodyPr rtlCol="0">
+            <a:normAutofit/>
+          </a:bodyPr>
+          <a:lstStyle/>
+          <a:p>
+            <a:pPr rtl="0"/>
+            <a:r>
+              <a:rPr lang="de-DE" dirty="0">
+                <a:solidFill>
+                  <a:srgbClr val="FFFFFF"/>
+                </a:solidFill>
+              </a:rPr>
+              <a:t>Demo</a:t>
+            </a:r>
+          </a:p>
+        </p:txBody>
+      </p:sp>
+      <p:grpSp>
+        <p:nvGrpSpPr>
+          <p:cNvPr id="14" name="Gruppe 13">
+            <a:extLst>
+              <a:ext uri="{FF2B5EF4-FFF2-40B4-BE49-F238E27FC236}">
+                <a16:creationId xmlns:a16="http://schemas.microsoft.com/office/drawing/2014/main" id="{9A421166-2996-41A7-B094-AE5316F347DD}"/>
+              </a:ext>
+              <a:ext uri="{C183D7F6-B498-43B3-948B-1728B52AA6E4}">
+                <adec:decorative xmlns:adec="http://schemas.microsoft.com/office/drawing/2017/decorative" val="1"/>
+              </a:ext>
+            </a:extLst>
+          </p:cNvPr>
+          <p:cNvGrpSpPr>
+            <a:grpSpLocks noGrp="1" noUngrp="1" noRot="1" noChangeAspect="1" noMove="1" noResize="1"/>
+          </p:cNvGrpSpPr>
+          <p:nvPr>
+            <p:extLst>
+              <p:ext uri="{386F3935-93C4-4BCD-93E2-E3B085C9AB24}">
+                <p16:designElem xmlns:p16="http://schemas.microsoft.com/office/powerpoint/2015/main" val="1"/>
+              </p:ext>
+            </p:extLst>
+          </p:nvPr>
+        </p:nvGrpSpPr>
+        <p:grpSpPr>
+          <a:xfrm>
+            <a:off x="446534" y="453643"/>
+            <a:ext cx="11298933" cy="98554"/>
+            <a:chOff x="446534" y="453643"/>
+            <a:chExt cx="11298933" cy="98554"/>
+          </a:xfrm>
+        </p:grpSpPr>
+        <p:sp>
+          <p:nvSpPr>
+            <p:cNvPr id="15" name="Rechteck 14">
+              <a:extLst>
+                <a:ext uri="{FF2B5EF4-FFF2-40B4-BE49-F238E27FC236}">
+                  <a16:creationId xmlns:a16="http://schemas.microsoft.com/office/drawing/2014/main" id="{FDBB1B92-A3EB-43E4-8FAB-D20E8ED14CEF}"/>
+                </a:ext>
+                <a:ext uri="{C183D7F6-B498-43B3-948B-1728B52AA6E4}">
+                  <adec:decorative xmlns:adec="http://schemas.microsoft.com/office/drawing/2017/decorative" val="1"/>
+                </a:ext>
+              </a:extLst>
+            </p:cNvPr>
+            <p:cNvSpPr/>
+            <p:nvPr>
+              <p:extLst>
+                <p:ext uri="{386F3935-93C4-4BCD-93E2-E3B085C9AB24}">
+                  <p16:designElem xmlns:p16="http://schemas.microsoft.com/office/powerpoint/2015/main" val="1"/>
+                </p:ext>
+              </p:extLst>
+            </p:nvPr>
+          </p:nvSpPr>
+          <p:spPr>
+            <a:xfrm>
+              <a:off x="446534" y="457200"/>
+              <a:ext cx="3703320" cy="94997"/>
+            </a:xfrm>
+            <a:prstGeom prst="rect">
+              <a:avLst/>
+            </a:prstGeom>
+            <a:solidFill>
+              <a:schemeClr val="accent1"/>
+            </a:solidFill>
+            <a:ln>
+              <a:noFill/>
+            </a:ln>
+            <a:effectLst/>
+          </p:spPr>
+          <p:style>
+            <a:lnRef idx="1">
+              <a:schemeClr val="accent1"/>
+            </a:lnRef>
+            <a:fillRef idx="3">
+              <a:schemeClr val="accent1"/>
+            </a:fillRef>
+            <a:effectRef idx="2">
+              <a:schemeClr val="accent1"/>
+            </a:effectRef>
+            <a:fontRef idx="minor">
+              <a:schemeClr val="lt1"/>
+            </a:fontRef>
+          </p:style>
+          <p:txBody>
+            <a:bodyPr/>
+            <a:lstStyle/>
+            <a:p>
+              <a:endParaRPr lang="de-AT"/>
+            </a:p>
+          </p:txBody>
+        </p:sp>
+        <p:sp>
+          <p:nvSpPr>
+            <p:cNvPr id="16" name="Rechteck 15">
+              <a:extLst>
+                <a:ext uri="{FF2B5EF4-FFF2-40B4-BE49-F238E27FC236}">
+                  <a16:creationId xmlns:a16="http://schemas.microsoft.com/office/drawing/2014/main" id="{3F3972F4-FE7E-48EA-AAD8-9BE5750A6672}"/>
+                </a:ext>
+                <a:ext uri="{C183D7F6-B498-43B3-948B-1728B52AA6E4}">
+                  <adec:decorative xmlns:adec="http://schemas.microsoft.com/office/drawing/2017/decorative" val="1"/>
+                </a:ext>
+              </a:extLst>
+            </p:cNvPr>
+            <p:cNvSpPr/>
+            <p:nvPr>
+              <p:extLst>
+                <p:ext uri="{386F3935-93C4-4BCD-93E2-E3B085C9AB24}">
+                  <p16:designElem xmlns:p16="http://schemas.microsoft.com/office/powerpoint/2015/main" val="1"/>
+                </p:ext>
+              </p:extLst>
+            </p:nvPr>
+          </p:nvSpPr>
+          <p:spPr>
+            <a:xfrm>
+              <a:off x="8042147" y="453643"/>
+              <a:ext cx="3703320" cy="98554"/>
+            </a:xfrm>
+            <a:prstGeom prst="rect">
+              <a:avLst/>
+            </a:prstGeom>
+            <a:solidFill>
+              <a:schemeClr val="accent4"/>
+            </a:solidFill>
+            <a:ln>
+              <a:noFill/>
+            </a:ln>
+            <a:effectLst/>
+          </p:spPr>
+          <p:style>
+            <a:lnRef idx="1">
+              <a:schemeClr val="accent1"/>
+            </a:lnRef>
+            <a:fillRef idx="3">
+              <a:schemeClr val="accent1"/>
+            </a:fillRef>
+            <a:effectRef idx="2">
+              <a:schemeClr val="accent1"/>
+            </a:effectRef>
+            <a:fontRef idx="minor">
+              <a:schemeClr val="lt1"/>
+            </a:fontRef>
+          </p:style>
+          <p:txBody>
+            <a:bodyPr/>
+            <a:lstStyle/>
+            <a:p>
+              <a:endParaRPr lang="de-AT"/>
+            </a:p>
+          </p:txBody>
+        </p:sp>
+        <p:sp>
+          <p:nvSpPr>
+            <p:cNvPr id="17" name="Rechteck 16">
+              <a:extLst>
+                <a:ext uri="{FF2B5EF4-FFF2-40B4-BE49-F238E27FC236}">
+                  <a16:creationId xmlns:a16="http://schemas.microsoft.com/office/drawing/2014/main" id="{221614E5-870B-4D5E-A43B-8FF7E5323484}"/>
+                </a:ext>
+                <a:ext uri="{C183D7F6-B498-43B3-948B-1728B52AA6E4}">
+                  <adec:decorative xmlns:adec="http://schemas.microsoft.com/office/drawing/2017/decorative" val="1"/>
+                </a:ext>
+              </a:extLst>
+            </p:cNvPr>
+            <p:cNvSpPr/>
+            <p:nvPr>
+              <p:extLst>
+                <p:ext uri="{386F3935-93C4-4BCD-93E2-E3B085C9AB24}">
+                  <p16:designElem xmlns:p16="http://schemas.microsoft.com/office/powerpoint/2015/main" val="1"/>
+                </p:ext>
+              </p:extLst>
+            </p:nvPr>
+          </p:nvSpPr>
+          <p:spPr>
+            <a:xfrm>
+              <a:off x="4241830" y="457200"/>
+              <a:ext cx="3703320" cy="91440"/>
+            </a:xfrm>
+            <a:prstGeom prst="rect">
+              <a:avLst/>
+            </a:prstGeom>
+            <a:solidFill>
+              <a:schemeClr val="accent2"/>
+            </a:solidFill>
+            <a:ln>
+              <a:noFill/>
+            </a:ln>
+            <a:effectLst/>
+          </p:spPr>
+          <p:style>
+            <a:lnRef idx="1">
+              <a:schemeClr val="accent1"/>
+            </a:lnRef>
+            <a:fillRef idx="3">
+              <a:schemeClr val="accent1"/>
+            </a:fillRef>
+            <a:effectRef idx="2">
+              <a:schemeClr val="accent1"/>
+            </a:effectRef>
+            <a:fontRef idx="minor">
+              <a:schemeClr val="lt1"/>
+            </a:fontRef>
+          </p:style>
+          <p:txBody>
+            <a:bodyPr/>
+            <a:lstStyle/>
+            <a:p>
+              <a:endParaRPr lang="de-AT"/>
+            </a:p>
+          </p:txBody>
+        </p:sp>
+      </p:grpSp>
+      <p:sp>
+        <p:nvSpPr>
+          <p:cNvPr id="6" name="Untertitel 5">
+            <a:extLst>
+              <a:ext uri="{FF2B5EF4-FFF2-40B4-BE49-F238E27FC236}">
+                <a16:creationId xmlns:a16="http://schemas.microsoft.com/office/drawing/2014/main" id="{08B07814-13F0-3D3F-89D0-F93230014320}"/>
+              </a:ext>
+            </a:extLst>
+          </p:cNvPr>
+          <p:cNvSpPr>
+            <a:spLocks noGrp="1"/>
+          </p:cNvSpPr>
+          <p:nvPr>
+            <p:ph type="subTitle" idx="1"/>
+          </p:nvPr>
+        </p:nvSpPr>
+        <p:spPr/>
+        <p:txBody>
+          <a:bodyPr/>
+          <a:lstStyle/>
+          <a:p>
+            <a:endParaRPr lang="de-AT"/>
+          </a:p>
+        </p:txBody>
+      </p:sp>
+    </p:spTree>
+    <p:extLst>
+      <p:ext uri="{BB962C8B-B14F-4D97-AF65-F5344CB8AC3E}">
+        <p14:creationId xmlns:p14="http://schemas.microsoft.com/office/powerpoint/2010/main" val="3501347425"/>
+      </p:ext>
+    </p:extLst>
+  </p:cSld>
+  <p:clrMapOvr>
+    <a:masterClrMapping/>
+  </p:clrMapOvr>
+</p:sld>
+</file>
+
+<file path=ppt/slides/slide11.xml><?xml version="1.0" encoding="utf-8"?>
+<p:sld xmlns:a="http://schemas.openxmlformats.org/drawingml/2006/main" xmlns:r="http://schemas.openxmlformats.org/officeDocument/2006/relationships" xmlns:p="http://schemas.openxmlformats.org/presentationml/2006/main">
+  <p:cSld>
+    <p:bg>
+      <p:bgPr>
+        <a:solidFill>
+          <a:schemeClr val="bg1"/>
+        </a:solidFill>
+        <a:effectLst/>
+      </p:bgPr>
+    </p:bg>
+    <p:spTree>
+      <p:nvGrpSpPr>
+        <p:cNvPr id="1" name="">
+          <a:extLst>
+            <a:ext uri="{FF2B5EF4-FFF2-40B4-BE49-F238E27FC236}">
+              <a16:creationId xmlns:a16="http://schemas.microsoft.com/office/drawing/2014/main" id="{03D61C0A-EA71-2EE4-9B19-22FD61B6D341}"/>
+            </a:ext>
+          </a:extLst>
+        </p:cNvPr>
+        <p:cNvGrpSpPr/>
+        <p:nvPr/>
+      </p:nvGrpSpPr>
+      <p:grpSpPr>
+        <a:xfrm>
+          <a:off x="0" y="0"/>
+          <a:ext cx="0" cy="0"/>
+          <a:chOff x="0" y="0"/>
+          <a:chExt cx="0" cy="0"/>
+        </a:xfrm>
+      </p:grpSpPr>
+      <p:sp>
+        <p:nvSpPr>
+          <p:cNvPr id="2" name="Titel 1">
+            <a:extLst>
+              <a:ext uri="{FF2B5EF4-FFF2-40B4-BE49-F238E27FC236}">
+                <a16:creationId xmlns:a16="http://schemas.microsoft.com/office/drawing/2014/main" id="{77F35C1F-972A-C941-35DE-AF62475894C6}"/>
+              </a:ext>
+            </a:extLst>
+          </p:cNvPr>
+          <p:cNvSpPr>
+            <a:spLocks noGrp="1"/>
+          </p:cNvSpPr>
+          <p:nvPr>
+            <p:ph type="title"/>
+          </p:nvPr>
+        </p:nvSpPr>
+        <p:spPr/>
+        <p:txBody>
+          <a:bodyPr rtlCol="0"/>
+          <a:lstStyle/>
+          <a:p>
+            <a:pPr rtl="0"/>
+            <a:r>
+              <a:rPr lang="de-DE" dirty="0"/>
+              <a:t>Interpretation der Ergebnisse</a:t>
+            </a:r>
+          </a:p>
+        </p:txBody>
+      </p:sp>
+      <p:sp>
+        <p:nvSpPr>
+          <p:cNvPr id="6" name="Inhaltsplatzhalter 5">
+            <a:extLst>
+              <a:ext uri="{FF2B5EF4-FFF2-40B4-BE49-F238E27FC236}">
+                <a16:creationId xmlns:a16="http://schemas.microsoft.com/office/drawing/2014/main" id="{AEBB9406-CC1C-8F1C-DA12-7C6E38358CBB}"/>
+              </a:ext>
+            </a:extLst>
+          </p:cNvPr>
+          <p:cNvSpPr>
+            <a:spLocks noGrp="1"/>
+          </p:cNvSpPr>
+          <p:nvPr>
+            <p:ph sz="half" idx="2"/>
+          </p:nvPr>
+        </p:nvSpPr>
+        <p:spPr>
+          <a:xfrm>
+            <a:off x="581193" y="2228003"/>
+            <a:ext cx="11029616" cy="3633047"/>
+          </a:xfrm>
+        </p:spPr>
+        <p:txBody>
+          <a:bodyPr/>
+          <a:lstStyle/>
+          <a:p>
+            <a:r>
+              <a:rPr lang="de-AT" dirty="0" err="1"/>
+              <a:t>test</a:t>
+            </a:r>
+            <a:endParaRPr lang="de-AT" dirty="0"/>
+          </a:p>
+        </p:txBody>
+      </p:sp>
+    </p:spTree>
+    <p:extLst>
+      <p:ext uri="{BB962C8B-B14F-4D97-AF65-F5344CB8AC3E}">
+        <p14:creationId xmlns:p14="http://schemas.microsoft.com/office/powerpoint/2010/main" val="1747102689"/>
+      </p:ext>
+    </p:extLst>
+  </p:cSld>
+  <p:clrMapOvr>
+    <a:masterClrMapping/>
+  </p:clrMapOvr>
+</p:sld>
+</file>
+
 <file path=ppt/slides/slide2.xml><?xml version="1.0" encoding="utf-8"?>
 <p:sld xmlns:a="http://schemas.openxmlformats.org/drawingml/2006/main" xmlns:r="http://schemas.openxmlformats.org/officeDocument/2006/relationships" xmlns:p="http://schemas.openxmlformats.org/presentationml/2006/main">
   <p:cSld>
@@ -10994,7 +11993,13 @@
     </p:bg>
     <p:spTree>
       <p:nvGrpSpPr>
-        <p:cNvPr id="1" name=""/>
+        <p:cNvPr id="1" name="">
+          <a:extLst>
+            <a:ext uri="{FF2B5EF4-FFF2-40B4-BE49-F238E27FC236}">
+              <a16:creationId xmlns:a16="http://schemas.microsoft.com/office/drawing/2014/main" id="{39C6224C-8A6A-3C4A-DFF0-5B19FBF435A2}"/>
+            </a:ext>
+          </a:extLst>
+        </p:cNvPr>
         <p:cNvGrpSpPr/>
         <p:nvPr/>
       </p:nvGrpSpPr>
@@ -11006,9 +12011,253 @@
           <a:chExt cx="0" cy="0"/>
         </a:xfrm>
       </p:grpSpPr>
+      <p:sp>
+        <p:nvSpPr>
+          <p:cNvPr id="12" name="Rectangle 11">
+            <a:extLst>
+              <a:ext uri="{FF2B5EF4-FFF2-40B4-BE49-F238E27FC236}">
+                <a16:creationId xmlns:a16="http://schemas.microsoft.com/office/drawing/2014/main" id="{A078A52F-85EA-4C0B-962B-D9D9DD4DD78C}"/>
+              </a:ext>
+              <a:ext uri="{C183D7F6-B498-43B3-948B-1728B52AA6E4}">
+                <adec:decorative xmlns:adec="http://schemas.microsoft.com/office/drawing/2017/decorative" val="1"/>
+              </a:ext>
+            </a:extLst>
+          </p:cNvPr>
+          <p:cNvSpPr>
+            <a:spLocks noGrp="1" noRot="1" noChangeAspect="1" noMove="1" noResize="1" noEditPoints="1" noAdjustHandles="1" noChangeArrowheads="1" noChangeShapeType="1" noTextEdit="1"/>
+          </p:cNvSpPr>
+          <p:nvPr>
+            <p:extLst>
+              <p:ext uri="{386F3935-93C4-4BCD-93E2-E3B085C9AB24}">
+                <p16:designElem xmlns:p16="http://schemas.microsoft.com/office/powerpoint/2015/main" val="1"/>
+              </p:ext>
+            </p:extLst>
+          </p:nvPr>
+        </p:nvSpPr>
+        <p:spPr>
+          <a:xfrm>
+            <a:off x="446534" y="457200"/>
+            <a:ext cx="3703320" cy="94997"/>
+          </a:xfrm>
+          <a:prstGeom prst="rect">
+            <a:avLst/>
+          </a:prstGeom>
+          <a:solidFill>
+            <a:schemeClr val="accent1"/>
+          </a:solidFill>
+          <a:ln>
+            <a:noFill/>
+          </a:ln>
+          <a:effectLst/>
+        </p:spPr>
+        <p:style>
+          <a:lnRef idx="1">
+            <a:schemeClr val="accent1"/>
+          </a:lnRef>
+          <a:fillRef idx="3">
+            <a:schemeClr val="accent1"/>
+          </a:fillRef>
+          <a:effectRef idx="2">
+            <a:schemeClr val="accent1"/>
+          </a:effectRef>
+          <a:fontRef idx="minor">
+            <a:schemeClr val="lt1"/>
+          </a:fontRef>
+        </p:style>
+        <p:txBody>
+          <a:bodyPr/>
+          <a:lstStyle/>
+          <a:p>
+            <a:endParaRPr lang="de-AT"/>
+          </a:p>
+        </p:txBody>
+      </p:sp>
+      <p:sp>
+        <p:nvSpPr>
+          <p:cNvPr id="14" name="Rectangle 13">
+            <a:extLst>
+              <a:ext uri="{FF2B5EF4-FFF2-40B4-BE49-F238E27FC236}">
+                <a16:creationId xmlns:a16="http://schemas.microsoft.com/office/drawing/2014/main" id="{919797D5-5700-4683-B30A-5B4D56CB8270}"/>
+              </a:ext>
+              <a:ext uri="{C183D7F6-B498-43B3-948B-1728B52AA6E4}">
+                <adec:decorative xmlns:adec="http://schemas.microsoft.com/office/drawing/2017/decorative" val="1"/>
+              </a:ext>
+            </a:extLst>
+          </p:cNvPr>
+          <p:cNvSpPr>
+            <a:spLocks noGrp="1" noRot="1" noChangeAspect="1" noMove="1" noResize="1" noEditPoints="1" noAdjustHandles="1" noChangeArrowheads="1" noChangeShapeType="1" noTextEdit="1"/>
+          </p:cNvSpPr>
+          <p:nvPr>
+            <p:extLst>
+              <p:ext uri="{386F3935-93C4-4BCD-93E2-E3B085C9AB24}">
+                <p16:designElem xmlns:p16="http://schemas.microsoft.com/office/powerpoint/2015/main" val="1"/>
+              </p:ext>
+            </p:extLst>
+          </p:nvPr>
+        </p:nvSpPr>
+        <p:spPr>
+          <a:xfrm>
+            <a:off x="8042147" y="453643"/>
+            <a:ext cx="3703320" cy="98554"/>
+          </a:xfrm>
+          <a:prstGeom prst="rect">
+            <a:avLst/>
+          </a:prstGeom>
+          <a:solidFill>
+            <a:schemeClr val="accent4"/>
+          </a:solidFill>
+          <a:ln>
+            <a:noFill/>
+          </a:ln>
+          <a:effectLst/>
+        </p:spPr>
+        <p:style>
+          <a:lnRef idx="1">
+            <a:schemeClr val="accent1"/>
+          </a:lnRef>
+          <a:fillRef idx="3">
+            <a:schemeClr val="accent1"/>
+          </a:fillRef>
+          <a:effectRef idx="2">
+            <a:schemeClr val="accent1"/>
+          </a:effectRef>
+          <a:fontRef idx="minor">
+            <a:schemeClr val="lt1"/>
+          </a:fontRef>
+        </p:style>
+        <p:txBody>
+          <a:bodyPr/>
+          <a:lstStyle/>
+          <a:p>
+            <a:endParaRPr lang="de-AT"/>
+          </a:p>
+        </p:txBody>
+      </p:sp>
+      <p:sp>
+        <p:nvSpPr>
+          <p:cNvPr id="16" name="Rectangle 15">
+            <a:extLst>
+              <a:ext uri="{FF2B5EF4-FFF2-40B4-BE49-F238E27FC236}">
+                <a16:creationId xmlns:a16="http://schemas.microsoft.com/office/drawing/2014/main" id="{4856A7B9-9801-42EC-A4C9-7E22A56EF53D}"/>
+              </a:ext>
+              <a:ext uri="{C183D7F6-B498-43B3-948B-1728B52AA6E4}">
+                <adec:decorative xmlns:adec="http://schemas.microsoft.com/office/drawing/2017/decorative" val="1"/>
+              </a:ext>
+            </a:extLst>
+          </p:cNvPr>
+          <p:cNvSpPr>
+            <a:spLocks noGrp="1" noRot="1" noChangeAspect="1" noMove="1" noResize="1" noEditPoints="1" noAdjustHandles="1" noChangeArrowheads="1" noChangeShapeType="1" noTextEdit="1"/>
+          </p:cNvSpPr>
+          <p:nvPr>
+            <p:extLst>
+              <p:ext uri="{386F3935-93C4-4BCD-93E2-E3B085C9AB24}">
+                <p16:designElem xmlns:p16="http://schemas.microsoft.com/office/powerpoint/2015/main" val="1"/>
+              </p:ext>
+            </p:extLst>
+          </p:nvPr>
+        </p:nvSpPr>
+        <p:spPr>
+          <a:xfrm>
+            <a:off x="4241830" y="457200"/>
+            <a:ext cx="3703320" cy="91440"/>
+          </a:xfrm>
+          <a:prstGeom prst="rect">
+            <a:avLst/>
+          </a:prstGeom>
+          <a:solidFill>
+            <a:schemeClr val="accent2"/>
+          </a:solidFill>
+          <a:ln>
+            <a:noFill/>
+          </a:ln>
+          <a:effectLst/>
+        </p:spPr>
+        <p:style>
+          <a:lnRef idx="1">
+            <a:schemeClr val="accent1"/>
+          </a:lnRef>
+          <a:fillRef idx="3">
+            <a:schemeClr val="accent1"/>
+          </a:fillRef>
+          <a:effectRef idx="2">
+            <a:schemeClr val="accent1"/>
+          </a:effectRef>
+          <a:fontRef idx="minor">
+            <a:schemeClr val="lt1"/>
+          </a:fontRef>
+        </p:style>
+        <p:txBody>
+          <a:bodyPr/>
+          <a:lstStyle/>
+          <a:p>
+            <a:endParaRPr lang="de-AT"/>
+          </a:p>
+        </p:txBody>
+      </p:sp>
+      <p:sp>
+        <p:nvSpPr>
+          <p:cNvPr id="18" name="Rectangle 17">
+            <a:extLst>
+              <a:ext uri="{FF2B5EF4-FFF2-40B4-BE49-F238E27FC236}">
+                <a16:creationId xmlns:a16="http://schemas.microsoft.com/office/drawing/2014/main" id="{8AD54DB8-C150-4290-85D6-F5B0262BFEEF}"/>
+              </a:ext>
+              <a:ext uri="{C183D7F6-B498-43B3-948B-1728B52AA6E4}">
+                <adec:decorative xmlns:adec="http://schemas.microsoft.com/office/drawing/2017/decorative" val="1"/>
+              </a:ext>
+            </a:extLst>
+          </p:cNvPr>
+          <p:cNvSpPr>
+            <a:spLocks noGrp="1" noRot="1" noChangeAspect="1" noMove="1" noResize="1" noEditPoints="1" noAdjustHandles="1" noChangeArrowheads="1" noChangeShapeType="1" noTextEdit="1"/>
+          </p:cNvSpPr>
+          <p:nvPr>
+            <p:extLst>
+              <p:ext uri="{386F3935-93C4-4BCD-93E2-E3B085C9AB24}">
+                <p16:designElem xmlns:p16="http://schemas.microsoft.com/office/powerpoint/2015/main" val="1"/>
+              </p:ext>
+            </p:extLst>
+          </p:nvPr>
+        </p:nvSpPr>
+        <p:spPr>
+          <a:xfrm>
+            <a:off x="446534" y="3085765"/>
+            <a:ext cx="11262866" cy="3304800"/>
+          </a:xfrm>
+          <a:prstGeom prst="rect">
+            <a:avLst/>
+          </a:prstGeom>
+          <a:solidFill>
+            <a:schemeClr val="accent1"/>
+          </a:solidFill>
+          <a:ln>
+            <a:noFill/>
+          </a:ln>
+          <a:effectLst/>
+        </p:spPr>
+        <p:style>
+          <a:lnRef idx="1">
+            <a:schemeClr val="accent1"/>
+          </a:lnRef>
+          <a:fillRef idx="3">
+            <a:schemeClr val="accent1"/>
+          </a:fillRef>
+          <a:effectRef idx="2">
+            <a:schemeClr val="accent1"/>
+          </a:effectRef>
+          <a:fontRef idx="minor">
+            <a:schemeClr val="lt1"/>
+          </a:fontRef>
+        </p:style>
+        <p:txBody>
+          <a:bodyPr/>
+          <a:lstStyle/>
+          <a:p>
+            <a:endParaRPr lang="de-AT"/>
+          </a:p>
+        </p:txBody>
+      </p:sp>
       <p:sp useBgFill="1">
         <p:nvSpPr>
-          <p:cNvPr id="10" name="Rechteck 9">
+          <p:cNvPr id="20" name="Rectangle 19">
             <a:extLst>
               <a:ext uri="{FF2B5EF4-FFF2-40B4-BE49-F238E27FC236}">
                 <a16:creationId xmlns:a16="http://schemas.microsoft.com/office/drawing/2014/main" id="{379F11E2-8BA5-4C5C-AE7C-361E5EA011FF}"/>
@@ -11061,35 +12310,33 @@
           <a:bodyPr rtlCol="0" anchor="ctr"/>
           <a:lstStyle/>
           <a:p>
-            <a:pPr algn="ctr" rtl="0"/>
-            <a:endParaRPr lang="de-DE"/>
+            <a:pPr algn="ctr"/>
+            <a:endParaRPr lang="en-US"/>
           </a:p>
         </p:txBody>
       </p:sp>
       <p:pic>
         <p:nvPicPr>
-          <p:cNvPr id="5" name="Bild 4" descr="Digitale Zahlen">
+          <p:cNvPr id="7" name="Inhaltsplatzhalter 6">
             <a:extLst>
               <a:ext uri="{FF2B5EF4-FFF2-40B4-BE49-F238E27FC236}">
-                <a16:creationId xmlns:a16="http://schemas.microsoft.com/office/drawing/2014/main" id="{A21EA617-6D48-425F-97A8-7FEC82C8F401}"/>
+                <a16:creationId xmlns:a16="http://schemas.microsoft.com/office/drawing/2014/main" id="{2C21C568-C9B8-4D3B-E123-497C2DB3DB86}"/>
               </a:ext>
             </a:extLst>
           </p:cNvPr>
           <p:cNvPicPr>
-            <a:picLocks noChangeAspect="1"/>
+            <a:picLocks noGrp="1" noChangeAspect="1"/>
           </p:cNvPicPr>
-          <p:nvPr/>
+          <p:nvPr>
+            <p:ph sz="half" idx="2"/>
+          </p:nvPr>
         </p:nvPicPr>
-        <p:blipFill rotWithShape="1">
-          <a:blip r:embed="rId3" cstate="screen">
-            <a:extLst>
-              <a:ext uri="{28A0092B-C50C-407E-A947-70E740481C1C}">
-                <a14:useLocalDpi xmlns:a14="http://schemas.microsoft.com/office/drawing/2010/main"/>
-              </a:ext>
-            </a:extLst>
-          </a:blip>
-          <a:srcRect l="2189" r="9642" b="1"/>
-          <a:stretch/>
+        <p:blipFill>
+          <a:blip r:embed="rId3"/>
+          <a:srcRect r="3903" b="-1"/>
+          <a:stretch>
+            <a:fillRect/>
+          </a:stretch>
         </p:blipFill>
         <p:spPr>
           <a:xfrm>
@@ -11103,7 +12350,7 @@
       </p:pic>
       <p:sp>
         <p:nvSpPr>
-          <p:cNvPr id="12" name="Rechteck 11">
+          <p:cNvPr id="22" name="Rectangle 21">
             <a:extLst>
               <a:ext uri="{FF2B5EF4-FFF2-40B4-BE49-F238E27FC236}">
                 <a16:creationId xmlns:a16="http://schemas.microsoft.com/office/drawing/2014/main" id="{7C00E1DA-EC7C-40FC-95E3-11FDCD2E4291}"/>
@@ -11167,7 +12414,7 @@
           <p:cNvPr id="2" name="Titel 1">
             <a:extLst>
               <a:ext uri="{FF2B5EF4-FFF2-40B4-BE49-F238E27FC236}">
-                <a16:creationId xmlns:a16="http://schemas.microsoft.com/office/drawing/2014/main" id="{0F87E73C-2B1A-4602-BFBE-CFE1E55D9B38}"/>
+                <a16:creationId xmlns:a16="http://schemas.microsoft.com/office/drawing/2014/main" id="{0A36710B-EE68-FFF0-09F8-08322FE3CD3C}"/>
               </a:ext>
             </a:extLst>
           </p:cNvPr>
@@ -11175,36 +12422,35 @@
             <a:spLocks noGrp="1"/>
           </p:cNvSpPr>
           <p:nvPr>
-            <p:ph type="ctrTitle"/>
+            <p:ph type="title"/>
           </p:nvPr>
         </p:nvSpPr>
         <p:spPr>
           <a:xfrm>
-            <a:off x="8296275" y="1419226"/>
-            <a:ext cx="3081576" cy="1746762"/>
+            <a:off x="8296275" y="1419225"/>
+            <a:ext cx="3081576" cy="2085869"/>
           </a:xfrm>
         </p:spPr>
         <p:txBody>
-          <a:bodyPr rtlCol="0">
+          <a:bodyPr vert="horz" lIns="91440" tIns="45720" rIns="91440" bIns="45720" rtlCol="0" anchor="b">
             <a:normAutofit/>
           </a:bodyPr>
           <a:lstStyle/>
           <a:p>
-            <a:pPr rtl="0"/>
             <a:r>
-              <a:rPr lang="de-DE" dirty="0">
+              <a:rPr lang="en-US" sz="3600">
                 <a:solidFill>
                   <a:srgbClr val="FFFFFF"/>
                 </a:solidFill>
               </a:rPr>
-              <a:t>Demo</a:t>
+              <a:t>Q_i</a:t>
             </a:r>
           </a:p>
         </p:txBody>
       </p:sp>
       <p:grpSp>
         <p:nvGrpSpPr>
-          <p:cNvPr id="14" name="Gruppe 13">
+          <p:cNvPr id="24" name="Group 23">
             <a:extLst>
               <a:ext uri="{FF2B5EF4-FFF2-40B4-BE49-F238E27FC236}">
                 <a16:creationId xmlns:a16="http://schemas.microsoft.com/office/drawing/2014/main" id="{9A421166-2996-41A7-B094-AE5316F347DD}"/>
@@ -11235,7 +12481,7 @@
         </p:grpSpPr>
         <p:sp>
           <p:nvSpPr>
-            <p:cNvPr id="15" name="Rechteck 14">
+            <p:cNvPr id="25" name="Rectangle 24">
               <a:extLst>
                 <a:ext uri="{FF2B5EF4-FFF2-40B4-BE49-F238E27FC236}">
                   <a16:creationId xmlns:a16="http://schemas.microsoft.com/office/drawing/2014/main" id="{FDBB1B92-A3EB-43E4-8FAB-D20E8ED14CEF}"/>
@@ -11294,7 +12540,7 @@
         </p:sp>
         <p:sp>
           <p:nvSpPr>
-            <p:cNvPr id="16" name="Rechteck 15">
+            <p:cNvPr id="26" name="Rectangle 25">
               <a:extLst>
                 <a:ext uri="{FF2B5EF4-FFF2-40B4-BE49-F238E27FC236}">
                   <a16:creationId xmlns:a16="http://schemas.microsoft.com/office/drawing/2014/main" id="{3F3972F4-FE7E-48EA-AAD8-9BE5750A6672}"/>
@@ -11353,7 +12599,7 @@
         </p:sp>
         <p:sp>
           <p:nvSpPr>
-            <p:cNvPr id="17" name="Rechteck 16">
+            <p:cNvPr id="27" name="Rectangle 26">
               <a:extLst>
                 <a:ext uri="{FF2B5EF4-FFF2-40B4-BE49-F238E27FC236}">
                   <a16:creationId xmlns:a16="http://schemas.microsoft.com/office/drawing/2014/main" id="{221614E5-870B-4D5E-A43B-8FF7E5323484}"/>
@@ -11411,35 +12657,10 @@
           </p:txBody>
         </p:sp>
       </p:grpSp>
-      <p:sp>
-        <p:nvSpPr>
-          <p:cNvPr id="6" name="Untertitel 5">
-            <a:extLst>
-              <a:ext uri="{FF2B5EF4-FFF2-40B4-BE49-F238E27FC236}">
-                <a16:creationId xmlns:a16="http://schemas.microsoft.com/office/drawing/2014/main" id="{08B07814-13F0-3D3F-89D0-F93230014320}"/>
-              </a:ext>
-            </a:extLst>
-          </p:cNvPr>
-          <p:cNvSpPr>
-            <a:spLocks noGrp="1"/>
-          </p:cNvSpPr>
-          <p:nvPr>
-            <p:ph type="subTitle" idx="1"/>
-          </p:nvPr>
-        </p:nvSpPr>
-        <p:spPr/>
-        <p:txBody>
-          <a:bodyPr/>
-          <a:lstStyle/>
-          <a:p>
-            <a:endParaRPr lang="de-AT"/>
-          </a:p>
-        </p:txBody>
-      </p:sp>
     </p:spTree>
     <p:extLst>
       <p:ext uri="{BB962C8B-B14F-4D97-AF65-F5344CB8AC3E}">
-        <p14:creationId xmlns:p14="http://schemas.microsoft.com/office/powerpoint/2010/main" val="3501347425"/>
+        <p14:creationId xmlns:p14="http://schemas.microsoft.com/office/powerpoint/2010/main" val="567447768"/>
       </p:ext>
     </p:extLst>
   </p:cSld>
@@ -11465,7 +12686,7 @@
         <p:cNvPr id="1" name="">
           <a:extLst>
             <a:ext uri="{FF2B5EF4-FFF2-40B4-BE49-F238E27FC236}">
-              <a16:creationId xmlns:a16="http://schemas.microsoft.com/office/drawing/2014/main" id="{03D61C0A-EA71-2EE4-9B19-22FD61B6D341}"/>
+              <a16:creationId xmlns:a16="http://schemas.microsoft.com/office/drawing/2014/main" id="{A3D700A5-B629-3493-6A88-9674D77C202C}"/>
             </a:ext>
           </a:extLst>
         </p:cNvPr>
@@ -11482,10 +12703,371 @@
       </p:grpSpPr>
       <p:sp>
         <p:nvSpPr>
+          <p:cNvPr id="32" name="Rectangle 31">
+            <a:extLst>
+              <a:ext uri="{FF2B5EF4-FFF2-40B4-BE49-F238E27FC236}">
+                <a16:creationId xmlns:a16="http://schemas.microsoft.com/office/drawing/2014/main" id="{A078A52F-85EA-4C0B-962B-D9D9DD4DD78C}"/>
+              </a:ext>
+              <a:ext uri="{C183D7F6-B498-43B3-948B-1728B52AA6E4}">
+                <adec:decorative xmlns:adec="http://schemas.microsoft.com/office/drawing/2017/decorative" val="1"/>
+              </a:ext>
+            </a:extLst>
+          </p:cNvPr>
+          <p:cNvSpPr>
+            <a:spLocks noGrp="1" noRot="1" noChangeAspect="1" noMove="1" noResize="1" noEditPoints="1" noAdjustHandles="1" noChangeArrowheads="1" noChangeShapeType="1" noTextEdit="1"/>
+          </p:cNvSpPr>
+          <p:nvPr>
+            <p:extLst>
+              <p:ext uri="{386F3935-93C4-4BCD-93E2-E3B085C9AB24}">
+                <p16:designElem xmlns:p16="http://schemas.microsoft.com/office/powerpoint/2015/main" val="1"/>
+              </p:ext>
+            </p:extLst>
+          </p:nvPr>
+        </p:nvSpPr>
+        <p:spPr>
+          <a:xfrm>
+            <a:off x="446534" y="457200"/>
+            <a:ext cx="3703320" cy="94997"/>
+          </a:xfrm>
+          <a:prstGeom prst="rect">
+            <a:avLst/>
+          </a:prstGeom>
+          <a:solidFill>
+            <a:schemeClr val="accent1"/>
+          </a:solidFill>
+          <a:ln>
+            <a:noFill/>
+          </a:ln>
+          <a:effectLst/>
+        </p:spPr>
+        <p:style>
+          <a:lnRef idx="1">
+            <a:schemeClr val="accent1"/>
+          </a:lnRef>
+          <a:fillRef idx="3">
+            <a:schemeClr val="accent1"/>
+          </a:fillRef>
+          <a:effectRef idx="2">
+            <a:schemeClr val="accent1"/>
+          </a:effectRef>
+          <a:fontRef idx="minor">
+            <a:schemeClr val="lt1"/>
+          </a:fontRef>
+        </p:style>
+      </p:sp>
+      <p:sp>
+        <p:nvSpPr>
+          <p:cNvPr id="34" name="Rectangle 33">
+            <a:extLst>
+              <a:ext uri="{FF2B5EF4-FFF2-40B4-BE49-F238E27FC236}">
+                <a16:creationId xmlns:a16="http://schemas.microsoft.com/office/drawing/2014/main" id="{919797D5-5700-4683-B30A-5B4D56CB8270}"/>
+              </a:ext>
+              <a:ext uri="{C183D7F6-B498-43B3-948B-1728B52AA6E4}">
+                <adec:decorative xmlns:adec="http://schemas.microsoft.com/office/drawing/2017/decorative" val="1"/>
+              </a:ext>
+            </a:extLst>
+          </p:cNvPr>
+          <p:cNvSpPr>
+            <a:spLocks noGrp="1" noRot="1" noChangeAspect="1" noMove="1" noResize="1" noEditPoints="1" noAdjustHandles="1" noChangeArrowheads="1" noChangeShapeType="1" noTextEdit="1"/>
+          </p:cNvSpPr>
+          <p:nvPr>
+            <p:extLst>
+              <p:ext uri="{386F3935-93C4-4BCD-93E2-E3B085C9AB24}">
+                <p16:designElem xmlns:p16="http://schemas.microsoft.com/office/powerpoint/2015/main" val="1"/>
+              </p:ext>
+            </p:extLst>
+          </p:nvPr>
+        </p:nvSpPr>
+        <p:spPr>
+          <a:xfrm>
+            <a:off x="8042147" y="453643"/>
+            <a:ext cx="3703320" cy="98554"/>
+          </a:xfrm>
+          <a:prstGeom prst="rect">
+            <a:avLst/>
+          </a:prstGeom>
+          <a:solidFill>
+            <a:schemeClr val="accent4"/>
+          </a:solidFill>
+          <a:ln>
+            <a:noFill/>
+          </a:ln>
+          <a:effectLst/>
+        </p:spPr>
+        <p:style>
+          <a:lnRef idx="1">
+            <a:schemeClr val="accent1"/>
+          </a:lnRef>
+          <a:fillRef idx="3">
+            <a:schemeClr val="accent1"/>
+          </a:fillRef>
+          <a:effectRef idx="2">
+            <a:schemeClr val="accent1"/>
+          </a:effectRef>
+          <a:fontRef idx="minor">
+            <a:schemeClr val="lt1"/>
+          </a:fontRef>
+        </p:style>
+      </p:sp>
+      <p:sp>
+        <p:nvSpPr>
+          <p:cNvPr id="36" name="Rectangle 35">
+            <a:extLst>
+              <a:ext uri="{FF2B5EF4-FFF2-40B4-BE49-F238E27FC236}">
+                <a16:creationId xmlns:a16="http://schemas.microsoft.com/office/drawing/2014/main" id="{4856A7B9-9801-42EC-A4C9-7E22A56EF53D}"/>
+              </a:ext>
+              <a:ext uri="{C183D7F6-B498-43B3-948B-1728B52AA6E4}">
+                <adec:decorative xmlns:adec="http://schemas.microsoft.com/office/drawing/2017/decorative" val="1"/>
+              </a:ext>
+            </a:extLst>
+          </p:cNvPr>
+          <p:cNvSpPr>
+            <a:spLocks noGrp="1" noRot="1" noChangeAspect="1" noMove="1" noResize="1" noEditPoints="1" noAdjustHandles="1" noChangeArrowheads="1" noChangeShapeType="1" noTextEdit="1"/>
+          </p:cNvSpPr>
+          <p:nvPr>
+            <p:extLst>
+              <p:ext uri="{386F3935-93C4-4BCD-93E2-E3B085C9AB24}">
+                <p16:designElem xmlns:p16="http://schemas.microsoft.com/office/powerpoint/2015/main" val="1"/>
+              </p:ext>
+            </p:extLst>
+          </p:nvPr>
+        </p:nvSpPr>
+        <p:spPr>
+          <a:xfrm>
+            <a:off x="4241830" y="457200"/>
+            <a:ext cx="3703320" cy="91440"/>
+          </a:xfrm>
+          <a:prstGeom prst="rect">
+            <a:avLst/>
+          </a:prstGeom>
+          <a:solidFill>
+            <a:schemeClr val="accent2"/>
+          </a:solidFill>
+          <a:ln>
+            <a:noFill/>
+          </a:ln>
+          <a:effectLst/>
+        </p:spPr>
+        <p:style>
+          <a:lnRef idx="1">
+            <a:schemeClr val="accent1"/>
+          </a:lnRef>
+          <a:fillRef idx="3">
+            <a:schemeClr val="accent1"/>
+          </a:fillRef>
+          <a:effectRef idx="2">
+            <a:schemeClr val="accent1"/>
+          </a:effectRef>
+          <a:fontRef idx="minor">
+            <a:schemeClr val="lt1"/>
+          </a:fontRef>
+        </p:style>
+      </p:sp>
+      <p:sp>
+        <p:nvSpPr>
+          <p:cNvPr id="38" name="Rectangle 37">
+            <a:extLst>
+              <a:ext uri="{FF2B5EF4-FFF2-40B4-BE49-F238E27FC236}">
+                <a16:creationId xmlns:a16="http://schemas.microsoft.com/office/drawing/2014/main" id="{8AD54DB8-C150-4290-85D6-F5B0262BFEEF}"/>
+              </a:ext>
+              <a:ext uri="{C183D7F6-B498-43B3-948B-1728B52AA6E4}">
+                <adec:decorative xmlns:adec="http://schemas.microsoft.com/office/drawing/2017/decorative" val="1"/>
+              </a:ext>
+            </a:extLst>
+          </p:cNvPr>
+          <p:cNvSpPr>
+            <a:spLocks noGrp="1" noRot="1" noChangeAspect="1" noMove="1" noResize="1" noEditPoints="1" noAdjustHandles="1" noChangeArrowheads="1" noChangeShapeType="1" noTextEdit="1"/>
+          </p:cNvSpPr>
+          <p:nvPr>
+            <p:extLst>
+              <p:ext uri="{386F3935-93C4-4BCD-93E2-E3B085C9AB24}">
+                <p16:designElem xmlns:p16="http://schemas.microsoft.com/office/powerpoint/2015/main" val="1"/>
+              </p:ext>
+            </p:extLst>
+          </p:nvPr>
+        </p:nvSpPr>
+        <p:spPr>
+          <a:xfrm>
+            <a:off x="446534" y="3085765"/>
+            <a:ext cx="11262866" cy="3304800"/>
+          </a:xfrm>
+          <a:prstGeom prst="rect">
+            <a:avLst/>
+          </a:prstGeom>
+          <a:solidFill>
+            <a:schemeClr val="accent1"/>
+          </a:solidFill>
+          <a:ln>
+            <a:noFill/>
+          </a:ln>
+          <a:effectLst/>
+        </p:spPr>
+        <p:style>
+          <a:lnRef idx="1">
+            <a:schemeClr val="accent1"/>
+          </a:lnRef>
+          <a:fillRef idx="3">
+            <a:schemeClr val="accent1"/>
+          </a:fillRef>
+          <a:effectRef idx="2">
+            <a:schemeClr val="accent1"/>
+          </a:effectRef>
+          <a:fontRef idx="minor">
+            <a:schemeClr val="lt1"/>
+          </a:fontRef>
+        </p:style>
+      </p:sp>
+      <p:sp useBgFill="1">
+        <p:nvSpPr>
+          <p:cNvPr id="40" name="Rectangle 39">
+            <a:extLst>
+              <a:ext uri="{FF2B5EF4-FFF2-40B4-BE49-F238E27FC236}">
+                <a16:creationId xmlns:a16="http://schemas.microsoft.com/office/drawing/2014/main" id="{379F11E2-8BA5-4C5C-AE7C-361E5EA011FF}"/>
+              </a:ext>
+              <a:ext uri="{C183D7F6-B498-43B3-948B-1728B52AA6E4}">
+                <adec:decorative xmlns:adec="http://schemas.microsoft.com/office/drawing/2017/decorative" val="1"/>
+              </a:ext>
+            </a:extLst>
+          </p:cNvPr>
+          <p:cNvSpPr>
+            <a:spLocks noGrp="1" noRot="1" noChangeAspect="1" noMove="1" noResize="1" noEditPoints="1" noAdjustHandles="1" noChangeArrowheads="1" noChangeShapeType="1" noTextEdit="1"/>
+          </p:cNvSpPr>
+          <p:nvPr>
+            <p:extLst>
+              <p:ext uri="{386F3935-93C4-4BCD-93E2-E3B085C9AB24}">
+                <p16:designElem xmlns:p16="http://schemas.microsoft.com/office/powerpoint/2015/main" val="1"/>
+              </p:ext>
+            </p:extLst>
+          </p:nvPr>
+        </p:nvSpPr>
+        <p:spPr>
+          <a:xfrm>
+            <a:off x="0" y="1"/>
+            <a:ext cx="12191999" cy="6858000"/>
+          </a:xfrm>
+          <a:prstGeom prst="rect">
+            <a:avLst/>
+          </a:prstGeom>
+          <a:ln>
+            <a:noFill/>
+          </a:ln>
+        </p:spPr>
+        <p:style>
+          <a:lnRef idx="2">
+            <a:schemeClr val="accent1">
+              <a:shade val="50000"/>
+            </a:schemeClr>
+          </a:lnRef>
+          <a:fillRef idx="1">
+            <a:schemeClr val="accent1"/>
+          </a:fillRef>
+          <a:effectRef idx="0">
+            <a:schemeClr val="accent1"/>
+          </a:effectRef>
+          <a:fontRef idx="minor">
+            <a:schemeClr val="lt1"/>
+          </a:fontRef>
+        </p:style>
+        <p:txBody>
+          <a:bodyPr rtlCol="0" anchor="ctr"/>
+          <a:lstStyle/>
+          <a:p>
+            <a:pPr algn="ctr"/>
+            <a:endParaRPr lang="en-US"/>
+          </a:p>
+        </p:txBody>
+      </p:sp>
+      <p:pic>
+        <p:nvPicPr>
+          <p:cNvPr id="6" name="Grafik 5">
+            <a:extLst>
+              <a:ext uri="{FF2B5EF4-FFF2-40B4-BE49-F238E27FC236}">
+                <a16:creationId xmlns:a16="http://schemas.microsoft.com/office/drawing/2014/main" id="{72EA7E18-3D88-A852-0D32-2BF964766F48}"/>
+              </a:ext>
+            </a:extLst>
+          </p:cNvPr>
+          <p:cNvPicPr>
+            <a:picLocks noChangeAspect="1"/>
+          </p:cNvPicPr>
+          <p:nvPr/>
+        </p:nvPicPr>
+        <p:blipFill>
+          <a:blip r:embed="rId3"/>
+          <a:srcRect t="4576" r="2" b="1672"/>
+          <a:stretch>
+            <a:fillRect/>
+          </a:stretch>
+        </p:blipFill>
+        <p:spPr>
+          <a:xfrm>
+            <a:off x="446534" y="723899"/>
+            <a:ext cx="7498616" cy="5676901"/>
+          </a:xfrm>
+          <a:prstGeom prst="rect">
+            <a:avLst/>
+          </a:prstGeom>
+        </p:spPr>
+      </p:pic>
+      <p:sp>
+        <p:nvSpPr>
+          <p:cNvPr id="42" name="Rectangle 41">
+            <a:extLst>
+              <a:ext uri="{FF2B5EF4-FFF2-40B4-BE49-F238E27FC236}">
+                <a16:creationId xmlns:a16="http://schemas.microsoft.com/office/drawing/2014/main" id="{7C00E1DA-EC7C-40FC-95E3-11FDCD2E4291}"/>
+              </a:ext>
+              <a:ext uri="{C183D7F6-B498-43B3-948B-1728B52AA6E4}">
+                <adec:decorative xmlns:adec="http://schemas.microsoft.com/office/drawing/2017/decorative" val="1"/>
+              </a:ext>
+            </a:extLst>
+          </p:cNvPr>
+          <p:cNvSpPr>
+            <a:spLocks noGrp="1" noRot="1" noChangeAspect="1" noMove="1" noResize="1" noEditPoints="1" noAdjustHandles="1" noChangeArrowheads="1" noChangeShapeType="1" noTextEdit="1"/>
+          </p:cNvSpPr>
+          <p:nvPr>
+            <p:extLst>
+              <p:ext uri="{386F3935-93C4-4BCD-93E2-E3B085C9AB24}">
+                <p16:designElem xmlns:p16="http://schemas.microsoft.com/office/powerpoint/2015/main" val="1"/>
+              </p:ext>
+            </p:extLst>
+          </p:nvPr>
+        </p:nvSpPr>
+        <p:spPr>
+          <a:xfrm>
+            <a:off x="8042147" y="723899"/>
+            <a:ext cx="3703320" cy="5666666"/>
+          </a:xfrm>
+          <a:prstGeom prst="rect">
+            <a:avLst/>
+          </a:prstGeom>
+          <a:solidFill>
+            <a:schemeClr val="accent1"/>
+          </a:solidFill>
+          <a:ln>
+            <a:noFill/>
+          </a:ln>
+          <a:effectLst/>
+        </p:spPr>
+        <p:style>
+          <a:lnRef idx="1">
+            <a:schemeClr val="accent1"/>
+          </a:lnRef>
+          <a:fillRef idx="3">
+            <a:schemeClr val="accent1"/>
+          </a:fillRef>
+          <a:effectRef idx="2">
+            <a:schemeClr val="accent1"/>
+          </a:effectRef>
+          <a:fontRef idx="minor">
+            <a:schemeClr val="lt1"/>
+          </a:fontRef>
+        </p:style>
+      </p:sp>
+      <p:sp>
+        <p:nvSpPr>
           <p:cNvPr id="2" name="Titel 1">
             <a:extLst>
               <a:ext uri="{FF2B5EF4-FFF2-40B4-BE49-F238E27FC236}">
-                <a16:creationId xmlns:a16="http://schemas.microsoft.com/office/drawing/2014/main" id="{77F35C1F-972A-C941-35DE-AF62475894C6}"/>
+                <a16:creationId xmlns:a16="http://schemas.microsoft.com/office/drawing/2014/main" id="{176DFBAE-5471-E50C-F7BA-BA95A0C276DF}"/>
               </a:ext>
             </a:extLst>
           </p:cNvPr>
@@ -11496,63 +13078,324 @@
             <p:ph type="title"/>
           </p:nvPr>
         </p:nvSpPr>
-        <p:spPr/>
+        <p:spPr>
+          <a:xfrm>
+            <a:off x="8296275" y="1419225"/>
+            <a:ext cx="3081576" cy="2085869"/>
+          </a:xfrm>
+        </p:spPr>
         <p:txBody>
-          <a:bodyPr rtlCol="0"/>
+          <a:bodyPr vert="horz" lIns="91440" tIns="45720" rIns="91440" bIns="45720" rtlCol="0" anchor="b">
+            <a:normAutofit/>
+          </a:bodyPr>
           <a:lstStyle/>
           <a:p>
-            <a:pPr rtl="0"/>
             <a:r>
-              <a:rPr lang="de-DE" dirty="0"/>
-              <a:t>Interpretation der Ergebnisse</a:t>
+              <a:rPr lang="en-US" sz="3600">
+                <a:solidFill>
+                  <a:srgbClr val="FFFFFF"/>
+                </a:solidFill>
+              </a:rPr>
+              <a:t>Q_iI</a:t>
             </a:r>
+            <a:endParaRPr lang="en-US" sz="3600" dirty="0">
+              <a:solidFill>
+                <a:srgbClr val="FFFFFF"/>
+              </a:solidFill>
+            </a:endParaRPr>
           </a:p>
         </p:txBody>
       </p:sp>
-      <p:sp>
-        <p:nvSpPr>
-          <p:cNvPr id="6" name="Inhaltsplatzhalter 5">
+      <p:grpSp>
+        <p:nvGrpSpPr>
+          <p:cNvPr id="44" name="Group 43">
             <a:extLst>
               <a:ext uri="{FF2B5EF4-FFF2-40B4-BE49-F238E27FC236}">
-                <a16:creationId xmlns:a16="http://schemas.microsoft.com/office/drawing/2014/main" id="{AEBB9406-CC1C-8F1C-DA12-7C6E38358CBB}"/>
+                <a16:creationId xmlns:a16="http://schemas.microsoft.com/office/drawing/2014/main" id="{9A421166-2996-41A7-B094-AE5316F347DD}"/>
+              </a:ext>
+              <a:ext uri="{C183D7F6-B498-43B3-948B-1728B52AA6E4}">
+                <adec:decorative xmlns:adec="http://schemas.microsoft.com/office/drawing/2017/decorative" val="1"/>
               </a:ext>
             </a:extLst>
           </p:cNvPr>
-          <p:cNvSpPr>
-            <a:spLocks noGrp="1"/>
-          </p:cNvSpPr>
-          <p:nvPr>
-            <p:ph sz="half" idx="2"/>
-          </p:nvPr>
-        </p:nvSpPr>
-        <p:spPr>
+          <p:cNvGrpSpPr>
+            <a:grpSpLocks noGrp="1" noUngrp="1" noRot="1" noChangeAspect="1" noMove="1" noResize="1"/>
+          </p:cNvGrpSpPr>
+          <p:nvPr>
+            <p:extLst>
+              <p:ext uri="{386F3935-93C4-4BCD-93E2-E3B085C9AB24}">
+                <p16:designElem xmlns:p16="http://schemas.microsoft.com/office/powerpoint/2015/main" val="1"/>
+              </p:ext>
+            </p:extLst>
+          </p:nvPr>
+        </p:nvGrpSpPr>
+        <p:grpSpPr>
           <a:xfrm>
-            <a:off x="581193" y="2228003"/>
-            <a:ext cx="11029616" cy="3633047"/>
+            <a:off x="446534" y="453643"/>
+            <a:ext cx="11298933" cy="98554"/>
+            <a:chOff x="446534" y="453643"/>
+            <a:chExt cx="11298933" cy="98554"/>
           </a:xfrm>
-        </p:spPr>
-        <p:txBody>
-          <a:bodyPr/>
-          <a:lstStyle/>
-          <a:p>
-            <a:r>
-              <a:rPr lang="de-AT" dirty="0" err="1"/>
-              <a:t>test</a:t>
-            </a:r>
-            <a:endParaRPr lang="de-AT" dirty="0"/>
-          </a:p>
-        </p:txBody>
-      </p:sp>
+        </p:grpSpPr>
+        <p:sp>
+          <p:nvSpPr>
+            <p:cNvPr id="45" name="Rectangle 44">
+              <a:extLst>
+                <a:ext uri="{FF2B5EF4-FFF2-40B4-BE49-F238E27FC236}">
+                  <a16:creationId xmlns:a16="http://schemas.microsoft.com/office/drawing/2014/main" id="{FDBB1B92-A3EB-43E4-8FAB-D20E8ED14CEF}"/>
+                </a:ext>
+                <a:ext uri="{C183D7F6-B498-43B3-948B-1728B52AA6E4}">
+                  <adec:decorative xmlns:adec="http://schemas.microsoft.com/office/drawing/2017/decorative" val="1"/>
+                </a:ext>
+              </a:extLst>
+            </p:cNvPr>
+            <p:cNvSpPr/>
+            <p:nvPr>
+              <p:extLst>
+                <p:ext uri="{386F3935-93C4-4BCD-93E2-E3B085C9AB24}">
+                  <p16:designElem xmlns:p16="http://schemas.microsoft.com/office/powerpoint/2015/main" val="1"/>
+                </p:ext>
+              </p:extLst>
+            </p:nvPr>
+          </p:nvSpPr>
+          <p:spPr>
+            <a:xfrm>
+              <a:off x="446534" y="457200"/>
+              <a:ext cx="3703320" cy="94997"/>
+            </a:xfrm>
+            <a:prstGeom prst="rect">
+              <a:avLst/>
+            </a:prstGeom>
+            <a:solidFill>
+              <a:schemeClr val="accent1"/>
+            </a:solidFill>
+            <a:ln>
+              <a:noFill/>
+            </a:ln>
+            <a:effectLst/>
+          </p:spPr>
+          <p:style>
+            <a:lnRef idx="1">
+              <a:schemeClr val="accent1"/>
+            </a:lnRef>
+            <a:fillRef idx="3">
+              <a:schemeClr val="accent1"/>
+            </a:fillRef>
+            <a:effectRef idx="2">
+              <a:schemeClr val="accent1"/>
+            </a:effectRef>
+            <a:fontRef idx="minor">
+              <a:schemeClr val="lt1"/>
+            </a:fontRef>
+          </p:style>
+        </p:sp>
+        <p:sp>
+          <p:nvSpPr>
+            <p:cNvPr id="46" name="Rectangle 45">
+              <a:extLst>
+                <a:ext uri="{FF2B5EF4-FFF2-40B4-BE49-F238E27FC236}">
+                  <a16:creationId xmlns:a16="http://schemas.microsoft.com/office/drawing/2014/main" id="{3F3972F4-FE7E-48EA-AAD8-9BE5750A6672}"/>
+                </a:ext>
+                <a:ext uri="{C183D7F6-B498-43B3-948B-1728B52AA6E4}">
+                  <adec:decorative xmlns:adec="http://schemas.microsoft.com/office/drawing/2017/decorative" val="1"/>
+                </a:ext>
+              </a:extLst>
+            </p:cNvPr>
+            <p:cNvSpPr/>
+            <p:nvPr>
+              <p:extLst>
+                <p:ext uri="{386F3935-93C4-4BCD-93E2-E3B085C9AB24}">
+                  <p16:designElem xmlns:p16="http://schemas.microsoft.com/office/powerpoint/2015/main" val="1"/>
+                </p:ext>
+              </p:extLst>
+            </p:nvPr>
+          </p:nvSpPr>
+          <p:spPr>
+            <a:xfrm>
+              <a:off x="8042147" y="453643"/>
+              <a:ext cx="3703320" cy="98554"/>
+            </a:xfrm>
+            <a:prstGeom prst="rect">
+              <a:avLst/>
+            </a:prstGeom>
+            <a:solidFill>
+              <a:schemeClr val="accent4"/>
+            </a:solidFill>
+            <a:ln>
+              <a:noFill/>
+            </a:ln>
+            <a:effectLst/>
+          </p:spPr>
+          <p:style>
+            <a:lnRef idx="1">
+              <a:schemeClr val="accent1"/>
+            </a:lnRef>
+            <a:fillRef idx="3">
+              <a:schemeClr val="accent1"/>
+            </a:fillRef>
+            <a:effectRef idx="2">
+              <a:schemeClr val="accent1"/>
+            </a:effectRef>
+            <a:fontRef idx="minor">
+              <a:schemeClr val="lt1"/>
+            </a:fontRef>
+          </p:style>
+        </p:sp>
+        <p:sp>
+          <p:nvSpPr>
+            <p:cNvPr id="47" name="Rectangle 46">
+              <a:extLst>
+                <a:ext uri="{FF2B5EF4-FFF2-40B4-BE49-F238E27FC236}">
+                  <a16:creationId xmlns:a16="http://schemas.microsoft.com/office/drawing/2014/main" id="{221614E5-870B-4D5E-A43B-8FF7E5323484}"/>
+                </a:ext>
+                <a:ext uri="{C183D7F6-B498-43B3-948B-1728B52AA6E4}">
+                  <adec:decorative xmlns:adec="http://schemas.microsoft.com/office/drawing/2017/decorative" val="1"/>
+                </a:ext>
+              </a:extLst>
+            </p:cNvPr>
+            <p:cNvSpPr/>
+            <p:nvPr>
+              <p:extLst>
+                <p:ext uri="{386F3935-93C4-4BCD-93E2-E3B085C9AB24}">
+                  <p16:designElem xmlns:p16="http://schemas.microsoft.com/office/powerpoint/2015/main" val="1"/>
+                </p:ext>
+              </p:extLst>
+            </p:nvPr>
+          </p:nvSpPr>
+          <p:spPr>
+            <a:xfrm>
+              <a:off x="4241830" y="457200"/>
+              <a:ext cx="3703320" cy="91440"/>
+            </a:xfrm>
+            <a:prstGeom prst="rect">
+              <a:avLst/>
+            </a:prstGeom>
+            <a:solidFill>
+              <a:schemeClr val="accent2"/>
+            </a:solidFill>
+            <a:ln>
+              <a:noFill/>
+            </a:ln>
+            <a:effectLst/>
+          </p:spPr>
+          <p:style>
+            <a:lnRef idx="1">
+              <a:schemeClr val="accent1"/>
+            </a:lnRef>
+            <a:fillRef idx="3">
+              <a:schemeClr val="accent1"/>
+            </a:fillRef>
+            <a:effectRef idx="2">
+              <a:schemeClr val="accent1"/>
+            </a:effectRef>
+            <a:fontRef idx="minor">
+              <a:schemeClr val="lt1"/>
+            </a:fontRef>
+          </p:style>
+        </p:sp>
+      </p:grpSp>
     </p:spTree>
     <p:extLst>
       <p:ext uri="{BB962C8B-B14F-4D97-AF65-F5344CB8AC3E}">
-        <p14:creationId xmlns:p14="http://schemas.microsoft.com/office/powerpoint/2010/main" val="1747102689"/>
+        <p14:creationId xmlns:p14="http://schemas.microsoft.com/office/powerpoint/2010/main" val="2045613644"/>
       </p:ext>
     </p:extLst>
   </p:cSld>
   <p:clrMapOvr>
     <a:masterClrMapping/>
   </p:clrMapOvr>
+  <p:timing>
+    <p:tnLst>
+      <p:par>
+        <p:cTn id="1" dur="indefinite" restart="never" nodeType="tmRoot">
+          <p:childTnLst>
+            <p:seq concurrent="1" nextAc="seek">
+              <p:cTn id="2" dur="indefinite" nodeType="mainSeq">
+                <p:childTnLst>
+                  <p:par>
+                    <p:cTn id="3" fill="hold">
+                      <p:stCondLst>
+                        <p:cond delay="indefinite"/>
+                        <p:cond evt="onBegin" delay="0">
+                          <p:tn val="2"/>
+                        </p:cond>
+                      </p:stCondLst>
+                      <p:childTnLst>
+                        <p:par>
+                          <p:cTn id="4" fill="hold">
+                            <p:stCondLst>
+                              <p:cond delay="0"/>
+                            </p:stCondLst>
+                            <p:childTnLst>
+                              <p:par>
+                                <p:cTn id="5" presetID="10" presetClass="entr" presetSubtype="0" fill="hold" grpId="0" nodeType="withEffect">
+                                  <p:stCondLst>
+                                    <p:cond delay="1000"/>
+                                  </p:stCondLst>
+                                  <p:iterate type="lt">
+                                    <p:tmPct val="10000"/>
+                                  </p:iterate>
+                                  <p:childTnLst>
+                                    <p:set>
+                                      <p:cBhvr>
+                                        <p:cTn id="6" dur="1" fill="hold">
+                                          <p:stCondLst>
+                                            <p:cond delay="0"/>
+                                          </p:stCondLst>
+                                        </p:cTn>
+                                        <p:tgtEl>
+                                          <p:spTgt spid="2"/>
+                                        </p:tgtEl>
+                                        <p:attrNameLst>
+                                          <p:attrName>style.visibility</p:attrName>
+                                        </p:attrNameLst>
+                                      </p:cBhvr>
+                                      <p:to>
+                                        <p:strVal val="visible"/>
+                                      </p:to>
+                                    </p:set>
+                                    <p:animEffect transition="in" filter="fade">
+                                      <p:cBhvr>
+                                        <p:cTn id="7" dur="400"/>
+                                        <p:tgtEl>
+                                          <p:spTgt spid="2"/>
+                                        </p:tgtEl>
+                                      </p:cBhvr>
+                                    </p:animEffect>
+                                  </p:childTnLst>
+                                </p:cTn>
+                              </p:par>
+                            </p:childTnLst>
+                          </p:cTn>
+                        </p:par>
+                      </p:childTnLst>
+                    </p:cTn>
+                  </p:par>
+                </p:childTnLst>
+              </p:cTn>
+              <p:prevCondLst>
+                <p:cond evt="onPrev" delay="0">
+                  <p:tgtEl>
+                    <p:sldTgt/>
+                  </p:tgtEl>
+                </p:cond>
+              </p:prevCondLst>
+              <p:nextCondLst>
+                <p:cond evt="onNext" delay="0">
+                  <p:tgtEl>
+                    <p:sldTgt/>
+                  </p:tgtEl>
+                </p:cond>
+              </p:nextCondLst>
+            </p:seq>
+          </p:childTnLst>
+        </p:cTn>
+      </p:par>
+    </p:tnLst>
+    <p:bldLst>
+      <p:bldP spid="2" grpId="0"/>
+    </p:bldLst>
+  </p:timing>
 </p:sld>
 </file>
 
@@ -12416,6 +14259,14 @@
 </file>
 
 <file path=customXml/item1.xml><?xml version="1.0" encoding="utf-8"?>
+<p:properties xmlns:p="http://schemas.microsoft.com/office/2006/metadata/properties" xmlns:xsi="http://www.w3.org/2001/XMLSchema-instance" xmlns:pc="http://schemas.microsoft.com/office/infopath/2007/PartnerControls">
+  <documentManagement>
+    <MediaServiceKeyPoints xmlns="71af3243-3dd4-4a8d-8c0d-dd76da1f02a5" xsi:nil="true"/>
+  </documentManagement>
+</p:properties>
+</file>
+
+<file path=customXml/item2.xml><?xml version="1.0" encoding="utf-8"?>
 <ct:contentTypeSchema xmlns:ct="http://schemas.microsoft.com/office/2006/metadata/contentType" xmlns:ma="http://schemas.microsoft.com/office/2006/metadata/properties/metaAttributes" ct:_="" ma:_="" ma:contentTypeName="Document" ma:contentTypeID="0x01010079F111ED35F8CC479449609E8A0923A6" ma:contentTypeVersion="11" ma:contentTypeDescription="Create a new document." ma:contentTypeScope="" ma:versionID="1c2eb7a32e66fb6e4260f3771546a5e2">
   <xsd:schema xmlns:xsd="http://www.w3.org/2001/XMLSchema" xmlns:xs="http://www.w3.org/2001/XMLSchema" xmlns:p="http://schemas.microsoft.com/office/2006/metadata/properties" xmlns:ns2="71af3243-3dd4-4a8d-8c0d-dd76da1f02a5" xmlns:ns3="16c05727-aa75-4e4a-9b5f-8a80a1165891" targetNamespace="http://schemas.microsoft.com/office/2006/metadata/properties" ma:root="true" ma:fieldsID="04e1f6479c48b08974ba73b5ca973489" ns2:_="" ns3:_="">
     <xsd:import namespace="71af3243-3dd4-4a8d-8c0d-dd76da1f02a5"/>
@@ -12626,14 +14477,6 @@
 </ct:contentTypeSchema>
 </file>
 
-<file path=customXml/item2.xml><?xml version="1.0" encoding="utf-8"?>
-<p:properties xmlns:p="http://schemas.microsoft.com/office/2006/metadata/properties" xmlns:xsi="http://www.w3.org/2001/XMLSchema-instance" xmlns:pc="http://schemas.microsoft.com/office/infopath/2007/PartnerControls">
-  <documentManagement>
-    <MediaServiceKeyPoints xmlns="71af3243-3dd4-4a8d-8c0d-dd76da1f02a5" xsi:nil="true"/>
-  </documentManagement>
-</p:properties>
-</file>
-
 <file path=customXml/item3.xml><?xml version="1.0" encoding="utf-8"?>
 <?mso-contentType ?>
 <FormTemplates xmlns="http://schemas.microsoft.com/sharepoint/v3/contenttype/forms">
@@ -12644,6 +14487,16 @@
 </file>
 
 <file path=customXml/itemProps1.xml><?xml version="1.0" encoding="utf-8"?>
+<ds:datastoreItem xmlns:ds="http://schemas.openxmlformats.org/officeDocument/2006/customXml" ds:itemID="{1EBC12AA-1C15-4500-BC9C-8EE83A441DE9}">
+  <ds:schemaRefs>
+    <ds:schemaRef ds:uri="http://schemas.microsoft.com/office/2006/metadata/properties"/>
+    <ds:schemaRef ds:uri="http://schemas.microsoft.com/office/infopath/2007/PartnerControls"/>
+    <ds:schemaRef ds:uri="71af3243-3dd4-4a8d-8c0d-dd76da1f02a5"/>
+  </ds:schemaRefs>
+</ds:datastoreItem>
+</file>
+
+<file path=customXml/itemProps2.xml><?xml version="1.0" encoding="utf-8"?>
 <ds:datastoreItem xmlns:ds="http://schemas.openxmlformats.org/officeDocument/2006/customXml" ds:itemID="{1F69AFF4-BB30-4BA0-AD22-82CC3C43276B}">
   <ds:schemaRefs>
     <ds:schemaRef ds:uri="http://schemas.microsoft.com/office/2006/metadata/contentType"/>
@@ -12662,16 +14515,6 @@
 </ds:datastoreItem>
 </file>
 
-<file path=customXml/itemProps2.xml><?xml version="1.0" encoding="utf-8"?>
-<ds:datastoreItem xmlns:ds="http://schemas.openxmlformats.org/officeDocument/2006/customXml" ds:itemID="{1EBC12AA-1C15-4500-BC9C-8EE83A441DE9}">
-  <ds:schemaRefs>
-    <ds:schemaRef ds:uri="http://schemas.microsoft.com/office/2006/metadata/properties"/>
-    <ds:schemaRef ds:uri="http://schemas.microsoft.com/office/infopath/2007/PartnerControls"/>
-    <ds:schemaRef ds:uri="71af3243-3dd4-4a8d-8c0d-dd76da1f02a5"/>
-  </ds:schemaRefs>
-</ds:datastoreItem>
-</file>
-
 <file path=customXml/itemProps3.xml><?xml version="1.0" encoding="utf-8"?>
 <ds:datastoreItem xmlns:ds="http://schemas.openxmlformats.org/officeDocument/2006/customXml" ds:itemID="{BA0CF3B2-1F0F-4FC5-8002-3E4869ABAD55}">
   <ds:schemaRefs>
